--- a/presentation/Доки_Аналитика_защита_и_тиражирование.pptx
+++ b/presentation/Доки_Аналитика_защита_и_тиражирование.pptx
@@ -23,6 +23,8 @@
     <p:sldId id="265" r:id="rId17"/>
     <p:sldId id="266" r:id="rId18"/>
     <p:sldId id="267" r:id="rId19"/>
+    <p:sldId id="268" r:id="rId20"/>
+    <p:sldId id="269" r:id="rId21"/>
   </p:sldIdLst>
   <p:sldSz cx="12192000" cy="6858000"/>
   <p:notesSz cx="6858000" cy="9144000"/>
@@ -6422,7 +6424,7 @@
           <a:lstStyle/>
           <a:p>
             <a:r>
-              <a:rPr sz="1300" b="0">
+              <a:rPr sz="1200" b="0">
                 <a:solidFill>
                   <a:srgbClr val="BFBFBF"/>
                 </a:solidFill>
@@ -6430,7 +6432,7 @@
                 <a:ea typeface="Verdana"/>
                 <a:cs typeface="Verdana"/>
               </a:rPr>
-              <a:t>2 гипотезы  ·  18 подключений  ·  оффер: 3 месяца безлимит бесплатно</a:t>
+              <a:t>2 гипотезы  ·  18 подключений  ·  ЭДО + ЭПД в одном продукте  ·  оффер: 3 месяца безлимит</a:t>
             </a:r>
           </a:p>
         </p:txBody>
@@ -6502,7 +6504,7 @@
                 <a:ea typeface="Verdana"/>
                 <a:cs typeface="Verdana"/>
               </a:rPr>
-              <a:t>Рекомендации для тиражирования</a:t>
+              <a:t>Оффер, с которым подключали</a:t>
             </a:r>
           </a:p>
         </p:txBody>
@@ -6514,7 +6516,7 @@
             <a:spLocks noGrp="1"/>
           </p:cNvSpPr>
           <p:nvPr>
-            <p:ph type="body" idx="13" sz="quarter"/>
+            <p:ph type="body" idx="14" sz="quarter"/>
           </p:nvPr>
         </p:nvSpPr>
         <p:spPr/>
@@ -6532,12 +6534,170 @@
         </p:nvSpPr>
         <p:spPr>
           <a:xfrm>
-            <a:off x="886968" y="1463040"/>
-            <a:ext cx="5212080" cy="2011680"/>
+            <a:off x="886968" y="1554480"/>
+            <a:ext cx="5029200" cy="3931920"/>
           </a:xfrm>
           <a:prstGeom prst="roundRect">
             <a:avLst>
-              <a:gd name="adj" fmla="val 8000"/>
+              <a:gd name="adj" fmla="val 10000"/>
+            </a:avLst>
+          </a:prstGeom>
+          <a:solidFill>
+            <a:srgbClr val="26A6E0"/>
+          </a:solidFill>
+          <a:ln>
+            <a:noFill/>
+          </a:ln>
+        </p:spPr>
+        <p:style>
+          <a:lnRef idx="1">
+            <a:schemeClr val="accent1"/>
+          </a:lnRef>
+          <a:fillRef idx="3">
+            <a:schemeClr val="accent1"/>
+          </a:fillRef>
+          <a:effectRef idx="2">
+            <a:schemeClr val="accent1"/>
+          </a:effectRef>
+          <a:fontRef idx="minor">
+            <a:schemeClr val="lt1"/>
+          </a:fontRef>
+        </p:style>
+        <p:txBody>
+          <a:bodyPr rtlCol="0" anchor="ctr"/>
+          <a:lstStyle/>
+          <a:p>
+            <a:pPr algn="ctr"/>
+          </a:p>
+        </p:txBody>
+      </p:sp>
+      <p:sp>
+        <p:nvSpPr>
+          <p:cNvPr id="5" name="TextBox 4"/>
+          <p:cNvSpPr txBox="1"/>
+          <p:nvPr/>
+        </p:nvSpPr>
+        <p:spPr>
+          <a:xfrm>
+            <a:off x="1188720" y="1920240"/>
+            <a:ext cx="4389120" cy="365760"/>
+          </a:xfrm>
+          <a:prstGeom prst="rect">
+            <a:avLst/>
+          </a:prstGeom>
+          <a:noFill/>
+        </p:spPr>
+        <p:txBody>
+          <a:bodyPr wrap="square" anchor="t">
+            <a:spAutoFit/>
+          </a:bodyPr>
+          <a:lstStyle/>
+          <a:p>
+            <a:pPr algn="l"/>
+            <a:r>
+              <a:rPr sz="1400" b="0">
+                <a:solidFill>
+                  <a:srgbClr val="FFFFFF"/>
+                </a:solidFill>
+                <a:latin typeface="Verdana"/>
+                <a:ea typeface="Verdana"/>
+                <a:cs typeface="Verdana"/>
+              </a:rPr>
+              <a:t>Промо на входе</a:t>
+            </a:r>
+          </a:p>
+        </p:txBody>
+      </p:sp>
+      <p:sp>
+        <p:nvSpPr>
+          <p:cNvPr id="6" name="TextBox 5"/>
+          <p:cNvSpPr txBox="1"/>
+          <p:nvPr/>
+        </p:nvSpPr>
+        <p:spPr>
+          <a:xfrm>
+            <a:off x="1188720" y="2377440"/>
+            <a:ext cx="4389120" cy="1097280"/>
+          </a:xfrm>
+          <a:prstGeom prst="rect">
+            <a:avLst/>
+          </a:prstGeom>
+          <a:noFill/>
+        </p:spPr>
+        <p:txBody>
+          <a:bodyPr wrap="square" anchor="t">
+            <a:spAutoFit/>
+          </a:bodyPr>
+          <a:lstStyle/>
+          <a:p>
+            <a:pPr algn="l"/>
+            <a:r>
+              <a:rPr sz="2800" b="1">
+                <a:solidFill>
+                  <a:srgbClr val="FFFFFF"/>
+                </a:solidFill>
+                <a:latin typeface="Verdana"/>
+                <a:ea typeface="Verdana"/>
+                <a:cs typeface="Verdana"/>
+              </a:rPr>
+              <a:t>3 месяца
+безлимит
+бесплатно</a:t>
+            </a:r>
+          </a:p>
+        </p:txBody>
+      </p:sp>
+      <p:sp>
+        <p:nvSpPr>
+          <p:cNvPr id="7" name="TextBox 6"/>
+          <p:cNvSpPr txBox="1"/>
+          <p:nvPr/>
+        </p:nvSpPr>
+        <p:spPr>
+          <a:xfrm>
+            <a:off x="1188720" y="3840480"/>
+            <a:ext cx="4389120" cy="1188720"/>
+          </a:xfrm>
+          <a:prstGeom prst="rect">
+            <a:avLst/>
+          </a:prstGeom>
+          <a:noFill/>
+        </p:spPr>
+        <p:txBody>
+          <a:bodyPr wrap="square" anchor="t">
+            <a:spAutoFit/>
+          </a:bodyPr>
+          <a:lstStyle/>
+          <a:p>
+            <a:pPr algn="l"/>
+            <a:r>
+              <a:rPr sz="1400" b="0">
+                <a:solidFill>
+                  <a:srgbClr val="FFFFFF"/>
+                </a:solidFill>
+                <a:latin typeface="Verdana"/>
+                <a:ea typeface="Verdana"/>
+                <a:cs typeface="Verdana"/>
+              </a:rPr>
+              <a:t>Клиент пробует сервис без оплаты пакета. Барьер входа снимается — проще закрыть первое подключение.</a:t>
+            </a:r>
+          </a:p>
+        </p:txBody>
+      </p:sp>
+      <p:sp>
+        <p:nvSpPr>
+          <p:cNvPr id="8" name="Rounded Rectangle 7"/>
+          <p:cNvSpPr/>
+          <p:nvPr/>
+        </p:nvSpPr>
+        <p:spPr>
+          <a:xfrm>
+            <a:off x="6126480" y="1554480"/>
+            <a:ext cx="5166360" cy="868680"/>
+          </a:xfrm>
+          <a:prstGeom prst="roundRect">
+            <a:avLst>
+              <a:gd name="adj" fmla="val 6000"/>
             </a:avLst>
           </a:prstGeom>
           <a:solidFill>
@@ -6569,40 +6729,16 @@
           </a:p>
         </p:txBody>
       </p:sp>
-      <p:pic>
-        <p:nvPicPr>
-          <p:cNvPr id="5" name="Picture 4" descr="icon_66.png"/>
-          <p:cNvPicPr>
-            <a:picLocks noChangeAspect="1"/>
-          </p:cNvPicPr>
-          <p:nvPr/>
-        </p:nvPicPr>
-        <p:blipFill>
-          <a:blip r:embed="rId2"/>
-          <a:stretch>
-            <a:fillRect/>
-          </a:stretch>
-        </p:blipFill>
-        <p:spPr>
-          <a:xfrm>
-            <a:off x="1088136" y="1965960"/>
-            <a:ext cx="640080" cy="640080"/>
-          </a:xfrm>
-          <a:prstGeom prst="rect">
-            <a:avLst/>
-          </a:prstGeom>
-        </p:spPr>
-      </p:pic>
-      <p:sp>
-        <p:nvSpPr>
-          <p:cNvPr id="6" name="TextBox 5"/>
+      <p:sp>
+        <p:nvSpPr>
+          <p:cNvPr id="9" name="TextBox 8"/>
           <p:cNvSpPr txBox="1"/>
           <p:nvPr/>
         </p:nvSpPr>
         <p:spPr>
           <a:xfrm>
-            <a:off x="1892808" y="1719072"/>
-            <a:ext cx="3977640" cy="365760"/>
+            <a:off x="6355080" y="1664208"/>
+            <a:ext cx="4754880" cy="256032"/>
           </a:xfrm>
           <a:prstGeom prst="rect">
             <a:avLst/>
@@ -6617,7 +6753,7 @@
           <a:p>
             <a:pPr algn="l"/>
             <a:r>
-              <a:rPr sz="1500" b="1">
+              <a:rPr sz="1300" b="1">
                 <a:solidFill>
                   <a:srgbClr val="26A6E0"/>
                 </a:solidFill>
@@ -6625,21 +6761,21 @@
                 <a:ea typeface="Verdana"/>
                 <a:cs typeface="Verdana"/>
               </a:rPr>
-              <a:t>Два канала сразу</a:t>
-            </a:r>
-          </a:p>
-        </p:txBody>
-      </p:sp>
-      <p:sp>
-        <p:nvSpPr>
-          <p:cNvPr id="7" name="TextBox 6"/>
+              <a:t>Зачем так делали</a:t>
+            </a:r>
+          </a:p>
+        </p:txBody>
+      </p:sp>
+      <p:sp>
+        <p:nvSpPr>
+          <p:cNvPr id="10" name="TextBox 9"/>
           <p:cNvSpPr txBox="1"/>
           <p:nvPr/>
         </p:nvSpPr>
         <p:spPr>
           <a:xfrm>
-            <a:off x="1892808" y="2148840"/>
-            <a:ext cx="3977640" cy="1143000"/>
+            <a:off x="6355080" y="1965960"/>
+            <a:ext cx="4754880" cy="365760"/>
           </a:xfrm>
           <a:prstGeom prst="rect">
             <a:avLst/>
@@ -6654,7 +6790,7 @@
           <a:p>
             <a:pPr algn="l"/>
             <a:r>
-              <a:rPr sz="1300" b="0">
+              <a:rPr sz="1200" b="0">
                 <a:solidFill>
                   <a:srgbClr val="FFFFFF"/>
                 </a:solidFill>
@@ -6662,25 +6798,25 @@
                 <a:ea typeface="Verdana"/>
                 <a:cs typeface="Verdana"/>
               </a:rPr>
-              <a:t>Вести параллельно: (1) база ЭПД → Доки, (2) скрипт связки сервисов.</a:t>
-            </a:r>
-          </a:p>
-        </p:txBody>
-      </p:sp>
-      <p:sp>
-        <p:nvSpPr>
-          <p:cNvPr id="8" name="Rounded Rectangle 7"/>
+              <a:t>Быстро проверить спрос и набрать практику подключений.</a:t>
+            </a:r>
+          </a:p>
+        </p:txBody>
+      </p:sp>
+      <p:sp>
+        <p:nvSpPr>
+          <p:cNvPr id="11" name="Rounded Rectangle 10"/>
           <p:cNvSpPr/>
           <p:nvPr/>
         </p:nvSpPr>
         <p:spPr>
           <a:xfrm>
-            <a:off x="6327648" y="1463040"/>
-            <a:ext cx="5212080" cy="2011680"/>
+            <a:off x="6126480" y="2514600"/>
+            <a:ext cx="5166360" cy="868680"/>
           </a:xfrm>
           <a:prstGeom prst="roundRect">
             <a:avLst>
-              <a:gd name="adj" fmla="val 8000"/>
+              <a:gd name="adj" fmla="val 6000"/>
             </a:avLst>
           </a:prstGeom>
           <a:solidFill>
@@ -6712,40 +6848,16 @@
           </a:p>
         </p:txBody>
       </p:sp>
-      <p:pic>
-        <p:nvPicPr>
-          <p:cNvPr id="9" name="Picture 8" descr="icon_54.png"/>
-          <p:cNvPicPr>
-            <a:picLocks noChangeAspect="1"/>
-          </p:cNvPicPr>
-          <p:nvPr/>
-        </p:nvPicPr>
-        <p:blipFill>
-          <a:blip r:embed="rId3"/>
-          <a:stretch>
-            <a:fillRect/>
-          </a:stretch>
-        </p:blipFill>
-        <p:spPr>
-          <a:xfrm>
-            <a:off x="6528816" y="1965960"/>
-            <a:ext cx="640080" cy="640080"/>
-          </a:xfrm>
-          <a:prstGeom prst="rect">
-            <a:avLst/>
-          </a:prstGeom>
-        </p:spPr>
-      </p:pic>
-      <p:sp>
-        <p:nvSpPr>
-          <p:cNvPr id="10" name="TextBox 9"/>
+      <p:sp>
+        <p:nvSpPr>
+          <p:cNvPr id="12" name="TextBox 11"/>
           <p:cNvSpPr txBox="1"/>
           <p:nvPr/>
         </p:nvSpPr>
         <p:spPr>
           <a:xfrm>
-            <a:off x="7333488" y="1719072"/>
-            <a:ext cx="3977640" cy="365760"/>
+            <a:off x="6355080" y="2624328"/>
+            <a:ext cx="4754880" cy="256032"/>
           </a:xfrm>
           <a:prstGeom prst="rect">
             <a:avLst/>
@@ -6760,7 +6872,7 @@
           <a:p>
             <a:pPr algn="l"/>
             <a:r>
-              <a:rPr sz="1500" b="1">
+              <a:rPr sz="1300" b="1">
                 <a:solidFill>
                   <a:srgbClr val="26A6E0"/>
                 </a:solidFill>
@@ -6768,21 +6880,21 @@
                 <a:ea typeface="Verdana"/>
                 <a:cs typeface="Verdana"/>
               </a:rPr>
-              <a:t>Единый оффер</a:t>
-            </a:r>
-          </a:p>
-        </p:txBody>
-      </p:sp>
-      <p:sp>
-        <p:nvSpPr>
-          <p:cNvPr id="11" name="TextBox 10"/>
+              <a:t>Что важно дальше</a:t>
+            </a:r>
+          </a:p>
+        </p:txBody>
+      </p:sp>
+      <p:sp>
+        <p:nvSpPr>
+          <p:cNvPr id="13" name="TextBox 12"/>
           <p:cNvSpPr txBox="1"/>
           <p:nvPr/>
         </p:nvSpPr>
         <p:spPr>
           <a:xfrm>
-            <a:off x="7333488" y="2148840"/>
-            <a:ext cx="3977640" cy="1143000"/>
+            <a:off x="6355080" y="2926080"/>
+            <a:ext cx="4754880" cy="365760"/>
           </a:xfrm>
           <a:prstGeom prst="rect">
             <a:avLst/>
@@ -6797,7 +6909,7 @@
           <a:p>
             <a:pPr algn="l"/>
             <a:r>
-              <a:rPr sz="1300" b="0">
+              <a:rPr sz="1200" b="0">
                 <a:solidFill>
                   <a:srgbClr val="FFFFFF"/>
                 </a:solidFill>
@@ -6805,25 +6917,25 @@
                 <a:ea typeface="Verdana"/>
                 <a:cs typeface="Verdana"/>
               </a:rPr>
-              <a:t>Сохранить 3 месяца безлимита как стандарт входа, но сразу ставить задачу на продление.</a:t>
-            </a:r>
-          </a:p>
-        </p:txBody>
-      </p:sp>
-      <p:sp>
-        <p:nvSpPr>
-          <p:cNvPr id="12" name="Rounded Rectangle 11"/>
+              <a:t>Отслеживать переход на платный тариф после 3 месяцев.</a:t>
+            </a:r>
+          </a:p>
+        </p:txBody>
+      </p:sp>
+      <p:sp>
+        <p:nvSpPr>
+          <p:cNvPr id="14" name="Rounded Rectangle 13"/>
           <p:cNvSpPr/>
           <p:nvPr/>
         </p:nvSpPr>
         <p:spPr>
           <a:xfrm>
-            <a:off x="886968" y="3657600"/>
-            <a:ext cx="5212080" cy="2011680"/>
+            <a:off x="6126480" y="3474720"/>
+            <a:ext cx="5166360" cy="868680"/>
           </a:xfrm>
           <a:prstGeom prst="roundRect">
             <a:avLst>
-              <a:gd name="adj" fmla="val 8000"/>
+              <a:gd name="adj" fmla="val 6000"/>
             </a:avLst>
           </a:prstGeom>
           <a:solidFill>
@@ -6855,40 +6967,16 @@
           </a:p>
         </p:txBody>
       </p:sp>
-      <p:pic>
-        <p:nvPicPr>
-          <p:cNvPr id="13" name="Picture 12" descr="icon_55.png"/>
-          <p:cNvPicPr>
-            <a:picLocks noChangeAspect="1"/>
-          </p:cNvPicPr>
-          <p:nvPr/>
-        </p:nvPicPr>
-        <p:blipFill>
-          <a:blip r:embed="rId4"/>
-          <a:stretch>
-            <a:fillRect/>
-          </a:stretch>
-        </p:blipFill>
-        <p:spPr>
-          <a:xfrm>
-            <a:off x="1088136" y="4160520"/>
-            <a:ext cx="640080" cy="640080"/>
-          </a:xfrm>
-          <a:prstGeom prst="rect">
-            <a:avLst/>
-          </a:prstGeom>
-        </p:spPr>
-      </p:pic>
-      <p:sp>
-        <p:nvSpPr>
-          <p:cNvPr id="14" name="TextBox 13"/>
+      <p:sp>
+        <p:nvSpPr>
+          <p:cNvPr id="15" name="TextBox 14"/>
           <p:cNvSpPr txBox="1"/>
           <p:nvPr/>
         </p:nvSpPr>
         <p:spPr>
           <a:xfrm>
-            <a:off x="1892808" y="3913632"/>
-            <a:ext cx="3977640" cy="365760"/>
+            <a:off x="6355080" y="3584448"/>
+            <a:ext cx="4754880" cy="256032"/>
           </a:xfrm>
           <a:prstGeom prst="rect">
             <a:avLst/>
@@ -6903,7 +6991,7 @@
           <a:p>
             <a:pPr algn="l"/>
             <a:r>
-              <a:rPr sz="1500" b="1">
+              <a:rPr sz="1300" b="1">
                 <a:solidFill>
                   <a:srgbClr val="26A6E0"/>
                 </a:solidFill>
@@ -6911,21 +6999,21 @@
                 <a:ea typeface="Verdana"/>
                 <a:cs typeface="Verdana"/>
               </a:rPr>
-              <a:t>Передать пакет as-is</a:t>
-            </a:r>
-          </a:p>
-        </p:txBody>
-      </p:sp>
-      <p:sp>
-        <p:nvSpPr>
-          <p:cNvPr id="15" name="TextBox 14"/>
+              <a:t>Риск</a:t>
+            </a:r>
+          </a:p>
+        </p:txBody>
+      </p:sp>
+      <p:sp>
+        <p:nvSpPr>
+          <p:cNvPr id="16" name="TextBox 15"/>
           <p:cNvSpPr txBox="1"/>
           <p:nvPr/>
         </p:nvSpPr>
         <p:spPr>
           <a:xfrm>
-            <a:off x="1892808" y="4343400"/>
-            <a:ext cx="3977640" cy="1143000"/>
+            <a:off x="6355080" y="3886200"/>
+            <a:ext cx="4754880" cy="365760"/>
           </a:xfrm>
           <a:prstGeom prst="rect">
             <a:avLst/>
@@ -6940,7 +7028,7 @@
           <a:p>
             <a:pPr algn="l"/>
             <a:r>
-              <a:rPr sz="1300" b="0">
+              <a:rPr sz="1200" b="0">
                 <a:solidFill>
                   <a:srgbClr val="FFFFFF"/>
                 </a:solidFill>
@@ -6948,25 +7036,25 @@
                 <a:ea typeface="Verdana"/>
                 <a:cs typeface="Verdana"/>
               </a:rPr>
-              <a:t>Скрипты, сравнения, рассылки и КП — базовый набор для новой группы без доработки «с нуля».</a:t>
-            </a:r>
-          </a:p>
-        </p:txBody>
-      </p:sp>
-      <p:sp>
-        <p:nvSpPr>
-          <p:cNvPr id="16" name="Rounded Rectangle 15"/>
+              <a:t>Без контроля продлений «бесплатный старт» не превратится в выручку.</a:t>
+            </a:r>
+          </a:p>
+        </p:txBody>
+      </p:sp>
+      <p:sp>
+        <p:nvSpPr>
+          <p:cNvPr id="17" name="Rounded Rectangle 16"/>
           <p:cNvSpPr/>
           <p:nvPr/>
         </p:nvSpPr>
         <p:spPr>
           <a:xfrm>
-            <a:off x="6327648" y="3657600"/>
-            <a:ext cx="5212080" cy="2011680"/>
+            <a:off x="6126480" y="4434840"/>
+            <a:ext cx="5166360" cy="868680"/>
           </a:xfrm>
           <a:prstGeom prst="roundRect">
             <a:avLst>
-              <a:gd name="adj" fmla="val 8000"/>
+              <a:gd name="adj" fmla="val 6000"/>
             </a:avLst>
           </a:prstGeom>
           <a:solidFill>
@@ -6998,30 +7086,6 @@
           </a:p>
         </p:txBody>
       </p:sp>
-      <p:pic>
-        <p:nvPicPr>
-          <p:cNvPr id="17" name="Picture 16" descr="icon_64.png"/>
-          <p:cNvPicPr>
-            <a:picLocks noChangeAspect="1"/>
-          </p:cNvPicPr>
-          <p:nvPr/>
-        </p:nvPicPr>
-        <p:blipFill>
-          <a:blip r:embed="rId5"/>
-          <a:stretch>
-            <a:fillRect/>
-          </a:stretch>
-        </p:blipFill>
-        <p:spPr>
-          <a:xfrm>
-            <a:off x="6528816" y="4160520"/>
-            <a:ext cx="640080" cy="640080"/>
-          </a:xfrm>
-          <a:prstGeom prst="rect">
-            <a:avLst/>
-          </a:prstGeom>
-        </p:spPr>
-      </p:pic>
       <p:sp>
         <p:nvSpPr>
           <p:cNvPr id="18" name="TextBox 17"/>
@@ -7030,8 +7094,8 @@
         </p:nvSpPr>
         <p:spPr>
           <a:xfrm>
-            <a:off x="7333488" y="3913632"/>
-            <a:ext cx="3977640" cy="365760"/>
+            <a:off x="6355080" y="4544568"/>
+            <a:ext cx="4754880" cy="256032"/>
           </a:xfrm>
           <a:prstGeom prst="rect">
             <a:avLst/>
@@ -7046,7 +7110,7 @@
           <a:p>
             <a:pPr algn="l"/>
             <a:r>
-              <a:rPr sz="1500" b="1">
+              <a:rPr sz="1300" b="1">
                 <a:solidFill>
                   <a:srgbClr val="26A6E0"/>
                 </a:solidFill>
@@ -7054,7 +7118,7 @@
                 <a:ea typeface="Verdana"/>
                 <a:cs typeface="Verdana"/>
               </a:rPr>
-              <a:t>Добавить контроль воронки</a:t>
+              <a:t>Для тиражирования</a:t>
             </a:r>
           </a:p>
         </p:txBody>
@@ -7067,8 +7131,8 @@
         </p:nvSpPr>
         <p:spPr>
           <a:xfrm>
-            <a:off x="7333488" y="4343400"/>
-            <a:ext cx="3977640" cy="1143000"/>
+            <a:off x="6355080" y="4846320"/>
+            <a:ext cx="4754880" cy="365760"/>
           </a:xfrm>
           <a:prstGeom prst="rect">
             <a:avLst/>
@@ -7083,7 +7147,7 @@
           <a:p>
             <a:pPr algn="l"/>
             <a:r>
-              <a:rPr sz="1300" b="0">
+              <a:rPr sz="1200" b="0">
                 <a:solidFill>
                   <a:srgbClr val="FFFFFF"/>
                 </a:solidFill>
@@ -7091,7 +7155,7 @@
                 <a:ea typeface="Verdana"/>
                 <a:cs typeface="Verdana"/>
               </a:rPr>
-              <a:t>Фиксировать: касания → демо → подключения → использование → оплата после пробного периода.</a:t>
+              <a:t>Оффер оставить, но добавить KPI по оплате после пробного периода.</a:t>
             </a:r>
           </a:p>
         </p:txBody>
@@ -7131,7 +7195,7 @@
           <a:p>
             <a:pPr algn="l"/>
             <a:r>
-              <a:rPr sz="2400" b="1">
+              <a:rPr sz="2600" b="1">
                 <a:solidFill>
                   <a:srgbClr val="FFFFFF"/>
                 </a:solidFill>
@@ -7139,7 +7203,7 @@
                 <a:ea typeface="Verdana"/>
                 <a:cs typeface="Verdana"/>
               </a:rPr>
-              <a:t>Каких данных не хватает для полной защиты</a:t>
+              <a:t>Выводы по проекту</a:t>
             </a:r>
           </a:p>
         </p:txBody>
@@ -7163,51 +7227,14 @@
       </p:sp>
       <p:sp>
         <p:nvSpPr>
-          <p:cNvPr id="4" name="TextBox 3"/>
-          <p:cNvSpPr txBox="1"/>
-          <p:nvPr/>
-        </p:nvSpPr>
-        <p:spPr>
-          <a:xfrm>
-            <a:off x="886968" y="1325880"/>
-            <a:ext cx="10424160" cy="411480"/>
-          </a:xfrm>
-          <a:prstGeom prst="rect">
-            <a:avLst/>
-          </a:prstGeom>
-          <a:noFill/>
-        </p:spPr>
-        <p:txBody>
-          <a:bodyPr wrap="square" anchor="t">
-            <a:spAutoFit/>
-          </a:bodyPr>
-          <a:lstStyle/>
-          <a:p>
-            <a:pPr algn="l"/>
-            <a:r>
-              <a:rPr sz="1300" b="0">
-                <a:solidFill>
-                  <a:srgbClr val="BFBFBF"/>
-                </a:solidFill>
-                <a:latin typeface="Verdana"/>
-                <a:ea typeface="Verdana"/>
-                <a:cs typeface="Verdana"/>
-              </a:rPr>
-              <a:t>Ниже — вопросы, которые усилят защиту и передачу. Если данные есть — добавим в презентацию.</a:t>
-            </a:r>
-          </a:p>
-        </p:txBody>
-      </p:sp>
-      <p:sp>
-        <p:nvSpPr>
-          <p:cNvPr id="5" name="Rounded Rectangle 4"/>
+          <p:cNvPr id="4" name="Rounded Rectangle 3"/>
           <p:cNvSpPr/>
           <p:nvPr/>
         </p:nvSpPr>
         <p:spPr>
           <a:xfrm>
-            <a:off x="886968" y="1828800"/>
-            <a:ext cx="5212080" cy="1143000"/>
+            <a:off x="886968" y="1417320"/>
+            <a:ext cx="10424160" cy="914400"/>
           </a:xfrm>
           <a:prstGeom prst="roundRect">
             <a:avLst>
@@ -7245,14 +7272,57 @@
       </p:sp>
       <p:sp>
         <p:nvSpPr>
+          <p:cNvPr id="5" name="Oval 4"/>
+          <p:cNvSpPr/>
+          <p:nvPr/>
+        </p:nvSpPr>
+        <p:spPr>
+          <a:xfrm>
+            <a:off x="1097280" y="1673352"/>
+            <a:ext cx="411480" cy="411480"/>
+          </a:xfrm>
+          <a:prstGeom prst="ellipse">
+            <a:avLst/>
+          </a:prstGeom>
+          <a:solidFill>
+            <a:srgbClr val="26A6E0"/>
+          </a:solidFill>
+          <a:ln>
+            <a:noFill/>
+          </a:ln>
+        </p:spPr>
+        <p:style>
+          <a:lnRef idx="1">
+            <a:schemeClr val="accent1"/>
+          </a:lnRef>
+          <a:fillRef idx="3">
+            <a:schemeClr val="accent1"/>
+          </a:fillRef>
+          <a:effectRef idx="2">
+            <a:schemeClr val="accent1"/>
+          </a:effectRef>
+          <a:fontRef idx="minor">
+            <a:schemeClr val="lt1"/>
+          </a:fontRef>
+        </p:style>
+        <p:txBody>
+          <a:bodyPr rtlCol="0" anchor="ctr"/>
+          <a:lstStyle/>
+          <a:p>
+            <a:pPr algn="ctr"/>
+          </a:p>
+        </p:txBody>
+      </p:sp>
+      <p:sp>
+        <p:nvSpPr>
           <p:cNvPr id="6" name="TextBox 5"/>
           <p:cNvSpPr txBox="1"/>
           <p:nvPr/>
         </p:nvSpPr>
         <p:spPr>
           <a:xfrm>
-            <a:off x="1115568" y="1965960"/>
-            <a:ext cx="4754880" cy="274320"/>
+            <a:off x="1097280" y="1673352"/>
+            <a:ext cx="411480" cy="411480"/>
           </a:xfrm>
           <a:prstGeom prst="rect">
             <a:avLst/>
@@ -7260,22 +7330,22 @@
           <a:noFill/>
         </p:spPr>
         <p:txBody>
-          <a:bodyPr wrap="square" anchor="t">
+          <a:bodyPr wrap="square" anchor="ctr">
             <a:spAutoFit/>
           </a:bodyPr>
           <a:lstStyle/>
           <a:p>
-            <a:pPr algn="l"/>
-            <a:r>
-              <a:rPr sz="1300" b="1">
-                <a:solidFill>
-                  <a:srgbClr val="26A6E0"/>
+            <a:pPr algn="ctr"/>
+            <a:r>
+              <a:rPr sz="1400" b="1">
+                <a:solidFill>
+                  <a:srgbClr val="FFFFFF"/>
                 </a:solidFill>
                 <a:latin typeface="Verdana"/>
                 <a:ea typeface="Verdana"/>
                 <a:cs typeface="Verdana"/>
               </a:rPr>
-              <a:t>Воронка</a:t>
+              <a:t>1</a:t>
             </a:r>
           </a:p>
         </p:txBody>
@@ -7288,8 +7358,8 @@
         </p:nvSpPr>
         <p:spPr>
           <a:xfrm>
-            <a:off x="1115568" y="2286000"/>
-            <a:ext cx="4754880" cy="548640"/>
+            <a:off x="1737360" y="1554480"/>
+            <a:ext cx="9235440" cy="292608"/>
           </a:xfrm>
           <a:prstGeom prst="rect">
             <a:avLst/>
@@ -7304,29 +7374,66 @@
           <a:p>
             <a:pPr algn="l"/>
             <a:r>
-              <a:rPr sz="1200" b="0">
-                <a:solidFill>
-                  <a:srgbClr val="FFFFFF"/>
+              <a:rPr sz="1400" b="1">
+                <a:solidFill>
+                  <a:srgbClr val="26A6E0"/>
                 </a:solidFill>
                 <a:latin typeface="Verdana"/>
                 <a:ea typeface="Verdana"/>
                 <a:cs typeface="Verdana"/>
               </a:rPr>
-              <a:t>Сколько касаний / звонков / демо на 18 продаж? Какая конверсия по этапам?</a:t>
-            </a:r>
-          </a:p>
-        </p:txBody>
-      </p:sp>
-      <p:sp>
-        <p:nvSpPr>
-          <p:cNvPr id="8" name="Rounded Rectangle 7"/>
+              <a:t>Обе гипотезы подтверждены</a:t>
+            </a:r>
+          </a:p>
+        </p:txBody>
+      </p:sp>
+      <p:sp>
+        <p:nvSpPr>
+          <p:cNvPr id="8" name="TextBox 7"/>
+          <p:cNvSpPr txBox="1"/>
+          <p:nvPr/>
+        </p:nvSpPr>
+        <p:spPr>
+          <a:xfrm>
+            <a:off x="1737360" y="1874520"/>
+            <a:ext cx="9235440" cy="365760"/>
+          </a:xfrm>
+          <a:prstGeom prst="rect">
+            <a:avLst/>
+          </a:prstGeom>
+          <a:noFill/>
+        </p:spPr>
+        <p:txBody>
+          <a:bodyPr wrap="square" anchor="t">
+            <a:spAutoFit/>
+          </a:bodyPr>
+          <a:lstStyle/>
+          <a:p>
+            <a:pPr algn="l"/>
+            <a:r>
+              <a:rPr sz="1300" b="0">
+                <a:solidFill>
+                  <a:srgbClr val="FFFFFF"/>
+                </a:solidFill>
+                <a:latin typeface="Verdana"/>
+                <a:ea typeface="Verdana"/>
+                <a:cs typeface="Verdana"/>
+              </a:rPr>
+              <a:t>По 9 продаж на каждый канал. Нет «слабого» направления — оба входа можно масштабировать.</a:t>
+            </a:r>
+          </a:p>
+        </p:txBody>
+      </p:sp>
+      <p:sp>
+        <p:nvSpPr>
+          <p:cNvPr id="9" name="Rounded Rectangle 8"/>
           <p:cNvSpPr/>
           <p:nvPr/>
         </p:nvSpPr>
         <p:spPr>
           <a:xfrm>
-            <a:off x="6327648" y="1828800"/>
-            <a:ext cx="5212080" cy="1143000"/>
+            <a:off x="886968" y="2468880"/>
+            <a:ext cx="10424160" cy="914400"/>
           </a:xfrm>
           <a:prstGeom prst="roundRect">
             <a:avLst>
@@ -7364,14 +7471,57 @@
       </p:sp>
       <p:sp>
         <p:nvSpPr>
-          <p:cNvPr id="9" name="TextBox 8"/>
+          <p:cNvPr id="10" name="Oval 9"/>
+          <p:cNvSpPr/>
+          <p:nvPr/>
+        </p:nvSpPr>
+        <p:spPr>
+          <a:xfrm>
+            <a:off x="1097280" y="2724912"/>
+            <a:ext cx="411480" cy="411480"/>
+          </a:xfrm>
+          <a:prstGeom prst="ellipse">
+            <a:avLst/>
+          </a:prstGeom>
+          <a:solidFill>
+            <a:srgbClr val="26A6E0"/>
+          </a:solidFill>
+          <a:ln>
+            <a:noFill/>
+          </a:ln>
+        </p:spPr>
+        <p:style>
+          <a:lnRef idx="1">
+            <a:schemeClr val="accent1"/>
+          </a:lnRef>
+          <a:fillRef idx="3">
+            <a:schemeClr val="accent1"/>
+          </a:fillRef>
+          <a:effectRef idx="2">
+            <a:schemeClr val="accent1"/>
+          </a:effectRef>
+          <a:fontRef idx="minor">
+            <a:schemeClr val="lt1"/>
+          </a:fontRef>
+        </p:style>
+        <p:txBody>
+          <a:bodyPr rtlCol="0" anchor="ctr"/>
+          <a:lstStyle/>
+          <a:p>
+            <a:pPr algn="ctr"/>
+          </a:p>
+        </p:txBody>
+      </p:sp>
+      <p:sp>
+        <p:nvSpPr>
+          <p:cNvPr id="11" name="TextBox 10"/>
           <p:cNvSpPr txBox="1"/>
           <p:nvPr/>
         </p:nvSpPr>
         <p:spPr>
           <a:xfrm>
-            <a:off x="6556248" y="1965960"/>
-            <a:ext cx="4754880" cy="274320"/>
+            <a:off x="1097280" y="2724912"/>
+            <a:ext cx="411480" cy="411480"/>
           </a:xfrm>
           <a:prstGeom prst="rect">
             <a:avLst/>
@@ -7379,36 +7529,36 @@
           <a:noFill/>
         </p:spPr>
         <p:txBody>
-          <a:bodyPr wrap="square" anchor="t">
+          <a:bodyPr wrap="square" anchor="ctr">
             <a:spAutoFit/>
           </a:bodyPr>
           <a:lstStyle/>
           <a:p>
-            <a:pPr algn="l"/>
-            <a:r>
-              <a:rPr sz="1300" b="1">
-                <a:solidFill>
-                  <a:srgbClr val="26A6E0"/>
+            <a:pPr algn="ctr"/>
+            <a:r>
+              <a:rPr sz="1400" b="1">
+                <a:solidFill>
+                  <a:srgbClr val="FFFFFF"/>
                 </a:solidFill>
                 <a:latin typeface="Verdana"/>
                 <a:ea typeface="Verdana"/>
                 <a:cs typeface="Verdana"/>
               </a:rPr>
-              <a:t>База</a:t>
-            </a:r>
-          </a:p>
-        </p:txBody>
-      </p:sp>
-      <p:sp>
-        <p:nvSpPr>
-          <p:cNvPr id="10" name="TextBox 9"/>
+              <a:t>2</a:t>
+            </a:r>
+          </a:p>
+        </p:txBody>
+      </p:sp>
+      <p:sp>
+        <p:nvSpPr>
+          <p:cNvPr id="12" name="TextBox 11"/>
           <p:cNvSpPr txBox="1"/>
           <p:nvPr/>
         </p:nvSpPr>
         <p:spPr>
           <a:xfrm>
-            <a:off x="6556248" y="2286000"/>
-            <a:ext cx="4754880" cy="548640"/>
+            <a:off x="1737360" y="2606040"/>
+            <a:ext cx="9235440" cy="292608"/>
           </a:xfrm>
           <a:prstGeom prst="rect">
             <a:avLst/>
@@ -7423,29 +7573,66 @@
           <a:p>
             <a:pPr algn="l"/>
             <a:r>
-              <a:rPr sz="1200" b="0">
-                <a:solidFill>
-                  <a:srgbClr val="FFFFFF"/>
+              <a:rPr sz="1400" b="1">
+                <a:solidFill>
+                  <a:srgbClr val="26A6E0"/>
                 </a:solidFill>
                 <a:latin typeface="Verdana"/>
                 <a:ea typeface="Verdana"/>
                 <a:cs typeface="Verdana"/>
               </a:rPr>
-              <a:t>Размер базы ЭПД и сколько контактов обработали по каждой гипотезе?</a:t>
-            </a:r>
-          </a:p>
-        </p:txBody>
-      </p:sp>
-      <p:sp>
-        <p:nvSpPr>
-          <p:cNvPr id="11" name="Rounded Rectangle 10"/>
+              <a:t>Доки закрывает сразу два показателя</a:t>
+            </a:r>
+          </a:p>
+        </p:txBody>
+      </p:sp>
+      <p:sp>
+        <p:nvSpPr>
+          <p:cNvPr id="13" name="TextBox 12"/>
+          <p:cNvSpPr txBox="1"/>
+          <p:nvPr/>
+        </p:nvSpPr>
+        <p:spPr>
+          <a:xfrm>
+            <a:off x="1737360" y="2926080"/>
+            <a:ext cx="9235440" cy="365760"/>
+          </a:xfrm>
+          <a:prstGeom prst="rect">
+            <a:avLst/>
+          </a:prstGeom>
+          <a:noFill/>
+        </p:spPr>
+        <p:txBody>
+          <a:bodyPr wrap="square" anchor="t">
+            <a:spAutoFit/>
+          </a:bodyPr>
+          <a:lstStyle/>
+          <a:p>
+            <a:pPr algn="l"/>
+            <a:r>
+              <a:rPr sz="1300" b="0">
+                <a:solidFill>
+                  <a:srgbClr val="FFFFFF"/>
+                </a:solidFill>
+                <a:latin typeface="Verdana"/>
+                <a:ea typeface="Verdana"/>
+                <a:cs typeface="Verdana"/>
+              </a:rPr>
+              <a:t>ЭДО (Доки) + ЭПД (Доки.Логистика). Одна продажа сильнее узкого 1С-ЭПД по вкладу в KPI.</a:t>
+            </a:r>
+          </a:p>
+        </p:txBody>
+      </p:sp>
+      <p:sp>
+        <p:nvSpPr>
+          <p:cNvPr id="14" name="Rounded Rectangle 13"/>
           <p:cNvSpPr/>
           <p:nvPr/>
         </p:nvSpPr>
         <p:spPr>
           <a:xfrm>
-            <a:off x="886968" y="3108960"/>
-            <a:ext cx="5212080" cy="1143000"/>
+            <a:off x="886968" y="3520440"/>
+            <a:ext cx="10424160" cy="914400"/>
           </a:xfrm>
           <a:prstGeom prst="roundRect">
             <a:avLst>
@@ -7483,14 +7670,57 @@
       </p:sp>
       <p:sp>
         <p:nvSpPr>
-          <p:cNvPr id="12" name="TextBox 11"/>
+          <p:cNvPr id="15" name="Oval 14"/>
+          <p:cNvSpPr/>
+          <p:nvPr/>
+        </p:nvSpPr>
+        <p:spPr>
+          <a:xfrm>
+            <a:off x="1097280" y="3776472"/>
+            <a:ext cx="411480" cy="411480"/>
+          </a:xfrm>
+          <a:prstGeom prst="ellipse">
+            <a:avLst/>
+          </a:prstGeom>
+          <a:solidFill>
+            <a:srgbClr val="26A6E0"/>
+          </a:solidFill>
+          <a:ln>
+            <a:noFill/>
+          </a:ln>
+        </p:spPr>
+        <p:style>
+          <a:lnRef idx="1">
+            <a:schemeClr val="accent1"/>
+          </a:lnRef>
+          <a:fillRef idx="3">
+            <a:schemeClr val="accent1"/>
+          </a:fillRef>
+          <a:effectRef idx="2">
+            <a:schemeClr val="accent1"/>
+          </a:effectRef>
+          <a:fontRef idx="minor">
+            <a:schemeClr val="lt1"/>
+          </a:fontRef>
+        </p:style>
+        <p:txBody>
+          <a:bodyPr rtlCol="0" anchor="ctr"/>
+          <a:lstStyle/>
+          <a:p>
+            <a:pPr algn="ctr"/>
+          </a:p>
+        </p:txBody>
+      </p:sp>
+      <p:sp>
+        <p:nvSpPr>
+          <p:cNvPr id="16" name="TextBox 15"/>
           <p:cNvSpPr txBox="1"/>
           <p:nvPr/>
         </p:nvSpPr>
         <p:spPr>
           <a:xfrm>
-            <a:off x="1115568" y="3246120"/>
-            <a:ext cx="4754880" cy="274320"/>
+            <a:off x="1097280" y="3776472"/>
+            <a:ext cx="411480" cy="411480"/>
           </a:xfrm>
           <a:prstGeom prst="rect">
             <a:avLst/>
@@ -7498,36 +7728,36 @@
           <a:noFill/>
         </p:spPr>
         <p:txBody>
-          <a:bodyPr wrap="square" anchor="t">
+          <a:bodyPr wrap="square" anchor="ctr">
             <a:spAutoFit/>
           </a:bodyPr>
           <a:lstStyle/>
           <a:p>
-            <a:pPr algn="l"/>
-            <a:r>
-              <a:rPr sz="1300" b="1">
-                <a:solidFill>
-                  <a:srgbClr val="26A6E0"/>
+            <a:pPr algn="ctr"/>
+            <a:r>
+              <a:rPr sz="1400" b="1">
+                <a:solidFill>
+                  <a:srgbClr val="FFFFFF"/>
                 </a:solidFill>
                 <a:latin typeface="Verdana"/>
                 <a:ea typeface="Verdana"/>
                 <a:cs typeface="Verdana"/>
               </a:rPr>
-              <a:t>Деньги</a:t>
-            </a:r>
-          </a:p>
-        </p:txBody>
-      </p:sp>
-      <p:sp>
-        <p:nvSpPr>
-          <p:cNvPr id="13" name="TextBox 12"/>
+              <a:t>3</a:t>
+            </a:r>
+          </a:p>
+        </p:txBody>
+      </p:sp>
+      <p:sp>
+        <p:nvSpPr>
+          <p:cNvPr id="17" name="TextBox 16"/>
           <p:cNvSpPr txBox="1"/>
           <p:nvPr/>
         </p:nvSpPr>
         <p:spPr>
           <a:xfrm>
-            <a:off x="1115568" y="3566160"/>
-            <a:ext cx="4754880" cy="548640"/>
+            <a:off x="1737360" y="3657600"/>
+            <a:ext cx="9235440" cy="292608"/>
           </a:xfrm>
           <a:prstGeom prst="rect">
             <a:avLst/>
@@ -7542,29 +7772,66 @@
           <a:p>
             <a:pPr algn="l"/>
             <a:r>
-              <a:rPr sz="1200" b="0">
-                <a:solidFill>
-                  <a:srgbClr val="FFFFFF"/>
+              <a:rPr sz="1400" b="1">
+                <a:solidFill>
+                  <a:srgbClr val="26A6E0"/>
                 </a:solidFill>
                 <a:latin typeface="Verdana"/>
                 <a:ea typeface="Verdana"/>
                 <a:cs typeface="Verdana"/>
               </a:rPr>
-              <a:t>Средний чек, выручка сейчас и прогноз после окончания 3 бесплатных месяцев?</a:t>
-            </a:r>
-          </a:p>
-        </p:txBody>
-      </p:sp>
-      <p:sp>
-        <p:nvSpPr>
-          <p:cNvPr id="14" name="Rounded Rectangle 13"/>
+              <a:t>Пакет для тиражирования уже собран</a:t>
+            </a:r>
+          </a:p>
+        </p:txBody>
+      </p:sp>
+      <p:sp>
+        <p:nvSpPr>
+          <p:cNvPr id="18" name="TextBox 17"/>
+          <p:cNvSpPr txBox="1"/>
+          <p:nvPr/>
+        </p:nvSpPr>
+        <p:spPr>
+          <a:xfrm>
+            <a:off x="1737360" y="3977640"/>
+            <a:ext cx="9235440" cy="365760"/>
+          </a:xfrm>
+          <a:prstGeom prst="rect">
+            <a:avLst/>
+          </a:prstGeom>
+          <a:noFill/>
+        </p:spPr>
+        <p:txBody>
+          <a:bodyPr wrap="square" anchor="t">
+            <a:spAutoFit/>
+          </a:bodyPr>
+          <a:lstStyle/>
+          <a:p>
+            <a:pPr algn="l"/>
+            <a:r>
+              <a:rPr sz="1300" b="0">
+                <a:solidFill>
+                  <a:srgbClr val="FFFFFF"/>
+                </a:solidFill>
+                <a:latin typeface="Verdana"/>
+                <a:ea typeface="Verdana"/>
+                <a:cs typeface="Verdana"/>
+              </a:rPr>
+              <a:t>Скрипты, рассылки, сравнение, КП и шаблоны лежат в репозитории — новой группе не нужно начинать с нуля.</a:t>
+            </a:r>
+          </a:p>
+        </p:txBody>
+      </p:sp>
+      <p:sp>
+        <p:nvSpPr>
+          <p:cNvPr id="19" name="Rounded Rectangle 18"/>
           <p:cNvSpPr/>
           <p:nvPr/>
         </p:nvSpPr>
         <p:spPr>
           <a:xfrm>
-            <a:off x="6327648" y="3108960"/>
-            <a:ext cx="5212080" cy="1143000"/>
+            <a:off x="886968" y="4572000"/>
+            <a:ext cx="10424160" cy="914400"/>
           </a:xfrm>
           <a:prstGeom prst="roundRect">
             <a:avLst>
@@ -7602,96 +7869,20 @@
       </p:sp>
       <p:sp>
         <p:nvSpPr>
-          <p:cNvPr id="15" name="TextBox 14"/>
-          <p:cNvSpPr txBox="1"/>
-          <p:nvPr/>
-        </p:nvSpPr>
-        <p:spPr>
-          <a:xfrm>
-            <a:off x="6556248" y="3246120"/>
-            <a:ext cx="4754880" cy="274320"/>
-          </a:xfrm>
-          <a:prstGeom prst="rect">
-            <a:avLst/>
-          </a:prstGeom>
-          <a:noFill/>
-        </p:spPr>
-        <p:txBody>
-          <a:bodyPr wrap="square" anchor="t">
-            <a:spAutoFit/>
-          </a:bodyPr>
-          <a:lstStyle/>
-          <a:p>
-            <a:pPr algn="l"/>
-            <a:r>
-              <a:rPr sz="1300" b="1">
-                <a:solidFill>
-                  <a:srgbClr val="26A6E0"/>
-                </a:solidFill>
-                <a:latin typeface="Verdana"/>
-                <a:ea typeface="Verdana"/>
-                <a:cs typeface="Verdana"/>
-              </a:rPr>
-              <a:t>Активность</a:t>
-            </a:r>
-          </a:p>
-        </p:txBody>
-      </p:sp>
-      <p:sp>
-        <p:nvSpPr>
-          <p:cNvPr id="16" name="TextBox 15"/>
-          <p:cNvSpPr txBox="1"/>
-          <p:nvPr/>
-        </p:nvSpPr>
-        <p:spPr>
-          <a:xfrm>
-            <a:off x="6556248" y="3566160"/>
-            <a:ext cx="4754880" cy="548640"/>
-          </a:xfrm>
-          <a:prstGeom prst="rect">
-            <a:avLst/>
-          </a:prstGeom>
-          <a:noFill/>
-        </p:spPr>
-        <p:txBody>
-          <a:bodyPr wrap="square" anchor="t">
-            <a:spAutoFit/>
-          </a:bodyPr>
-          <a:lstStyle/>
-          <a:p>
-            <a:pPr algn="l"/>
-            <a:r>
-              <a:rPr sz="1200" b="0">
-                <a:solidFill>
-                  <a:srgbClr val="FFFFFF"/>
-                </a:solidFill>
-                <a:latin typeface="Verdana"/>
-                <a:ea typeface="Verdana"/>
-                <a:cs typeface="Verdana"/>
-              </a:rPr>
-              <a:t>Сколько из 18 реально начали отправлять документы?</a:t>
-            </a:r>
-          </a:p>
-        </p:txBody>
-      </p:sp>
-      <p:sp>
-        <p:nvSpPr>
-          <p:cNvPr id="17" name="Rounded Rectangle 16"/>
+          <p:cNvPr id="20" name="Oval 19"/>
           <p:cNvSpPr/>
           <p:nvPr/>
         </p:nvSpPr>
         <p:spPr>
           <a:xfrm>
-            <a:off x="886968" y="4389120"/>
-            <a:ext cx="5212080" cy="1143000"/>
-          </a:xfrm>
-          <a:prstGeom prst="roundRect">
-            <a:avLst>
-              <a:gd name="adj" fmla="val 6000"/>
-            </a:avLst>
+            <a:off x="1097280" y="4828032"/>
+            <a:ext cx="411480" cy="411480"/>
+          </a:xfrm>
+          <a:prstGeom prst="ellipse">
+            <a:avLst/>
           </a:prstGeom>
           <a:solidFill>
-            <a:srgbClr val="3F3F3F"/>
+            <a:srgbClr val="26A6E0"/>
           </a:solidFill>
           <a:ln>
             <a:noFill/>
@@ -7721,14 +7912,14 @@
       </p:sp>
       <p:sp>
         <p:nvSpPr>
-          <p:cNvPr id="18" name="TextBox 17"/>
+          <p:cNvPr id="21" name="TextBox 20"/>
           <p:cNvSpPr txBox="1"/>
           <p:nvPr/>
         </p:nvSpPr>
         <p:spPr>
           <a:xfrm>
-            <a:off x="1115568" y="4526280"/>
-            <a:ext cx="4754880" cy="274320"/>
+            <a:off x="1097280" y="4828032"/>
+            <a:ext cx="411480" cy="411480"/>
           </a:xfrm>
           <a:prstGeom prst="rect">
             <a:avLst/>
@@ -7736,36 +7927,36 @@
           <a:noFill/>
         </p:spPr>
         <p:txBody>
-          <a:bodyPr wrap="square" anchor="t">
+          <a:bodyPr wrap="square" anchor="ctr">
             <a:spAutoFit/>
           </a:bodyPr>
           <a:lstStyle/>
           <a:p>
-            <a:pPr algn="l"/>
-            <a:r>
-              <a:rPr sz="1300" b="1">
-                <a:solidFill>
-                  <a:srgbClr val="26A6E0"/>
+            <a:pPr algn="ctr"/>
+            <a:r>
+              <a:rPr sz="1400" b="1">
+                <a:solidFill>
+                  <a:srgbClr val="FFFFFF"/>
                 </a:solidFill>
                 <a:latin typeface="Verdana"/>
                 <a:ea typeface="Verdana"/>
                 <a:cs typeface="Verdana"/>
               </a:rPr>
-              <a:t>Отказы</a:t>
-            </a:r>
-          </a:p>
-        </p:txBody>
-      </p:sp>
-      <p:sp>
-        <p:nvSpPr>
-          <p:cNvPr id="19" name="TextBox 18"/>
+              <a:t>4</a:t>
+            </a:r>
+          </a:p>
+        </p:txBody>
+      </p:sp>
+      <p:sp>
+        <p:nvSpPr>
+          <p:cNvPr id="22" name="TextBox 21"/>
           <p:cNvSpPr txBox="1"/>
           <p:nvPr/>
         </p:nvSpPr>
         <p:spPr>
           <a:xfrm>
-            <a:off x="1115568" y="4846320"/>
-            <a:ext cx="4754880" cy="548640"/>
+            <a:off x="1737360" y="4709160"/>
+            <a:ext cx="9235440" cy="292608"/>
           </a:xfrm>
           <a:prstGeom prst="rect">
             <a:avLst/>
@@ -7780,74 +7971,29 @@
           <a:p>
             <a:pPr algn="l"/>
             <a:r>
-              <a:rPr sz="1200" b="0">
-                <a:solidFill>
-                  <a:srgbClr val="FFFFFF"/>
+              <a:rPr sz="1400" b="1">
+                <a:solidFill>
+                  <a:srgbClr val="26A6E0"/>
                 </a:solidFill>
                 <a:latin typeface="Verdana"/>
                 <a:ea typeface="Verdana"/>
                 <a:cs typeface="Verdana"/>
               </a:rPr>
-              <a:t>Типовые причины «нет» и где клиенты отваливаются чаще всего?</a:t>
-            </a:r>
-          </a:p>
-        </p:txBody>
-      </p:sp>
-      <p:sp>
-        <p:nvSpPr>
-          <p:cNvPr id="20" name="Rounded Rectangle 19"/>
-          <p:cNvSpPr/>
-          <p:nvPr/>
-        </p:nvSpPr>
-        <p:spPr>
-          <a:xfrm>
-            <a:off x="6327648" y="4389120"/>
-            <a:ext cx="5212080" cy="1143000"/>
-          </a:xfrm>
-          <a:prstGeom prst="roundRect">
-            <a:avLst>
-              <a:gd name="adj" fmla="val 6000"/>
-            </a:avLst>
-          </a:prstGeom>
-          <a:solidFill>
-            <a:srgbClr val="3F3F3F"/>
-          </a:solidFill>
-          <a:ln>
-            <a:noFill/>
-          </a:ln>
-        </p:spPr>
-        <p:style>
-          <a:lnRef idx="1">
-            <a:schemeClr val="accent1"/>
-          </a:lnRef>
-          <a:fillRef idx="3">
-            <a:schemeClr val="accent1"/>
-          </a:fillRef>
-          <a:effectRef idx="2">
-            <a:schemeClr val="accent1"/>
-          </a:effectRef>
-          <a:fontRef idx="minor">
-            <a:schemeClr val="lt1"/>
-          </a:fontRef>
-        </p:style>
-        <p:txBody>
-          <a:bodyPr rtlCol="0" anchor="ctr"/>
-          <a:lstStyle/>
-          <a:p>
-            <a:pPr algn="ctr"/>
-          </a:p>
-        </p:txBody>
-      </p:sp>
-      <p:sp>
-        <p:nvSpPr>
-          <p:cNvPr id="21" name="TextBox 20"/>
+              <a:t>Пилот закрыл вопрос «продаётся ли»</a:t>
+            </a:r>
+          </a:p>
+        </p:txBody>
+      </p:sp>
+      <p:sp>
+        <p:nvSpPr>
+          <p:cNvPr id="23" name="TextBox 22"/>
           <p:cNvSpPr txBox="1"/>
           <p:nvPr/>
         </p:nvSpPr>
         <p:spPr>
           <a:xfrm>
-            <a:off x="6556248" y="4526280"/>
-            <a:ext cx="4754880" cy="274320"/>
+            <a:off x="1737360" y="5029200"/>
+            <a:ext cx="9235440" cy="365760"/>
           </a:xfrm>
           <a:prstGeom prst="rect">
             <a:avLst/>
@@ -7862,52 +8008,15 @@
           <a:p>
             <a:pPr algn="l"/>
             <a:r>
-              <a:rPr sz="1300" b="1">
-                <a:solidFill>
-                  <a:srgbClr val="26A6E0"/>
+              <a:rPr sz="1300" b="0">
+                <a:solidFill>
+                  <a:srgbClr val="FFFFFF"/>
                 </a:solidFill>
                 <a:latin typeface="Verdana"/>
                 <a:ea typeface="Verdana"/>
                 <a:cs typeface="Verdana"/>
               </a:rPr>
-              <a:t>Ресурсы</a:t>
-            </a:r>
-          </a:p>
-        </p:txBody>
-      </p:sp>
-      <p:sp>
-        <p:nvSpPr>
-          <p:cNvPr id="22" name="TextBox 21"/>
-          <p:cNvSpPr txBox="1"/>
-          <p:nvPr/>
-        </p:nvSpPr>
-        <p:spPr>
-          <a:xfrm>
-            <a:off x="6556248" y="4846320"/>
-            <a:ext cx="4754880" cy="548640"/>
-          </a:xfrm>
-          <a:prstGeom prst="rect">
-            <a:avLst/>
-          </a:prstGeom>
-          <a:noFill/>
-        </p:spPr>
-        <p:txBody>
-          <a:bodyPr wrap="square" anchor="t">
-            <a:spAutoFit/>
-          </a:bodyPr>
-          <a:lstStyle/>
-          <a:p>
-            <a:pPr algn="l"/>
-            <a:r>
-              <a:rPr sz="1200" b="0">
-                <a:solidFill>
-                  <a:srgbClr val="FFFFFF"/>
-                </a:solidFill>
-                <a:latin typeface="Verdana"/>
-                <a:ea typeface="Verdana"/>
-                <a:cs typeface="Verdana"/>
-              </a:rPr>
-              <a:t>Сколько часов менеджеров ушло на пилот? Кто ведёт сопровождение после передачи?</a:t>
+              <a:t>Следующий этап — не поиск идеи, а процесс: объём, конверсия, использование и оплата после 3 месяцев.</a:t>
             </a:r>
           </a:p>
         </p:txBody>
@@ -7955,7 +8064,7 @@
                 <a:ea typeface="Verdana"/>
                 <a:cs typeface="Verdana"/>
               </a:rPr>
-              <a:t>Просим принять решение</a:t>
+              <a:t>Рекомендации для тиражирования</a:t>
             </a:r>
           </a:p>
         </p:txBody>
@@ -7986,7 +8095,7 @@
         <p:spPr>
           <a:xfrm>
             <a:off x="886968" y="1463040"/>
-            <a:ext cx="7498079" cy="1051560"/>
+            <a:ext cx="5212080" cy="2011680"/>
           </a:xfrm>
           <a:prstGeom prst="roundRect">
             <a:avLst>
@@ -8022,606 +8131,9 @@
           </a:p>
         </p:txBody>
       </p:sp>
-      <p:sp>
-        <p:nvSpPr>
-          <p:cNvPr id="5" name="Oval 4"/>
-          <p:cNvSpPr/>
-          <p:nvPr/>
-        </p:nvSpPr>
-        <p:spPr>
-          <a:xfrm>
-            <a:off x="1097280" y="1783080"/>
-            <a:ext cx="384048" cy="384048"/>
-          </a:xfrm>
-          <a:prstGeom prst="ellipse">
-            <a:avLst/>
-          </a:prstGeom>
-          <a:solidFill>
-            <a:srgbClr val="26A6E0"/>
-          </a:solidFill>
-          <a:ln>
-            <a:noFill/>
-          </a:ln>
-        </p:spPr>
-        <p:style>
-          <a:lnRef idx="1">
-            <a:schemeClr val="accent1"/>
-          </a:lnRef>
-          <a:fillRef idx="3">
-            <a:schemeClr val="accent1"/>
-          </a:fillRef>
-          <a:effectRef idx="2">
-            <a:schemeClr val="accent1"/>
-          </a:effectRef>
-          <a:fontRef idx="minor">
-            <a:schemeClr val="lt1"/>
-          </a:fontRef>
-        </p:style>
-        <p:txBody>
-          <a:bodyPr rtlCol="0" anchor="ctr"/>
-          <a:lstStyle/>
-          <a:p>
-            <a:pPr algn="ctr"/>
-          </a:p>
-        </p:txBody>
-      </p:sp>
-      <p:sp>
-        <p:nvSpPr>
-          <p:cNvPr id="6" name="TextBox 5"/>
-          <p:cNvSpPr txBox="1"/>
-          <p:nvPr/>
-        </p:nvSpPr>
-        <p:spPr>
-          <a:xfrm>
-            <a:off x="1097280" y="1783080"/>
-            <a:ext cx="384048" cy="384048"/>
-          </a:xfrm>
-          <a:prstGeom prst="rect">
-            <a:avLst/>
-          </a:prstGeom>
-          <a:noFill/>
-        </p:spPr>
-        <p:txBody>
-          <a:bodyPr wrap="square" anchor="ctr">
-            <a:spAutoFit/>
-          </a:bodyPr>
-          <a:lstStyle/>
-          <a:p>
-            <a:pPr algn="ctr"/>
-            <a:r>
-              <a:rPr sz="1300" b="1">
-                <a:solidFill>
-                  <a:srgbClr val="FFFFFF"/>
-                </a:solidFill>
-                <a:latin typeface="Verdana"/>
-                <a:ea typeface="Verdana"/>
-                <a:cs typeface="Verdana"/>
-              </a:rPr>
-              <a:t>1</a:t>
-            </a:r>
-          </a:p>
-        </p:txBody>
-      </p:sp>
-      <p:sp>
-        <p:nvSpPr>
-          <p:cNvPr id="7" name="TextBox 6"/>
-          <p:cNvSpPr txBox="1"/>
-          <p:nvPr/>
-        </p:nvSpPr>
-        <p:spPr>
-          <a:xfrm>
-            <a:off x="1691640" y="1664208"/>
-            <a:ext cx="6400800" cy="320040"/>
-          </a:xfrm>
-          <a:prstGeom prst="rect">
-            <a:avLst/>
-          </a:prstGeom>
-          <a:noFill/>
-        </p:spPr>
-        <p:txBody>
-          <a:bodyPr wrap="square" anchor="t">
-            <a:spAutoFit/>
-          </a:bodyPr>
-          <a:lstStyle/>
-          <a:p>
-            <a:pPr algn="l"/>
-            <a:r>
-              <a:rPr sz="1500" b="1">
-                <a:solidFill>
-                  <a:srgbClr val="26A6E0"/>
-                </a:solidFill>
-                <a:latin typeface="Verdana"/>
-                <a:ea typeface="Verdana"/>
-                <a:cs typeface="Verdana"/>
-              </a:rPr>
-              <a:t>Признать пилот успешным</a:t>
-            </a:r>
-          </a:p>
-        </p:txBody>
-      </p:sp>
-      <p:sp>
-        <p:nvSpPr>
-          <p:cNvPr id="8" name="TextBox 7"/>
-          <p:cNvSpPr txBox="1"/>
-          <p:nvPr/>
-        </p:nvSpPr>
-        <p:spPr>
-          <a:xfrm>
-            <a:off x="1691640" y="2011680"/>
-            <a:ext cx="6400800" cy="365760"/>
-          </a:xfrm>
-          <a:prstGeom prst="rect">
-            <a:avLst/>
-          </a:prstGeom>
-          <a:noFill/>
-        </p:spPr>
-        <p:txBody>
-          <a:bodyPr wrap="square" anchor="t">
-            <a:spAutoFit/>
-          </a:bodyPr>
-          <a:lstStyle/>
-          <a:p>
-            <a:pPr algn="l"/>
-            <a:r>
-              <a:rPr sz="1300" b="0">
-                <a:solidFill>
-                  <a:srgbClr val="FFFFFF"/>
-                </a:solidFill>
-                <a:latin typeface="Verdana"/>
-                <a:ea typeface="Verdana"/>
-                <a:cs typeface="Verdana"/>
-              </a:rPr>
-              <a:t>18 подключений за 7 недель, обе гипотезы подтверждены поровну.</a:t>
-            </a:r>
-          </a:p>
-        </p:txBody>
-      </p:sp>
-      <p:sp>
-        <p:nvSpPr>
-          <p:cNvPr id="9" name="Rounded Rectangle 8"/>
-          <p:cNvSpPr/>
-          <p:nvPr/>
-        </p:nvSpPr>
-        <p:spPr>
-          <a:xfrm>
-            <a:off x="886968" y="2651760"/>
-            <a:ext cx="7498079" cy="1051560"/>
-          </a:xfrm>
-          <a:prstGeom prst="roundRect">
-            <a:avLst>
-              <a:gd name="adj" fmla="val 8000"/>
-            </a:avLst>
-          </a:prstGeom>
-          <a:solidFill>
-            <a:srgbClr val="3F3F3F"/>
-          </a:solidFill>
-          <a:ln>
-            <a:noFill/>
-          </a:ln>
-        </p:spPr>
-        <p:style>
-          <a:lnRef idx="1">
-            <a:schemeClr val="accent1"/>
-          </a:lnRef>
-          <a:fillRef idx="3">
-            <a:schemeClr val="accent1"/>
-          </a:fillRef>
-          <a:effectRef idx="2">
-            <a:schemeClr val="accent1"/>
-          </a:effectRef>
-          <a:fontRef idx="minor">
-            <a:schemeClr val="lt1"/>
-          </a:fontRef>
-        </p:style>
-        <p:txBody>
-          <a:bodyPr rtlCol="0" anchor="ctr"/>
-          <a:lstStyle/>
-          <a:p>
-            <a:pPr algn="ctr"/>
-          </a:p>
-        </p:txBody>
-      </p:sp>
-      <p:sp>
-        <p:nvSpPr>
-          <p:cNvPr id="10" name="Oval 9"/>
-          <p:cNvSpPr/>
-          <p:nvPr/>
-        </p:nvSpPr>
-        <p:spPr>
-          <a:xfrm>
-            <a:off x="1097280" y="2971800"/>
-            <a:ext cx="384048" cy="384048"/>
-          </a:xfrm>
-          <a:prstGeom prst="ellipse">
-            <a:avLst/>
-          </a:prstGeom>
-          <a:solidFill>
-            <a:srgbClr val="26A6E0"/>
-          </a:solidFill>
-          <a:ln>
-            <a:noFill/>
-          </a:ln>
-        </p:spPr>
-        <p:style>
-          <a:lnRef idx="1">
-            <a:schemeClr val="accent1"/>
-          </a:lnRef>
-          <a:fillRef idx="3">
-            <a:schemeClr val="accent1"/>
-          </a:fillRef>
-          <a:effectRef idx="2">
-            <a:schemeClr val="accent1"/>
-          </a:effectRef>
-          <a:fontRef idx="minor">
-            <a:schemeClr val="lt1"/>
-          </a:fontRef>
-        </p:style>
-        <p:txBody>
-          <a:bodyPr rtlCol="0" anchor="ctr"/>
-          <a:lstStyle/>
-          <a:p>
-            <a:pPr algn="ctr"/>
-          </a:p>
-        </p:txBody>
-      </p:sp>
-      <p:sp>
-        <p:nvSpPr>
-          <p:cNvPr id="11" name="TextBox 10"/>
-          <p:cNvSpPr txBox="1"/>
-          <p:nvPr/>
-        </p:nvSpPr>
-        <p:spPr>
-          <a:xfrm>
-            <a:off x="1097280" y="2971800"/>
-            <a:ext cx="384048" cy="384048"/>
-          </a:xfrm>
-          <a:prstGeom prst="rect">
-            <a:avLst/>
-          </a:prstGeom>
-          <a:noFill/>
-        </p:spPr>
-        <p:txBody>
-          <a:bodyPr wrap="square" anchor="ctr">
-            <a:spAutoFit/>
-          </a:bodyPr>
-          <a:lstStyle/>
-          <a:p>
-            <a:pPr algn="ctr"/>
-            <a:r>
-              <a:rPr sz="1300" b="1">
-                <a:solidFill>
-                  <a:srgbClr val="FFFFFF"/>
-                </a:solidFill>
-                <a:latin typeface="Verdana"/>
-                <a:ea typeface="Verdana"/>
-                <a:cs typeface="Verdana"/>
-              </a:rPr>
-              <a:t>2</a:t>
-            </a:r>
-          </a:p>
-        </p:txBody>
-      </p:sp>
-      <p:sp>
-        <p:nvSpPr>
-          <p:cNvPr id="12" name="TextBox 11"/>
-          <p:cNvSpPr txBox="1"/>
-          <p:nvPr/>
-        </p:nvSpPr>
-        <p:spPr>
-          <a:xfrm>
-            <a:off x="1691640" y="2852928"/>
-            <a:ext cx="6400800" cy="320040"/>
-          </a:xfrm>
-          <a:prstGeom prst="rect">
-            <a:avLst/>
-          </a:prstGeom>
-          <a:noFill/>
-        </p:spPr>
-        <p:txBody>
-          <a:bodyPr wrap="square" anchor="t">
-            <a:spAutoFit/>
-          </a:bodyPr>
-          <a:lstStyle/>
-          <a:p>
-            <a:pPr algn="l"/>
-            <a:r>
-              <a:rPr sz="1500" b="1">
-                <a:solidFill>
-                  <a:srgbClr val="26A6E0"/>
-                </a:solidFill>
-                <a:latin typeface="Verdana"/>
-                <a:ea typeface="Verdana"/>
-                <a:cs typeface="Verdana"/>
-              </a:rPr>
-              <a:t>Передать в тиражирование</a:t>
-            </a:r>
-          </a:p>
-        </p:txBody>
-      </p:sp>
-      <p:sp>
-        <p:nvSpPr>
-          <p:cNvPr id="13" name="TextBox 12"/>
-          <p:cNvSpPr txBox="1"/>
-          <p:nvPr/>
-        </p:nvSpPr>
-        <p:spPr>
-          <a:xfrm>
-            <a:off x="1691640" y="3200400"/>
-            <a:ext cx="6400800" cy="365760"/>
-          </a:xfrm>
-          <a:prstGeom prst="rect">
-            <a:avLst/>
-          </a:prstGeom>
-          <a:noFill/>
-        </p:spPr>
-        <p:txBody>
-          <a:bodyPr wrap="square" anchor="t">
-            <a:spAutoFit/>
-          </a:bodyPr>
-          <a:lstStyle/>
-          <a:p>
-            <a:pPr algn="l"/>
-            <a:r>
-              <a:rPr sz="1300" b="0">
-                <a:solidFill>
-                  <a:srgbClr val="FFFFFF"/>
-                </a:solidFill>
-                <a:latin typeface="Verdana"/>
-                <a:ea typeface="Verdana"/>
-                <a:cs typeface="Verdana"/>
-              </a:rPr>
-              <a:t>Новой группе — пакет скриптов, материалов и двух рабочих каналов продаж.</a:t>
-            </a:r>
-          </a:p>
-        </p:txBody>
-      </p:sp>
-      <p:sp>
-        <p:nvSpPr>
-          <p:cNvPr id="14" name="Rounded Rectangle 13"/>
-          <p:cNvSpPr/>
-          <p:nvPr/>
-        </p:nvSpPr>
-        <p:spPr>
-          <a:xfrm>
-            <a:off x="886968" y="3840480"/>
-            <a:ext cx="7498079" cy="1051560"/>
-          </a:xfrm>
-          <a:prstGeom prst="roundRect">
-            <a:avLst>
-              <a:gd name="adj" fmla="val 8000"/>
-            </a:avLst>
-          </a:prstGeom>
-          <a:solidFill>
-            <a:srgbClr val="3F3F3F"/>
-          </a:solidFill>
-          <a:ln>
-            <a:noFill/>
-          </a:ln>
-        </p:spPr>
-        <p:style>
-          <a:lnRef idx="1">
-            <a:schemeClr val="accent1"/>
-          </a:lnRef>
-          <a:fillRef idx="3">
-            <a:schemeClr val="accent1"/>
-          </a:fillRef>
-          <a:effectRef idx="2">
-            <a:schemeClr val="accent1"/>
-          </a:effectRef>
-          <a:fontRef idx="minor">
-            <a:schemeClr val="lt1"/>
-          </a:fontRef>
-        </p:style>
-        <p:txBody>
-          <a:bodyPr rtlCol="0" anchor="ctr"/>
-          <a:lstStyle/>
-          <a:p>
-            <a:pPr algn="ctr"/>
-          </a:p>
-        </p:txBody>
-      </p:sp>
-      <p:sp>
-        <p:nvSpPr>
-          <p:cNvPr id="15" name="Oval 14"/>
-          <p:cNvSpPr/>
-          <p:nvPr/>
-        </p:nvSpPr>
-        <p:spPr>
-          <a:xfrm>
-            <a:off x="1097280" y="4160520"/>
-            <a:ext cx="384048" cy="384048"/>
-          </a:xfrm>
-          <a:prstGeom prst="ellipse">
-            <a:avLst/>
-          </a:prstGeom>
-          <a:solidFill>
-            <a:srgbClr val="26A6E0"/>
-          </a:solidFill>
-          <a:ln>
-            <a:noFill/>
-          </a:ln>
-        </p:spPr>
-        <p:style>
-          <a:lnRef idx="1">
-            <a:schemeClr val="accent1"/>
-          </a:lnRef>
-          <a:fillRef idx="3">
-            <a:schemeClr val="accent1"/>
-          </a:fillRef>
-          <a:effectRef idx="2">
-            <a:schemeClr val="accent1"/>
-          </a:effectRef>
-          <a:fontRef idx="minor">
-            <a:schemeClr val="lt1"/>
-          </a:fontRef>
-        </p:style>
-        <p:txBody>
-          <a:bodyPr rtlCol="0" anchor="ctr"/>
-          <a:lstStyle/>
-          <a:p>
-            <a:pPr algn="ctr"/>
-          </a:p>
-        </p:txBody>
-      </p:sp>
-      <p:sp>
-        <p:nvSpPr>
-          <p:cNvPr id="16" name="TextBox 15"/>
-          <p:cNvSpPr txBox="1"/>
-          <p:nvPr/>
-        </p:nvSpPr>
-        <p:spPr>
-          <a:xfrm>
-            <a:off x="1097280" y="4160520"/>
-            <a:ext cx="384048" cy="384048"/>
-          </a:xfrm>
-          <a:prstGeom prst="rect">
-            <a:avLst/>
-          </a:prstGeom>
-          <a:noFill/>
-        </p:spPr>
-        <p:txBody>
-          <a:bodyPr wrap="square" anchor="ctr">
-            <a:spAutoFit/>
-          </a:bodyPr>
-          <a:lstStyle/>
-          <a:p>
-            <a:pPr algn="ctr"/>
-            <a:r>
-              <a:rPr sz="1300" b="1">
-                <a:solidFill>
-                  <a:srgbClr val="FFFFFF"/>
-                </a:solidFill>
-                <a:latin typeface="Verdana"/>
-                <a:ea typeface="Verdana"/>
-                <a:cs typeface="Verdana"/>
-              </a:rPr>
-              <a:t>3</a:t>
-            </a:r>
-          </a:p>
-        </p:txBody>
-      </p:sp>
-      <p:sp>
-        <p:nvSpPr>
-          <p:cNvPr id="17" name="TextBox 16"/>
-          <p:cNvSpPr txBox="1"/>
-          <p:nvPr/>
-        </p:nvSpPr>
-        <p:spPr>
-          <a:xfrm>
-            <a:off x="1691640" y="4041648"/>
-            <a:ext cx="6400800" cy="320040"/>
-          </a:xfrm>
-          <a:prstGeom prst="rect">
-            <a:avLst/>
-          </a:prstGeom>
-          <a:noFill/>
-        </p:spPr>
-        <p:txBody>
-          <a:bodyPr wrap="square" anchor="t">
-            <a:spAutoFit/>
-          </a:bodyPr>
-          <a:lstStyle/>
-          <a:p>
-            <a:pPr algn="l"/>
-            <a:r>
-              <a:rPr sz="1500" b="1">
-                <a:solidFill>
-                  <a:srgbClr val="26A6E0"/>
-                </a:solidFill>
-                <a:latin typeface="Verdana"/>
-                <a:ea typeface="Verdana"/>
-                <a:cs typeface="Verdana"/>
-              </a:rPr>
-              <a:t>Закрепить KPI на следующий этап</a:t>
-            </a:r>
-          </a:p>
-        </p:txBody>
-      </p:sp>
-      <p:sp>
-        <p:nvSpPr>
-          <p:cNvPr id="18" name="TextBox 17"/>
-          <p:cNvSpPr txBox="1"/>
-          <p:nvPr/>
-        </p:nvSpPr>
-        <p:spPr>
-          <a:xfrm>
-            <a:off x="1691640" y="4389120"/>
-            <a:ext cx="6400800" cy="365760"/>
-          </a:xfrm>
-          <a:prstGeom prst="rect">
-            <a:avLst/>
-          </a:prstGeom>
-          <a:noFill/>
-        </p:spPr>
-        <p:txBody>
-          <a:bodyPr wrap="square" anchor="t">
-            <a:spAutoFit/>
-          </a:bodyPr>
-          <a:lstStyle/>
-          <a:p>
-            <a:pPr algn="l"/>
-            <a:r>
-              <a:rPr sz="1300" b="0">
-                <a:solidFill>
-                  <a:srgbClr val="FFFFFF"/>
-                </a:solidFill>
-                <a:latin typeface="Verdana"/>
-                <a:ea typeface="Verdana"/>
-                <a:cs typeface="Verdana"/>
-              </a:rPr>
-              <a:t>Подключения + использование + переход на оплату после 3 месяцев.</a:t>
-            </a:r>
-          </a:p>
-        </p:txBody>
-      </p:sp>
-      <p:sp>
-        <p:nvSpPr>
-          <p:cNvPr id="19" name="Rounded Rectangle 18"/>
-          <p:cNvSpPr/>
-          <p:nvPr/>
-        </p:nvSpPr>
-        <p:spPr>
-          <a:xfrm>
-            <a:off x="8595360" y="1463040"/>
-            <a:ext cx="2743200" cy="3657600"/>
-          </a:xfrm>
-          <a:prstGeom prst="roundRect">
-            <a:avLst>
-              <a:gd name="adj" fmla="val 10000"/>
-            </a:avLst>
-          </a:prstGeom>
-          <a:solidFill>
-            <a:srgbClr val="26A6E0"/>
-          </a:solidFill>
-          <a:ln>
-            <a:noFill/>
-          </a:ln>
-        </p:spPr>
-        <p:style>
-          <a:lnRef idx="1">
-            <a:schemeClr val="accent1"/>
-          </a:lnRef>
-          <a:fillRef idx="3">
-            <a:schemeClr val="accent1"/>
-          </a:fillRef>
-          <a:effectRef idx="2">
-            <a:schemeClr val="accent1"/>
-          </a:effectRef>
-          <a:fontRef idx="minor">
-            <a:schemeClr val="lt1"/>
-          </a:fontRef>
-        </p:style>
-        <p:txBody>
-          <a:bodyPr rtlCol="0" anchor="ctr"/>
-          <a:lstStyle/>
-          <a:p>
-            <a:pPr algn="ctr"/>
-          </a:p>
-        </p:txBody>
-      </p:sp>
       <p:pic>
         <p:nvPicPr>
-          <p:cNvPr id="20" name="Picture 19" descr="icon_64.png"/>
+          <p:cNvPr id="5" name="Picture 4" descr="icon_66.png"/>
           <p:cNvPicPr>
             <a:picLocks noChangeAspect="1"/>
           </p:cNvPicPr>
@@ -8635,6 +8147,2056 @@
         </p:blipFill>
         <p:spPr>
           <a:xfrm>
+            <a:off x="1088136" y="1965960"/>
+            <a:ext cx="640080" cy="640080"/>
+          </a:xfrm>
+          <a:prstGeom prst="rect">
+            <a:avLst/>
+          </a:prstGeom>
+        </p:spPr>
+      </p:pic>
+      <p:sp>
+        <p:nvSpPr>
+          <p:cNvPr id="6" name="TextBox 5"/>
+          <p:cNvSpPr txBox="1"/>
+          <p:nvPr/>
+        </p:nvSpPr>
+        <p:spPr>
+          <a:xfrm>
+            <a:off x="1892808" y="1719072"/>
+            <a:ext cx="3977640" cy="365760"/>
+          </a:xfrm>
+          <a:prstGeom prst="rect">
+            <a:avLst/>
+          </a:prstGeom>
+          <a:noFill/>
+        </p:spPr>
+        <p:txBody>
+          <a:bodyPr wrap="square" anchor="t">
+            <a:spAutoFit/>
+          </a:bodyPr>
+          <a:lstStyle/>
+          <a:p>
+            <a:pPr algn="l"/>
+            <a:r>
+              <a:rPr sz="1500" b="1">
+                <a:solidFill>
+                  <a:srgbClr val="26A6E0"/>
+                </a:solidFill>
+                <a:latin typeface="Verdana"/>
+                <a:ea typeface="Verdana"/>
+                <a:cs typeface="Verdana"/>
+              </a:rPr>
+              <a:t>Два канала сразу</a:t>
+            </a:r>
+          </a:p>
+        </p:txBody>
+      </p:sp>
+      <p:sp>
+        <p:nvSpPr>
+          <p:cNvPr id="7" name="TextBox 6"/>
+          <p:cNvSpPr txBox="1"/>
+          <p:nvPr/>
+        </p:nvSpPr>
+        <p:spPr>
+          <a:xfrm>
+            <a:off x="1892808" y="2148840"/>
+            <a:ext cx="3977640" cy="1143000"/>
+          </a:xfrm>
+          <a:prstGeom prst="rect">
+            <a:avLst/>
+          </a:prstGeom>
+          <a:noFill/>
+        </p:spPr>
+        <p:txBody>
+          <a:bodyPr wrap="square" anchor="t">
+            <a:spAutoFit/>
+          </a:bodyPr>
+          <a:lstStyle/>
+          <a:p>
+            <a:pPr algn="l"/>
+            <a:r>
+              <a:rPr sz="1300" b="0">
+                <a:solidFill>
+                  <a:srgbClr val="FFFFFF"/>
+                </a:solidFill>
+                <a:latin typeface="Verdana"/>
+                <a:ea typeface="Verdana"/>
+                <a:cs typeface="Verdana"/>
+              </a:rPr>
+              <a:t>Вести параллельно: (1) база ЭПД → Доки, (2) скрипт связки сервисов.</a:t>
+            </a:r>
+          </a:p>
+        </p:txBody>
+      </p:sp>
+      <p:sp>
+        <p:nvSpPr>
+          <p:cNvPr id="8" name="Rounded Rectangle 7"/>
+          <p:cNvSpPr/>
+          <p:nvPr/>
+        </p:nvSpPr>
+        <p:spPr>
+          <a:xfrm>
+            <a:off x="6327648" y="1463040"/>
+            <a:ext cx="5212080" cy="2011680"/>
+          </a:xfrm>
+          <a:prstGeom prst="roundRect">
+            <a:avLst>
+              <a:gd name="adj" fmla="val 8000"/>
+            </a:avLst>
+          </a:prstGeom>
+          <a:solidFill>
+            <a:srgbClr val="3F3F3F"/>
+          </a:solidFill>
+          <a:ln>
+            <a:noFill/>
+          </a:ln>
+        </p:spPr>
+        <p:style>
+          <a:lnRef idx="1">
+            <a:schemeClr val="accent1"/>
+          </a:lnRef>
+          <a:fillRef idx="3">
+            <a:schemeClr val="accent1"/>
+          </a:fillRef>
+          <a:effectRef idx="2">
+            <a:schemeClr val="accent1"/>
+          </a:effectRef>
+          <a:fontRef idx="minor">
+            <a:schemeClr val="lt1"/>
+          </a:fontRef>
+        </p:style>
+        <p:txBody>
+          <a:bodyPr rtlCol="0" anchor="ctr"/>
+          <a:lstStyle/>
+          <a:p>
+            <a:pPr algn="ctr"/>
+          </a:p>
+        </p:txBody>
+      </p:sp>
+      <p:pic>
+        <p:nvPicPr>
+          <p:cNvPr id="9" name="Picture 8" descr="icon_54.png"/>
+          <p:cNvPicPr>
+            <a:picLocks noChangeAspect="1"/>
+          </p:cNvPicPr>
+          <p:nvPr/>
+        </p:nvPicPr>
+        <p:blipFill>
+          <a:blip r:embed="rId3"/>
+          <a:stretch>
+            <a:fillRect/>
+          </a:stretch>
+        </p:blipFill>
+        <p:spPr>
+          <a:xfrm>
+            <a:off x="6528816" y="1965960"/>
+            <a:ext cx="640080" cy="640080"/>
+          </a:xfrm>
+          <a:prstGeom prst="rect">
+            <a:avLst/>
+          </a:prstGeom>
+        </p:spPr>
+      </p:pic>
+      <p:sp>
+        <p:nvSpPr>
+          <p:cNvPr id="10" name="TextBox 9"/>
+          <p:cNvSpPr txBox="1"/>
+          <p:nvPr/>
+        </p:nvSpPr>
+        <p:spPr>
+          <a:xfrm>
+            <a:off x="7333488" y="1719072"/>
+            <a:ext cx="3977640" cy="365760"/>
+          </a:xfrm>
+          <a:prstGeom prst="rect">
+            <a:avLst/>
+          </a:prstGeom>
+          <a:noFill/>
+        </p:spPr>
+        <p:txBody>
+          <a:bodyPr wrap="square" anchor="t">
+            <a:spAutoFit/>
+          </a:bodyPr>
+          <a:lstStyle/>
+          <a:p>
+            <a:pPr algn="l"/>
+            <a:r>
+              <a:rPr sz="1500" b="1">
+                <a:solidFill>
+                  <a:srgbClr val="26A6E0"/>
+                </a:solidFill>
+                <a:latin typeface="Verdana"/>
+                <a:ea typeface="Verdana"/>
+                <a:cs typeface="Verdana"/>
+              </a:rPr>
+              <a:t>Продавать полный контур</a:t>
+            </a:r>
+          </a:p>
+        </p:txBody>
+      </p:sp>
+      <p:sp>
+        <p:nvSpPr>
+          <p:cNvPr id="11" name="TextBox 10"/>
+          <p:cNvSpPr txBox="1"/>
+          <p:nvPr/>
+        </p:nvSpPr>
+        <p:spPr>
+          <a:xfrm>
+            <a:off x="7333488" y="2148840"/>
+            <a:ext cx="3977640" cy="1143000"/>
+          </a:xfrm>
+          <a:prstGeom prst="rect">
+            <a:avLst/>
+          </a:prstGeom>
+          <a:noFill/>
+        </p:spPr>
+        <p:txBody>
+          <a:bodyPr wrap="square" anchor="t">
+            <a:spAutoFit/>
+          </a:bodyPr>
+          <a:lstStyle/>
+          <a:p>
+            <a:pPr algn="l"/>
+            <a:r>
+              <a:rPr sz="1300" b="0">
+                <a:solidFill>
+                  <a:srgbClr val="FFFFFF"/>
+                </a:solidFill>
+                <a:latin typeface="Verdana"/>
+                <a:ea typeface="Verdana"/>
+                <a:cs typeface="Verdana"/>
+              </a:rPr>
+              <a:t>В каждой сделке закрывать ЭДО (Доки) и, где уместно, ЭПД (Доки.Логистика) — два показателя.</a:t>
+            </a:r>
+          </a:p>
+        </p:txBody>
+      </p:sp>
+      <p:sp>
+        <p:nvSpPr>
+          <p:cNvPr id="12" name="Rounded Rectangle 11"/>
+          <p:cNvSpPr/>
+          <p:nvPr/>
+        </p:nvSpPr>
+        <p:spPr>
+          <a:xfrm>
+            <a:off x="886968" y="3657600"/>
+            <a:ext cx="5212080" cy="2011680"/>
+          </a:xfrm>
+          <a:prstGeom prst="roundRect">
+            <a:avLst>
+              <a:gd name="adj" fmla="val 8000"/>
+            </a:avLst>
+          </a:prstGeom>
+          <a:solidFill>
+            <a:srgbClr val="3F3F3F"/>
+          </a:solidFill>
+          <a:ln>
+            <a:noFill/>
+          </a:ln>
+        </p:spPr>
+        <p:style>
+          <a:lnRef idx="1">
+            <a:schemeClr val="accent1"/>
+          </a:lnRef>
+          <a:fillRef idx="3">
+            <a:schemeClr val="accent1"/>
+          </a:fillRef>
+          <a:effectRef idx="2">
+            <a:schemeClr val="accent1"/>
+          </a:effectRef>
+          <a:fontRef idx="minor">
+            <a:schemeClr val="lt1"/>
+          </a:fontRef>
+        </p:style>
+        <p:txBody>
+          <a:bodyPr rtlCol="0" anchor="ctr"/>
+          <a:lstStyle/>
+          <a:p>
+            <a:pPr algn="ctr"/>
+          </a:p>
+        </p:txBody>
+      </p:sp>
+      <p:pic>
+        <p:nvPicPr>
+          <p:cNvPr id="13" name="Picture 12" descr="icon_55.png"/>
+          <p:cNvPicPr>
+            <a:picLocks noChangeAspect="1"/>
+          </p:cNvPicPr>
+          <p:nvPr/>
+        </p:nvPicPr>
+        <p:blipFill>
+          <a:blip r:embed="rId4"/>
+          <a:stretch>
+            <a:fillRect/>
+          </a:stretch>
+        </p:blipFill>
+        <p:spPr>
+          <a:xfrm>
+            <a:off x="1088136" y="4160520"/>
+            <a:ext cx="640080" cy="640080"/>
+          </a:xfrm>
+          <a:prstGeom prst="rect">
+            <a:avLst/>
+          </a:prstGeom>
+        </p:spPr>
+      </p:pic>
+      <p:sp>
+        <p:nvSpPr>
+          <p:cNvPr id="14" name="TextBox 13"/>
+          <p:cNvSpPr txBox="1"/>
+          <p:nvPr/>
+        </p:nvSpPr>
+        <p:spPr>
+          <a:xfrm>
+            <a:off x="1892808" y="3913632"/>
+            <a:ext cx="3977640" cy="365760"/>
+          </a:xfrm>
+          <a:prstGeom prst="rect">
+            <a:avLst/>
+          </a:prstGeom>
+          <a:noFill/>
+        </p:spPr>
+        <p:txBody>
+          <a:bodyPr wrap="square" anchor="t">
+            <a:spAutoFit/>
+          </a:bodyPr>
+          <a:lstStyle/>
+          <a:p>
+            <a:pPr algn="l"/>
+            <a:r>
+              <a:rPr sz="1500" b="1">
+                <a:solidFill>
+                  <a:srgbClr val="26A6E0"/>
+                </a:solidFill>
+                <a:latin typeface="Verdana"/>
+                <a:ea typeface="Verdana"/>
+                <a:cs typeface="Verdana"/>
+              </a:rPr>
+              <a:t>Передать пакет as-is</a:t>
+            </a:r>
+          </a:p>
+        </p:txBody>
+      </p:sp>
+      <p:sp>
+        <p:nvSpPr>
+          <p:cNvPr id="15" name="TextBox 14"/>
+          <p:cNvSpPr txBox="1"/>
+          <p:nvPr/>
+        </p:nvSpPr>
+        <p:spPr>
+          <a:xfrm>
+            <a:off x="1892808" y="4343400"/>
+            <a:ext cx="3977640" cy="1143000"/>
+          </a:xfrm>
+          <a:prstGeom prst="rect">
+            <a:avLst/>
+          </a:prstGeom>
+          <a:noFill/>
+        </p:spPr>
+        <p:txBody>
+          <a:bodyPr wrap="square" anchor="t">
+            <a:spAutoFit/>
+          </a:bodyPr>
+          <a:lstStyle/>
+          <a:p>
+            <a:pPr algn="l"/>
+            <a:r>
+              <a:rPr sz="1300" b="0">
+                <a:solidFill>
+                  <a:srgbClr val="FFFFFF"/>
+                </a:solidFill>
+                <a:latin typeface="Verdana"/>
+                <a:ea typeface="Verdana"/>
+                <a:cs typeface="Verdana"/>
+              </a:rPr>
+              <a:t>Скрипты, сравнения, рассылки и КП — базовый набор. Идти по схеме «как использовать материалы».</a:t>
+            </a:r>
+          </a:p>
+        </p:txBody>
+      </p:sp>
+      <p:sp>
+        <p:nvSpPr>
+          <p:cNvPr id="16" name="Rounded Rectangle 15"/>
+          <p:cNvSpPr/>
+          <p:nvPr/>
+        </p:nvSpPr>
+        <p:spPr>
+          <a:xfrm>
+            <a:off x="6327648" y="3657600"/>
+            <a:ext cx="5212080" cy="2011680"/>
+          </a:xfrm>
+          <a:prstGeom prst="roundRect">
+            <a:avLst>
+              <a:gd name="adj" fmla="val 8000"/>
+            </a:avLst>
+          </a:prstGeom>
+          <a:solidFill>
+            <a:srgbClr val="3F3F3F"/>
+          </a:solidFill>
+          <a:ln>
+            <a:noFill/>
+          </a:ln>
+        </p:spPr>
+        <p:style>
+          <a:lnRef idx="1">
+            <a:schemeClr val="accent1"/>
+          </a:lnRef>
+          <a:fillRef idx="3">
+            <a:schemeClr val="accent1"/>
+          </a:fillRef>
+          <a:effectRef idx="2">
+            <a:schemeClr val="accent1"/>
+          </a:effectRef>
+          <a:fontRef idx="minor">
+            <a:schemeClr val="lt1"/>
+          </a:fontRef>
+        </p:style>
+        <p:txBody>
+          <a:bodyPr rtlCol="0" anchor="ctr"/>
+          <a:lstStyle/>
+          <a:p>
+            <a:pPr algn="ctr"/>
+          </a:p>
+        </p:txBody>
+      </p:sp>
+      <p:pic>
+        <p:nvPicPr>
+          <p:cNvPr id="17" name="Picture 16" descr="icon_64.png"/>
+          <p:cNvPicPr>
+            <a:picLocks noChangeAspect="1"/>
+          </p:cNvPicPr>
+          <p:nvPr/>
+        </p:nvPicPr>
+        <p:blipFill>
+          <a:blip r:embed="rId5"/>
+          <a:stretch>
+            <a:fillRect/>
+          </a:stretch>
+        </p:blipFill>
+        <p:spPr>
+          <a:xfrm>
+            <a:off x="6528816" y="4160520"/>
+            <a:ext cx="640080" cy="640080"/>
+          </a:xfrm>
+          <a:prstGeom prst="rect">
+            <a:avLst/>
+          </a:prstGeom>
+        </p:spPr>
+      </p:pic>
+      <p:sp>
+        <p:nvSpPr>
+          <p:cNvPr id="18" name="TextBox 17"/>
+          <p:cNvSpPr txBox="1"/>
+          <p:nvPr/>
+        </p:nvSpPr>
+        <p:spPr>
+          <a:xfrm>
+            <a:off x="7333488" y="3913632"/>
+            <a:ext cx="3977640" cy="365760"/>
+          </a:xfrm>
+          <a:prstGeom prst="rect">
+            <a:avLst/>
+          </a:prstGeom>
+          <a:noFill/>
+        </p:spPr>
+        <p:txBody>
+          <a:bodyPr wrap="square" anchor="t">
+            <a:spAutoFit/>
+          </a:bodyPr>
+          <a:lstStyle/>
+          <a:p>
+            <a:pPr algn="l"/>
+            <a:r>
+              <a:rPr sz="1500" b="1">
+                <a:solidFill>
+                  <a:srgbClr val="26A6E0"/>
+                </a:solidFill>
+                <a:latin typeface="Verdana"/>
+                <a:ea typeface="Verdana"/>
+                <a:cs typeface="Verdana"/>
+              </a:rPr>
+              <a:t>Добавить контроль воронки</a:t>
+            </a:r>
+          </a:p>
+        </p:txBody>
+      </p:sp>
+      <p:sp>
+        <p:nvSpPr>
+          <p:cNvPr id="19" name="TextBox 18"/>
+          <p:cNvSpPr txBox="1"/>
+          <p:nvPr/>
+        </p:nvSpPr>
+        <p:spPr>
+          <a:xfrm>
+            <a:off x="7333488" y="4343400"/>
+            <a:ext cx="3977640" cy="1143000"/>
+          </a:xfrm>
+          <a:prstGeom prst="rect">
+            <a:avLst/>
+          </a:prstGeom>
+          <a:noFill/>
+        </p:spPr>
+        <p:txBody>
+          <a:bodyPr wrap="square" anchor="t">
+            <a:spAutoFit/>
+          </a:bodyPr>
+          <a:lstStyle/>
+          <a:p>
+            <a:pPr algn="l"/>
+            <a:r>
+              <a:rPr sz="1300" b="0">
+                <a:solidFill>
+                  <a:srgbClr val="FFFFFF"/>
+                </a:solidFill>
+                <a:latin typeface="Verdana"/>
+                <a:ea typeface="Verdana"/>
+                <a:cs typeface="Verdana"/>
+              </a:rPr>
+              <a:t>Фиксировать: касания → демо → подключения → использование → оплата после пробного периода.</a:t>
+            </a:r>
+          </a:p>
+        </p:txBody>
+      </p:sp>
+    </p:spTree>
+  </p:cSld>
+  <p:clrMapOvr>
+    <a:masterClrMapping/>
+  </p:clrMapOvr>
+</p:sld>
+</file>
+
+<file path=ppt/slides/slide13.xml><?xml version="1.0" encoding="utf-8"?>
+<p:sld xmlns:a="http://schemas.openxmlformats.org/drawingml/2006/main" xmlns:p="http://schemas.openxmlformats.org/presentationml/2006/main" xmlns:r="http://schemas.openxmlformats.org/officeDocument/2006/relationships">
+  <p:cSld>
+    <p:spTree>
+      <p:nvGrpSpPr>
+        <p:cNvPr id="1" name=""/>
+        <p:cNvGrpSpPr/>
+        <p:nvPr/>
+      </p:nvGrpSpPr>
+      <p:grpSpPr/>
+      <p:sp>
+        <p:nvSpPr>
+          <p:cNvPr id="2" name="Title 1"/>
+          <p:cNvSpPr>
+            <a:spLocks noGrp="1"/>
+          </p:cNvSpPr>
+          <p:nvPr>
+            <p:ph type="title"/>
+          </p:nvPr>
+        </p:nvSpPr>
+        <p:spPr/>
+        <p:txBody>
+          <a:bodyPr/>
+          <a:lstStyle/>
+          <a:p>
+            <a:pPr algn="l"/>
+            <a:r>
+              <a:rPr sz="2400" b="1">
+                <a:solidFill>
+                  <a:srgbClr val="FFFFFF"/>
+                </a:solidFill>
+                <a:latin typeface="Verdana"/>
+                <a:ea typeface="Verdana"/>
+                <a:cs typeface="Verdana"/>
+              </a:rPr>
+              <a:t>Каких данных не хватает для полной защиты</a:t>
+            </a:r>
+          </a:p>
+        </p:txBody>
+      </p:sp>
+      <p:sp>
+        <p:nvSpPr>
+          <p:cNvPr id="3" name="Text Placeholder 2"/>
+          <p:cNvSpPr>
+            <a:spLocks noGrp="1"/>
+          </p:cNvSpPr>
+          <p:nvPr>
+            <p:ph type="body" idx="13" sz="quarter"/>
+          </p:nvPr>
+        </p:nvSpPr>
+        <p:spPr/>
+        <p:txBody>
+          <a:bodyPr/>
+          <a:lstStyle/>
+          <a:p/>
+        </p:txBody>
+      </p:sp>
+      <p:sp>
+        <p:nvSpPr>
+          <p:cNvPr id="4" name="TextBox 3"/>
+          <p:cNvSpPr txBox="1"/>
+          <p:nvPr/>
+        </p:nvSpPr>
+        <p:spPr>
+          <a:xfrm>
+            <a:off x="886968" y="1325880"/>
+            <a:ext cx="10424160" cy="411480"/>
+          </a:xfrm>
+          <a:prstGeom prst="rect">
+            <a:avLst/>
+          </a:prstGeom>
+          <a:noFill/>
+        </p:spPr>
+        <p:txBody>
+          <a:bodyPr wrap="square" anchor="t">
+            <a:spAutoFit/>
+          </a:bodyPr>
+          <a:lstStyle/>
+          <a:p>
+            <a:pPr algn="l"/>
+            <a:r>
+              <a:rPr sz="1300" b="0">
+                <a:solidFill>
+                  <a:srgbClr val="BFBFBF"/>
+                </a:solidFill>
+                <a:latin typeface="Verdana"/>
+                <a:ea typeface="Verdana"/>
+                <a:cs typeface="Verdana"/>
+              </a:rPr>
+              <a:t>Ниже — вопросы, которые усилят защиту и передачу. Если данные есть — добавим в презентацию.</a:t>
+            </a:r>
+          </a:p>
+        </p:txBody>
+      </p:sp>
+      <p:sp>
+        <p:nvSpPr>
+          <p:cNvPr id="5" name="Rounded Rectangle 4"/>
+          <p:cNvSpPr/>
+          <p:nvPr/>
+        </p:nvSpPr>
+        <p:spPr>
+          <a:xfrm>
+            <a:off x="886968" y="1828800"/>
+            <a:ext cx="5212080" cy="1143000"/>
+          </a:xfrm>
+          <a:prstGeom prst="roundRect">
+            <a:avLst>
+              <a:gd name="adj" fmla="val 6000"/>
+            </a:avLst>
+          </a:prstGeom>
+          <a:solidFill>
+            <a:srgbClr val="3F3F3F"/>
+          </a:solidFill>
+          <a:ln>
+            <a:noFill/>
+          </a:ln>
+        </p:spPr>
+        <p:style>
+          <a:lnRef idx="1">
+            <a:schemeClr val="accent1"/>
+          </a:lnRef>
+          <a:fillRef idx="3">
+            <a:schemeClr val="accent1"/>
+          </a:fillRef>
+          <a:effectRef idx="2">
+            <a:schemeClr val="accent1"/>
+          </a:effectRef>
+          <a:fontRef idx="minor">
+            <a:schemeClr val="lt1"/>
+          </a:fontRef>
+        </p:style>
+        <p:txBody>
+          <a:bodyPr rtlCol="0" anchor="ctr"/>
+          <a:lstStyle/>
+          <a:p>
+            <a:pPr algn="ctr"/>
+          </a:p>
+        </p:txBody>
+      </p:sp>
+      <p:sp>
+        <p:nvSpPr>
+          <p:cNvPr id="6" name="TextBox 5"/>
+          <p:cNvSpPr txBox="1"/>
+          <p:nvPr/>
+        </p:nvSpPr>
+        <p:spPr>
+          <a:xfrm>
+            <a:off x="1115568" y="1965960"/>
+            <a:ext cx="4754880" cy="274320"/>
+          </a:xfrm>
+          <a:prstGeom prst="rect">
+            <a:avLst/>
+          </a:prstGeom>
+          <a:noFill/>
+        </p:spPr>
+        <p:txBody>
+          <a:bodyPr wrap="square" anchor="t">
+            <a:spAutoFit/>
+          </a:bodyPr>
+          <a:lstStyle/>
+          <a:p>
+            <a:pPr algn="l"/>
+            <a:r>
+              <a:rPr sz="1300" b="1">
+                <a:solidFill>
+                  <a:srgbClr val="26A6E0"/>
+                </a:solidFill>
+                <a:latin typeface="Verdana"/>
+                <a:ea typeface="Verdana"/>
+                <a:cs typeface="Verdana"/>
+              </a:rPr>
+              <a:t>Воронка</a:t>
+            </a:r>
+          </a:p>
+        </p:txBody>
+      </p:sp>
+      <p:sp>
+        <p:nvSpPr>
+          <p:cNvPr id="7" name="TextBox 6"/>
+          <p:cNvSpPr txBox="1"/>
+          <p:nvPr/>
+        </p:nvSpPr>
+        <p:spPr>
+          <a:xfrm>
+            <a:off x="1115568" y="2286000"/>
+            <a:ext cx="4754880" cy="548640"/>
+          </a:xfrm>
+          <a:prstGeom prst="rect">
+            <a:avLst/>
+          </a:prstGeom>
+          <a:noFill/>
+        </p:spPr>
+        <p:txBody>
+          <a:bodyPr wrap="square" anchor="t">
+            <a:spAutoFit/>
+          </a:bodyPr>
+          <a:lstStyle/>
+          <a:p>
+            <a:pPr algn="l"/>
+            <a:r>
+              <a:rPr sz="1200" b="0">
+                <a:solidFill>
+                  <a:srgbClr val="FFFFFF"/>
+                </a:solidFill>
+                <a:latin typeface="Verdana"/>
+                <a:ea typeface="Verdana"/>
+                <a:cs typeface="Verdana"/>
+              </a:rPr>
+              <a:t>Сколько касаний / звонков / демо на 18 продаж? Какая конверсия по этапам?</a:t>
+            </a:r>
+          </a:p>
+        </p:txBody>
+      </p:sp>
+      <p:sp>
+        <p:nvSpPr>
+          <p:cNvPr id="8" name="Rounded Rectangle 7"/>
+          <p:cNvSpPr/>
+          <p:nvPr/>
+        </p:nvSpPr>
+        <p:spPr>
+          <a:xfrm>
+            <a:off x="6327648" y="1828800"/>
+            <a:ext cx="5212080" cy="1143000"/>
+          </a:xfrm>
+          <a:prstGeom prst="roundRect">
+            <a:avLst>
+              <a:gd name="adj" fmla="val 6000"/>
+            </a:avLst>
+          </a:prstGeom>
+          <a:solidFill>
+            <a:srgbClr val="3F3F3F"/>
+          </a:solidFill>
+          <a:ln>
+            <a:noFill/>
+          </a:ln>
+        </p:spPr>
+        <p:style>
+          <a:lnRef idx="1">
+            <a:schemeClr val="accent1"/>
+          </a:lnRef>
+          <a:fillRef idx="3">
+            <a:schemeClr val="accent1"/>
+          </a:fillRef>
+          <a:effectRef idx="2">
+            <a:schemeClr val="accent1"/>
+          </a:effectRef>
+          <a:fontRef idx="minor">
+            <a:schemeClr val="lt1"/>
+          </a:fontRef>
+        </p:style>
+        <p:txBody>
+          <a:bodyPr rtlCol="0" anchor="ctr"/>
+          <a:lstStyle/>
+          <a:p>
+            <a:pPr algn="ctr"/>
+          </a:p>
+        </p:txBody>
+      </p:sp>
+      <p:sp>
+        <p:nvSpPr>
+          <p:cNvPr id="9" name="TextBox 8"/>
+          <p:cNvSpPr txBox="1"/>
+          <p:nvPr/>
+        </p:nvSpPr>
+        <p:spPr>
+          <a:xfrm>
+            <a:off x="6556248" y="1965960"/>
+            <a:ext cx="4754880" cy="274320"/>
+          </a:xfrm>
+          <a:prstGeom prst="rect">
+            <a:avLst/>
+          </a:prstGeom>
+          <a:noFill/>
+        </p:spPr>
+        <p:txBody>
+          <a:bodyPr wrap="square" anchor="t">
+            <a:spAutoFit/>
+          </a:bodyPr>
+          <a:lstStyle/>
+          <a:p>
+            <a:pPr algn="l"/>
+            <a:r>
+              <a:rPr sz="1300" b="1">
+                <a:solidFill>
+                  <a:srgbClr val="26A6E0"/>
+                </a:solidFill>
+                <a:latin typeface="Verdana"/>
+                <a:ea typeface="Verdana"/>
+                <a:cs typeface="Verdana"/>
+              </a:rPr>
+              <a:t>База</a:t>
+            </a:r>
+          </a:p>
+        </p:txBody>
+      </p:sp>
+      <p:sp>
+        <p:nvSpPr>
+          <p:cNvPr id="10" name="TextBox 9"/>
+          <p:cNvSpPr txBox="1"/>
+          <p:nvPr/>
+        </p:nvSpPr>
+        <p:spPr>
+          <a:xfrm>
+            <a:off x="6556248" y="2286000"/>
+            <a:ext cx="4754880" cy="548640"/>
+          </a:xfrm>
+          <a:prstGeom prst="rect">
+            <a:avLst/>
+          </a:prstGeom>
+          <a:noFill/>
+        </p:spPr>
+        <p:txBody>
+          <a:bodyPr wrap="square" anchor="t">
+            <a:spAutoFit/>
+          </a:bodyPr>
+          <a:lstStyle/>
+          <a:p>
+            <a:pPr algn="l"/>
+            <a:r>
+              <a:rPr sz="1200" b="0">
+                <a:solidFill>
+                  <a:srgbClr val="FFFFFF"/>
+                </a:solidFill>
+                <a:latin typeface="Verdana"/>
+                <a:ea typeface="Verdana"/>
+                <a:cs typeface="Verdana"/>
+              </a:rPr>
+              <a:t>Размер базы ЭПД и сколько контактов обработали по каждой гипотезе?</a:t>
+            </a:r>
+          </a:p>
+        </p:txBody>
+      </p:sp>
+      <p:sp>
+        <p:nvSpPr>
+          <p:cNvPr id="11" name="Rounded Rectangle 10"/>
+          <p:cNvSpPr/>
+          <p:nvPr/>
+        </p:nvSpPr>
+        <p:spPr>
+          <a:xfrm>
+            <a:off x="886968" y="3108960"/>
+            <a:ext cx="5212080" cy="1143000"/>
+          </a:xfrm>
+          <a:prstGeom prst="roundRect">
+            <a:avLst>
+              <a:gd name="adj" fmla="val 6000"/>
+            </a:avLst>
+          </a:prstGeom>
+          <a:solidFill>
+            <a:srgbClr val="3F3F3F"/>
+          </a:solidFill>
+          <a:ln>
+            <a:noFill/>
+          </a:ln>
+        </p:spPr>
+        <p:style>
+          <a:lnRef idx="1">
+            <a:schemeClr val="accent1"/>
+          </a:lnRef>
+          <a:fillRef idx="3">
+            <a:schemeClr val="accent1"/>
+          </a:fillRef>
+          <a:effectRef idx="2">
+            <a:schemeClr val="accent1"/>
+          </a:effectRef>
+          <a:fontRef idx="minor">
+            <a:schemeClr val="lt1"/>
+          </a:fontRef>
+        </p:style>
+        <p:txBody>
+          <a:bodyPr rtlCol="0" anchor="ctr"/>
+          <a:lstStyle/>
+          <a:p>
+            <a:pPr algn="ctr"/>
+          </a:p>
+        </p:txBody>
+      </p:sp>
+      <p:sp>
+        <p:nvSpPr>
+          <p:cNvPr id="12" name="TextBox 11"/>
+          <p:cNvSpPr txBox="1"/>
+          <p:nvPr/>
+        </p:nvSpPr>
+        <p:spPr>
+          <a:xfrm>
+            <a:off x="1115568" y="3246120"/>
+            <a:ext cx="4754880" cy="274320"/>
+          </a:xfrm>
+          <a:prstGeom prst="rect">
+            <a:avLst/>
+          </a:prstGeom>
+          <a:noFill/>
+        </p:spPr>
+        <p:txBody>
+          <a:bodyPr wrap="square" anchor="t">
+            <a:spAutoFit/>
+          </a:bodyPr>
+          <a:lstStyle/>
+          <a:p>
+            <a:pPr algn="l"/>
+            <a:r>
+              <a:rPr sz="1300" b="1">
+                <a:solidFill>
+                  <a:srgbClr val="26A6E0"/>
+                </a:solidFill>
+                <a:latin typeface="Verdana"/>
+                <a:ea typeface="Verdana"/>
+                <a:cs typeface="Verdana"/>
+              </a:rPr>
+              <a:t>Деньги</a:t>
+            </a:r>
+          </a:p>
+        </p:txBody>
+      </p:sp>
+      <p:sp>
+        <p:nvSpPr>
+          <p:cNvPr id="13" name="TextBox 12"/>
+          <p:cNvSpPr txBox="1"/>
+          <p:nvPr/>
+        </p:nvSpPr>
+        <p:spPr>
+          <a:xfrm>
+            <a:off x="1115568" y="3566160"/>
+            <a:ext cx="4754880" cy="548640"/>
+          </a:xfrm>
+          <a:prstGeom prst="rect">
+            <a:avLst/>
+          </a:prstGeom>
+          <a:noFill/>
+        </p:spPr>
+        <p:txBody>
+          <a:bodyPr wrap="square" anchor="t">
+            <a:spAutoFit/>
+          </a:bodyPr>
+          <a:lstStyle/>
+          <a:p>
+            <a:pPr algn="l"/>
+            <a:r>
+              <a:rPr sz="1200" b="0">
+                <a:solidFill>
+                  <a:srgbClr val="FFFFFF"/>
+                </a:solidFill>
+                <a:latin typeface="Verdana"/>
+                <a:ea typeface="Verdana"/>
+                <a:cs typeface="Verdana"/>
+              </a:rPr>
+              <a:t>Средний чек, выручка сейчас и прогноз после окончания 3 бесплатных месяцев?</a:t>
+            </a:r>
+          </a:p>
+        </p:txBody>
+      </p:sp>
+      <p:sp>
+        <p:nvSpPr>
+          <p:cNvPr id="14" name="Rounded Rectangle 13"/>
+          <p:cNvSpPr/>
+          <p:nvPr/>
+        </p:nvSpPr>
+        <p:spPr>
+          <a:xfrm>
+            <a:off x="6327648" y="3108960"/>
+            <a:ext cx="5212080" cy="1143000"/>
+          </a:xfrm>
+          <a:prstGeom prst="roundRect">
+            <a:avLst>
+              <a:gd name="adj" fmla="val 6000"/>
+            </a:avLst>
+          </a:prstGeom>
+          <a:solidFill>
+            <a:srgbClr val="3F3F3F"/>
+          </a:solidFill>
+          <a:ln>
+            <a:noFill/>
+          </a:ln>
+        </p:spPr>
+        <p:style>
+          <a:lnRef idx="1">
+            <a:schemeClr val="accent1"/>
+          </a:lnRef>
+          <a:fillRef idx="3">
+            <a:schemeClr val="accent1"/>
+          </a:fillRef>
+          <a:effectRef idx="2">
+            <a:schemeClr val="accent1"/>
+          </a:effectRef>
+          <a:fontRef idx="minor">
+            <a:schemeClr val="lt1"/>
+          </a:fontRef>
+        </p:style>
+        <p:txBody>
+          <a:bodyPr rtlCol="0" anchor="ctr"/>
+          <a:lstStyle/>
+          <a:p>
+            <a:pPr algn="ctr"/>
+          </a:p>
+        </p:txBody>
+      </p:sp>
+      <p:sp>
+        <p:nvSpPr>
+          <p:cNvPr id="15" name="TextBox 14"/>
+          <p:cNvSpPr txBox="1"/>
+          <p:nvPr/>
+        </p:nvSpPr>
+        <p:spPr>
+          <a:xfrm>
+            <a:off x="6556248" y="3246120"/>
+            <a:ext cx="4754880" cy="274320"/>
+          </a:xfrm>
+          <a:prstGeom prst="rect">
+            <a:avLst/>
+          </a:prstGeom>
+          <a:noFill/>
+        </p:spPr>
+        <p:txBody>
+          <a:bodyPr wrap="square" anchor="t">
+            <a:spAutoFit/>
+          </a:bodyPr>
+          <a:lstStyle/>
+          <a:p>
+            <a:pPr algn="l"/>
+            <a:r>
+              <a:rPr sz="1300" b="1">
+                <a:solidFill>
+                  <a:srgbClr val="26A6E0"/>
+                </a:solidFill>
+                <a:latin typeface="Verdana"/>
+                <a:ea typeface="Verdana"/>
+                <a:cs typeface="Verdana"/>
+              </a:rPr>
+              <a:t>Активность</a:t>
+            </a:r>
+          </a:p>
+        </p:txBody>
+      </p:sp>
+      <p:sp>
+        <p:nvSpPr>
+          <p:cNvPr id="16" name="TextBox 15"/>
+          <p:cNvSpPr txBox="1"/>
+          <p:nvPr/>
+        </p:nvSpPr>
+        <p:spPr>
+          <a:xfrm>
+            <a:off x="6556248" y="3566160"/>
+            <a:ext cx="4754880" cy="548640"/>
+          </a:xfrm>
+          <a:prstGeom prst="rect">
+            <a:avLst/>
+          </a:prstGeom>
+          <a:noFill/>
+        </p:spPr>
+        <p:txBody>
+          <a:bodyPr wrap="square" anchor="t">
+            <a:spAutoFit/>
+          </a:bodyPr>
+          <a:lstStyle/>
+          <a:p>
+            <a:pPr algn="l"/>
+            <a:r>
+              <a:rPr sz="1200" b="0">
+                <a:solidFill>
+                  <a:srgbClr val="FFFFFF"/>
+                </a:solidFill>
+                <a:latin typeface="Verdana"/>
+                <a:ea typeface="Verdana"/>
+                <a:cs typeface="Verdana"/>
+              </a:rPr>
+              <a:t>Сколько из 18 реально начали отправлять документы?</a:t>
+            </a:r>
+          </a:p>
+        </p:txBody>
+      </p:sp>
+      <p:sp>
+        <p:nvSpPr>
+          <p:cNvPr id="17" name="Rounded Rectangle 16"/>
+          <p:cNvSpPr/>
+          <p:nvPr/>
+        </p:nvSpPr>
+        <p:spPr>
+          <a:xfrm>
+            <a:off x="886968" y="4389120"/>
+            <a:ext cx="5212080" cy="1143000"/>
+          </a:xfrm>
+          <a:prstGeom prst="roundRect">
+            <a:avLst>
+              <a:gd name="adj" fmla="val 6000"/>
+            </a:avLst>
+          </a:prstGeom>
+          <a:solidFill>
+            <a:srgbClr val="3F3F3F"/>
+          </a:solidFill>
+          <a:ln>
+            <a:noFill/>
+          </a:ln>
+        </p:spPr>
+        <p:style>
+          <a:lnRef idx="1">
+            <a:schemeClr val="accent1"/>
+          </a:lnRef>
+          <a:fillRef idx="3">
+            <a:schemeClr val="accent1"/>
+          </a:fillRef>
+          <a:effectRef idx="2">
+            <a:schemeClr val="accent1"/>
+          </a:effectRef>
+          <a:fontRef idx="minor">
+            <a:schemeClr val="lt1"/>
+          </a:fontRef>
+        </p:style>
+        <p:txBody>
+          <a:bodyPr rtlCol="0" anchor="ctr"/>
+          <a:lstStyle/>
+          <a:p>
+            <a:pPr algn="ctr"/>
+          </a:p>
+        </p:txBody>
+      </p:sp>
+      <p:sp>
+        <p:nvSpPr>
+          <p:cNvPr id="18" name="TextBox 17"/>
+          <p:cNvSpPr txBox="1"/>
+          <p:nvPr/>
+        </p:nvSpPr>
+        <p:spPr>
+          <a:xfrm>
+            <a:off x="1115568" y="4526280"/>
+            <a:ext cx="4754880" cy="274320"/>
+          </a:xfrm>
+          <a:prstGeom prst="rect">
+            <a:avLst/>
+          </a:prstGeom>
+          <a:noFill/>
+        </p:spPr>
+        <p:txBody>
+          <a:bodyPr wrap="square" anchor="t">
+            <a:spAutoFit/>
+          </a:bodyPr>
+          <a:lstStyle/>
+          <a:p>
+            <a:pPr algn="l"/>
+            <a:r>
+              <a:rPr sz="1300" b="1">
+                <a:solidFill>
+                  <a:srgbClr val="26A6E0"/>
+                </a:solidFill>
+                <a:latin typeface="Verdana"/>
+                <a:ea typeface="Verdana"/>
+                <a:cs typeface="Verdana"/>
+              </a:rPr>
+              <a:t>Отказы</a:t>
+            </a:r>
+          </a:p>
+        </p:txBody>
+      </p:sp>
+      <p:sp>
+        <p:nvSpPr>
+          <p:cNvPr id="19" name="TextBox 18"/>
+          <p:cNvSpPr txBox="1"/>
+          <p:nvPr/>
+        </p:nvSpPr>
+        <p:spPr>
+          <a:xfrm>
+            <a:off x="1115568" y="4846320"/>
+            <a:ext cx="4754880" cy="548640"/>
+          </a:xfrm>
+          <a:prstGeom prst="rect">
+            <a:avLst/>
+          </a:prstGeom>
+          <a:noFill/>
+        </p:spPr>
+        <p:txBody>
+          <a:bodyPr wrap="square" anchor="t">
+            <a:spAutoFit/>
+          </a:bodyPr>
+          <a:lstStyle/>
+          <a:p>
+            <a:pPr algn="l"/>
+            <a:r>
+              <a:rPr sz="1200" b="0">
+                <a:solidFill>
+                  <a:srgbClr val="FFFFFF"/>
+                </a:solidFill>
+                <a:latin typeface="Verdana"/>
+                <a:ea typeface="Verdana"/>
+                <a:cs typeface="Verdana"/>
+              </a:rPr>
+              <a:t>Типовые причины «нет» и где клиенты отваливаются чаще всего?</a:t>
+            </a:r>
+          </a:p>
+        </p:txBody>
+      </p:sp>
+      <p:sp>
+        <p:nvSpPr>
+          <p:cNvPr id="20" name="Rounded Rectangle 19"/>
+          <p:cNvSpPr/>
+          <p:nvPr/>
+        </p:nvSpPr>
+        <p:spPr>
+          <a:xfrm>
+            <a:off x="6327648" y="4389120"/>
+            <a:ext cx="5212080" cy="1143000"/>
+          </a:xfrm>
+          <a:prstGeom prst="roundRect">
+            <a:avLst>
+              <a:gd name="adj" fmla="val 6000"/>
+            </a:avLst>
+          </a:prstGeom>
+          <a:solidFill>
+            <a:srgbClr val="3F3F3F"/>
+          </a:solidFill>
+          <a:ln>
+            <a:noFill/>
+          </a:ln>
+        </p:spPr>
+        <p:style>
+          <a:lnRef idx="1">
+            <a:schemeClr val="accent1"/>
+          </a:lnRef>
+          <a:fillRef idx="3">
+            <a:schemeClr val="accent1"/>
+          </a:fillRef>
+          <a:effectRef idx="2">
+            <a:schemeClr val="accent1"/>
+          </a:effectRef>
+          <a:fontRef idx="minor">
+            <a:schemeClr val="lt1"/>
+          </a:fontRef>
+        </p:style>
+        <p:txBody>
+          <a:bodyPr rtlCol="0" anchor="ctr"/>
+          <a:lstStyle/>
+          <a:p>
+            <a:pPr algn="ctr"/>
+          </a:p>
+        </p:txBody>
+      </p:sp>
+      <p:sp>
+        <p:nvSpPr>
+          <p:cNvPr id="21" name="TextBox 20"/>
+          <p:cNvSpPr txBox="1"/>
+          <p:nvPr/>
+        </p:nvSpPr>
+        <p:spPr>
+          <a:xfrm>
+            <a:off x="6556248" y="4526280"/>
+            <a:ext cx="4754880" cy="274320"/>
+          </a:xfrm>
+          <a:prstGeom prst="rect">
+            <a:avLst/>
+          </a:prstGeom>
+          <a:noFill/>
+        </p:spPr>
+        <p:txBody>
+          <a:bodyPr wrap="square" anchor="t">
+            <a:spAutoFit/>
+          </a:bodyPr>
+          <a:lstStyle/>
+          <a:p>
+            <a:pPr algn="l"/>
+            <a:r>
+              <a:rPr sz="1300" b="1">
+                <a:solidFill>
+                  <a:srgbClr val="26A6E0"/>
+                </a:solidFill>
+                <a:latin typeface="Verdana"/>
+                <a:ea typeface="Verdana"/>
+                <a:cs typeface="Verdana"/>
+              </a:rPr>
+              <a:t>Учёт KPI</a:t>
+            </a:r>
+          </a:p>
+        </p:txBody>
+      </p:sp>
+      <p:sp>
+        <p:nvSpPr>
+          <p:cNvPr id="22" name="TextBox 21"/>
+          <p:cNvSpPr txBox="1"/>
+          <p:nvPr/>
+        </p:nvSpPr>
+        <p:spPr>
+          <a:xfrm>
+            <a:off x="6556248" y="4846320"/>
+            <a:ext cx="4754880" cy="548640"/>
+          </a:xfrm>
+          <a:prstGeom prst="rect">
+            <a:avLst/>
+          </a:prstGeom>
+          <a:noFill/>
+        </p:spPr>
+        <p:txBody>
+          <a:bodyPr wrap="square" anchor="t">
+            <a:spAutoFit/>
+          </a:bodyPr>
+          <a:lstStyle/>
+          <a:p>
+            <a:pPr algn="l"/>
+            <a:r>
+              <a:rPr sz="1200" b="0">
+                <a:solidFill>
+                  <a:srgbClr val="FFFFFF"/>
+                </a:solidFill>
+                <a:latin typeface="Verdana"/>
+                <a:ea typeface="Verdana"/>
+                <a:cs typeface="Verdana"/>
+              </a:rPr>
+              <a:t>Как сейчас фиксируют вклад сделки: только ЭДО, только ЭПД или оба показателя?</a:t>
+            </a:r>
+          </a:p>
+        </p:txBody>
+      </p:sp>
+    </p:spTree>
+  </p:cSld>
+  <p:clrMapOvr>
+    <a:masterClrMapping/>
+  </p:clrMapOvr>
+</p:sld>
+</file>
+
+<file path=ppt/slides/slide14.xml><?xml version="1.0" encoding="utf-8"?>
+<p:sld xmlns:a="http://schemas.openxmlformats.org/drawingml/2006/main" xmlns:p="http://schemas.openxmlformats.org/presentationml/2006/main" xmlns:r="http://schemas.openxmlformats.org/officeDocument/2006/relationships">
+  <p:cSld>
+    <p:spTree>
+      <p:nvGrpSpPr>
+        <p:cNvPr id="1" name=""/>
+        <p:cNvGrpSpPr/>
+        <p:nvPr/>
+      </p:nvGrpSpPr>
+      <p:grpSpPr/>
+      <p:sp>
+        <p:nvSpPr>
+          <p:cNvPr id="2" name="Title 1"/>
+          <p:cNvSpPr>
+            <a:spLocks noGrp="1"/>
+          </p:cNvSpPr>
+          <p:nvPr>
+            <p:ph type="title"/>
+          </p:nvPr>
+        </p:nvSpPr>
+        <p:spPr/>
+        <p:txBody>
+          <a:bodyPr/>
+          <a:lstStyle/>
+          <a:p>
+            <a:pPr algn="l"/>
+            <a:r>
+              <a:rPr sz="2600" b="1">
+                <a:solidFill>
+                  <a:srgbClr val="FFFFFF"/>
+                </a:solidFill>
+                <a:latin typeface="Verdana"/>
+                <a:ea typeface="Verdana"/>
+                <a:cs typeface="Verdana"/>
+              </a:rPr>
+              <a:t>Просим принять решение</a:t>
+            </a:r>
+          </a:p>
+        </p:txBody>
+      </p:sp>
+      <p:sp>
+        <p:nvSpPr>
+          <p:cNvPr id="3" name="Text Placeholder 2"/>
+          <p:cNvSpPr>
+            <a:spLocks noGrp="1"/>
+          </p:cNvSpPr>
+          <p:nvPr>
+            <p:ph type="body" idx="13" sz="quarter"/>
+          </p:nvPr>
+        </p:nvSpPr>
+        <p:spPr/>
+        <p:txBody>
+          <a:bodyPr/>
+          <a:lstStyle/>
+          <a:p/>
+        </p:txBody>
+      </p:sp>
+      <p:sp>
+        <p:nvSpPr>
+          <p:cNvPr id="4" name="Rounded Rectangle 3"/>
+          <p:cNvSpPr/>
+          <p:nvPr/>
+        </p:nvSpPr>
+        <p:spPr>
+          <a:xfrm>
+            <a:off x="886968" y="1463040"/>
+            <a:ext cx="7498079" cy="1051560"/>
+          </a:xfrm>
+          <a:prstGeom prst="roundRect">
+            <a:avLst>
+              <a:gd name="adj" fmla="val 8000"/>
+            </a:avLst>
+          </a:prstGeom>
+          <a:solidFill>
+            <a:srgbClr val="3F3F3F"/>
+          </a:solidFill>
+          <a:ln>
+            <a:noFill/>
+          </a:ln>
+        </p:spPr>
+        <p:style>
+          <a:lnRef idx="1">
+            <a:schemeClr val="accent1"/>
+          </a:lnRef>
+          <a:fillRef idx="3">
+            <a:schemeClr val="accent1"/>
+          </a:fillRef>
+          <a:effectRef idx="2">
+            <a:schemeClr val="accent1"/>
+          </a:effectRef>
+          <a:fontRef idx="minor">
+            <a:schemeClr val="lt1"/>
+          </a:fontRef>
+        </p:style>
+        <p:txBody>
+          <a:bodyPr rtlCol="0" anchor="ctr"/>
+          <a:lstStyle/>
+          <a:p>
+            <a:pPr algn="ctr"/>
+          </a:p>
+        </p:txBody>
+      </p:sp>
+      <p:sp>
+        <p:nvSpPr>
+          <p:cNvPr id="5" name="Oval 4"/>
+          <p:cNvSpPr/>
+          <p:nvPr/>
+        </p:nvSpPr>
+        <p:spPr>
+          <a:xfrm>
+            <a:off x="1097280" y="1783080"/>
+            <a:ext cx="384048" cy="384048"/>
+          </a:xfrm>
+          <a:prstGeom prst="ellipse">
+            <a:avLst/>
+          </a:prstGeom>
+          <a:solidFill>
+            <a:srgbClr val="26A6E0"/>
+          </a:solidFill>
+          <a:ln>
+            <a:noFill/>
+          </a:ln>
+        </p:spPr>
+        <p:style>
+          <a:lnRef idx="1">
+            <a:schemeClr val="accent1"/>
+          </a:lnRef>
+          <a:fillRef idx="3">
+            <a:schemeClr val="accent1"/>
+          </a:fillRef>
+          <a:effectRef idx="2">
+            <a:schemeClr val="accent1"/>
+          </a:effectRef>
+          <a:fontRef idx="minor">
+            <a:schemeClr val="lt1"/>
+          </a:fontRef>
+        </p:style>
+        <p:txBody>
+          <a:bodyPr rtlCol="0" anchor="ctr"/>
+          <a:lstStyle/>
+          <a:p>
+            <a:pPr algn="ctr"/>
+          </a:p>
+        </p:txBody>
+      </p:sp>
+      <p:sp>
+        <p:nvSpPr>
+          <p:cNvPr id="6" name="TextBox 5"/>
+          <p:cNvSpPr txBox="1"/>
+          <p:nvPr/>
+        </p:nvSpPr>
+        <p:spPr>
+          <a:xfrm>
+            <a:off x="1097280" y="1783080"/>
+            <a:ext cx="384048" cy="384048"/>
+          </a:xfrm>
+          <a:prstGeom prst="rect">
+            <a:avLst/>
+          </a:prstGeom>
+          <a:noFill/>
+        </p:spPr>
+        <p:txBody>
+          <a:bodyPr wrap="square" anchor="ctr">
+            <a:spAutoFit/>
+          </a:bodyPr>
+          <a:lstStyle/>
+          <a:p>
+            <a:pPr algn="ctr"/>
+            <a:r>
+              <a:rPr sz="1300" b="1">
+                <a:solidFill>
+                  <a:srgbClr val="FFFFFF"/>
+                </a:solidFill>
+                <a:latin typeface="Verdana"/>
+                <a:ea typeface="Verdana"/>
+                <a:cs typeface="Verdana"/>
+              </a:rPr>
+              <a:t>1</a:t>
+            </a:r>
+          </a:p>
+        </p:txBody>
+      </p:sp>
+      <p:sp>
+        <p:nvSpPr>
+          <p:cNvPr id="7" name="TextBox 6"/>
+          <p:cNvSpPr txBox="1"/>
+          <p:nvPr/>
+        </p:nvSpPr>
+        <p:spPr>
+          <a:xfrm>
+            <a:off x="1691640" y="1664208"/>
+            <a:ext cx="6400800" cy="320040"/>
+          </a:xfrm>
+          <a:prstGeom prst="rect">
+            <a:avLst/>
+          </a:prstGeom>
+          <a:noFill/>
+        </p:spPr>
+        <p:txBody>
+          <a:bodyPr wrap="square" anchor="t">
+            <a:spAutoFit/>
+          </a:bodyPr>
+          <a:lstStyle/>
+          <a:p>
+            <a:pPr algn="l"/>
+            <a:r>
+              <a:rPr sz="1500" b="1">
+                <a:solidFill>
+                  <a:srgbClr val="26A6E0"/>
+                </a:solidFill>
+                <a:latin typeface="Verdana"/>
+                <a:ea typeface="Verdana"/>
+                <a:cs typeface="Verdana"/>
+              </a:rPr>
+              <a:t>Признать пилот успешным</a:t>
+            </a:r>
+          </a:p>
+        </p:txBody>
+      </p:sp>
+      <p:sp>
+        <p:nvSpPr>
+          <p:cNvPr id="8" name="TextBox 7"/>
+          <p:cNvSpPr txBox="1"/>
+          <p:nvPr/>
+        </p:nvSpPr>
+        <p:spPr>
+          <a:xfrm>
+            <a:off x="1691640" y="2011680"/>
+            <a:ext cx="6400800" cy="365760"/>
+          </a:xfrm>
+          <a:prstGeom prst="rect">
+            <a:avLst/>
+          </a:prstGeom>
+          <a:noFill/>
+        </p:spPr>
+        <p:txBody>
+          <a:bodyPr wrap="square" anchor="t">
+            <a:spAutoFit/>
+          </a:bodyPr>
+          <a:lstStyle/>
+          <a:p>
+            <a:pPr algn="l"/>
+            <a:r>
+              <a:rPr sz="1300" b="0">
+                <a:solidFill>
+                  <a:srgbClr val="FFFFFF"/>
+                </a:solidFill>
+                <a:latin typeface="Verdana"/>
+                <a:ea typeface="Verdana"/>
+                <a:cs typeface="Verdana"/>
+              </a:rPr>
+              <a:t>18 подключений за 7 недель, обе гипотезы подтверждены поровну.</a:t>
+            </a:r>
+          </a:p>
+        </p:txBody>
+      </p:sp>
+      <p:sp>
+        <p:nvSpPr>
+          <p:cNvPr id="9" name="Rounded Rectangle 8"/>
+          <p:cNvSpPr/>
+          <p:nvPr/>
+        </p:nvSpPr>
+        <p:spPr>
+          <a:xfrm>
+            <a:off x="886968" y="2651760"/>
+            <a:ext cx="7498079" cy="1051560"/>
+          </a:xfrm>
+          <a:prstGeom prst="roundRect">
+            <a:avLst>
+              <a:gd name="adj" fmla="val 8000"/>
+            </a:avLst>
+          </a:prstGeom>
+          <a:solidFill>
+            <a:srgbClr val="3F3F3F"/>
+          </a:solidFill>
+          <a:ln>
+            <a:noFill/>
+          </a:ln>
+        </p:spPr>
+        <p:style>
+          <a:lnRef idx="1">
+            <a:schemeClr val="accent1"/>
+          </a:lnRef>
+          <a:fillRef idx="3">
+            <a:schemeClr val="accent1"/>
+          </a:fillRef>
+          <a:effectRef idx="2">
+            <a:schemeClr val="accent1"/>
+          </a:effectRef>
+          <a:fontRef idx="minor">
+            <a:schemeClr val="lt1"/>
+          </a:fontRef>
+        </p:style>
+        <p:txBody>
+          <a:bodyPr rtlCol="0" anchor="ctr"/>
+          <a:lstStyle/>
+          <a:p>
+            <a:pPr algn="ctr"/>
+          </a:p>
+        </p:txBody>
+      </p:sp>
+      <p:sp>
+        <p:nvSpPr>
+          <p:cNvPr id="10" name="Oval 9"/>
+          <p:cNvSpPr/>
+          <p:nvPr/>
+        </p:nvSpPr>
+        <p:spPr>
+          <a:xfrm>
+            <a:off x="1097280" y="2971800"/>
+            <a:ext cx="384048" cy="384048"/>
+          </a:xfrm>
+          <a:prstGeom prst="ellipse">
+            <a:avLst/>
+          </a:prstGeom>
+          <a:solidFill>
+            <a:srgbClr val="26A6E0"/>
+          </a:solidFill>
+          <a:ln>
+            <a:noFill/>
+          </a:ln>
+        </p:spPr>
+        <p:style>
+          <a:lnRef idx="1">
+            <a:schemeClr val="accent1"/>
+          </a:lnRef>
+          <a:fillRef idx="3">
+            <a:schemeClr val="accent1"/>
+          </a:fillRef>
+          <a:effectRef idx="2">
+            <a:schemeClr val="accent1"/>
+          </a:effectRef>
+          <a:fontRef idx="minor">
+            <a:schemeClr val="lt1"/>
+          </a:fontRef>
+        </p:style>
+        <p:txBody>
+          <a:bodyPr rtlCol="0" anchor="ctr"/>
+          <a:lstStyle/>
+          <a:p>
+            <a:pPr algn="ctr"/>
+          </a:p>
+        </p:txBody>
+      </p:sp>
+      <p:sp>
+        <p:nvSpPr>
+          <p:cNvPr id="11" name="TextBox 10"/>
+          <p:cNvSpPr txBox="1"/>
+          <p:nvPr/>
+        </p:nvSpPr>
+        <p:spPr>
+          <a:xfrm>
+            <a:off x="1097280" y="2971800"/>
+            <a:ext cx="384048" cy="384048"/>
+          </a:xfrm>
+          <a:prstGeom prst="rect">
+            <a:avLst/>
+          </a:prstGeom>
+          <a:noFill/>
+        </p:spPr>
+        <p:txBody>
+          <a:bodyPr wrap="square" anchor="ctr">
+            <a:spAutoFit/>
+          </a:bodyPr>
+          <a:lstStyle/>
+          <a:p>
+            <a:pPr algn="ctr"/>
+            <a:r>
+              <a:rPr sz="1300" b="1">
+                <a:solidFill>
+                  <a:srgbClr val="FFFFFF"/>
+                </a:solidFill>
+                <a:latin typeface="Verdana"/>
+                <a:ea typeface="Verdana"/>
+                <a:cs typeface="Verdana"/>
+              </a:rPr>
+              <a:t>2</a:t>
+            </a:r>
+          </a:p>
+        </p:txBody>
+      </p:sp>
+      <p:sp>
+        <p:nvSpPr>
+          <p:cNvPr id="12" name="TextBox 11"/>
+          <p:cNvSpPr txBox="1"/>
+          <p:nvPr/>
+        </p:nvSpPr>
+        <p:spPr>
+          <a:xfrm>
+            <a:off x="1691640" y="2852928"/>
+            <a:ext cx="6400800" cy="320040"/>
+          </a:xfrm>
+          <a:prstGeom prst="rect">
+            <a:avLst/>
+          </a:prstGeom>
+          <a:noFill/>
+        </p:spPr>
+        <p:txBody>
+          <a:bodyPr wrap="square" anchor="t">
+            <a:spAutoFit/>
+          </a:bodyPr>
+          <a:lstStyle/>
+          <a:p>
+            <a:pPr algn="l"/>
+            <a:r>
+              <a:rPr sz="1500" b="1">
+                <a:solidFill>
+                  <a:srgbClr val="26A6E0"/>
+                </a:solidFill>
+                <a:latin typeface="Verdana"/>
+                <a:ea typeface="Verdana"/>
+                <a:cs typeface="Verdana"/>
+              </a:rPr>
+              <a:t>Передать в тиражирование</a:t>
+            </a:r>
+          </a:p>
+        </p:txBody>
+      </p:sp>
+      <p:sp>
+        <p:nvSpPr>
+          <p:cNvPr id="13" name="TextBox 12"/>
+          <p:cNvSpPr txBox="1"/>
+          <p:nvPr/>
+        </p:nvSpPr>
+        <p:spPr>
+          <a:xfrm>
+            <a:off x="1691640" y="3200400"/>
+            <a:ext cx="6400800" cy="365760"/>
+          </a:xfrm>
+          <a:prstGeom prst="rect">
+            <a:avLst/>
+          </a:prstGeom>
+          <a:noFill/>
+        </p:spPr>
+        <p:txBody>
+          <a:bodyPr wrap="square" anchor="t">
+            <a:spAutoFit/>
+          </a:bodyPr>
+          <a:lstStyle/>
+          <a:p>
+            <a:pPr algn="l"/>
+            <a:r>
+              <a:rPr sz="1300" b="0">
+                <a:solidFill>
+                  <a:srgbClr val="FFFFFF"/>
+                </a:solidFill>
+                <a:latin typeface="Verdana"/>
+                <a:ea typeface="Verdana"/>
+                <a:cs typeface="Verdana"/>
+              </a:rPr>
+              <a:t>Новой группе — пакет скриптов, материалов и двух рабочих каналов продаж.</a:t>
+            </a:r>
+          </a:p>
+        </p:txBody>
+      </p:sp>
+      <p:sp>
+        <p:nvSpPr>
+          <p:cNvPr id="14" name="Rounded Rectangle 13"/>
+          <p:cNvSpPr/>
+          <p:nvPr/>
+        </p:nvSpPr>
+        <p:spPr>
+          <a:xfrm>
+            <a:off x="886968" y="3840480"/>
+            <a:ext cx="7498079" cy="1051560"/>
+          </a:xfrm>
+          <a:prstGeom prst="roundRect">
+            <a:avLst>
+              <a:gd name="adj" fmla="val 8000"/>
+            </a:avLst>
+          </a:prstGeom>
+          <a:solidFill>
+            <a:srgbClr val="3F3F3F"/>
+          </a:solidFill>
+          <a:ln>
+            <a:noFill/>
+          </a:ln>
+        </p:spPr>
+        <p:style>
+          <a:lnRef idx="1">
+            <a:schemeClr val="accent1"/>
+          </a:lnRef>
+          <a:fillRef idx="3">
+            <a:schemeClr val="accent1"/>
+          </a:fillRef>
+          <a:effectRef idx="2">
+            <a:schemeClr val="accent1"/>
+          </a:effectRef>
+          <a:fontRef idx="minor">
+            <a:schemeClr val="lt1"/>
+          </a:fontRef>
+        </p:style>
+        <p:txBody>
+          <a:bodyPr rtlCol="0" anchor="ctr"/>
+          <a:lstStyle/>
+          <a:p>
+            <a:pPr algn="ctr"/>
+          </a:p>
+        </p:txBody>
+      </p:sp>
+      <p:sp>
+        <p:nvSpPr>
+          <p:cNvPr id="15" name="Oval 14"/>
+          <p:cNvSpPr/>
+          <p:nvPr/>
+        </p:nvSpPr>
+        <p:spPr>
+          <a:xfrm>
+            <a:off x="1097280" y="4160520"/>
+            <a:ext cx="384048" cy="384048"/>
+          </a:xfrm>
+          <a:prstGeom prst="ellipse">
+            <a:avLst/>
+          </a:prstGeom>
+          <a:solidFill>
+            <a:srgbClr val="26A6E0"/>
+          </a:solidFill>
+          <a:ln>
+            <a:noFill/>
+          </a:ln>
+        </p:spPr>
+        <p:style>
+          <a:lnRef idx="1">
+            <a:schemeClr val="accent1"/>
+          </a:lnRef>
+          <a:fillRef idx="3">
+            <a:schemeClr val="accent1"/>
+          </a:fillRef>
+          <a:effectRef idx="2">
+            <a:schemeClr val="accent1"/>
+          </a:effectRef>
+          <a:fontRef idx="minor">
+            <a:schemeClr val="lt1"/>
+          </a:fontRef>
+        </p:style>
+        <p:txBody>
+          <a:bodyPr rtlCol="0" anchor="ctr"/>
+          <a:lstStyle/>
+          <a:p>
+            <a:pPr algn="ctr"/>
+          </a:p>
+        </p:txBody>
+      </p:sp>
+      <p:sp>
+        <p:nvSpPr>
+          <p:cNvPr id="16" name="TextBox 15"/>
+          <p:cNvSpPr txBox="1"/>
+          <p:nvPr/>
+        </p:nvSpPr>
+        <p:spPr>
+          <a:xfrm>
+            <a:off x="1097280" y="4160520"/>
+            <a:ext cx="384048" cy="384048"/>
+          </a:xfrm>
+          <a:prstGeom prst="rect">
+            <a:avLst/>
+          </a:prstGeom>
+          <a:noFill/>
+        </p:spPr>
+        <p:txBody>
+          <a:bodyPr wrap="square" anchor="ctr">
+            <a:spAutoFit/>
+          </a:bodyPr>
+          <a:lstStyle/>
+          <a:p>
+            <a:pPr algn="ctr"/>
+            <a:r>
+              <a:rPr sz="1300" b="1">
+                <a:solidFill>
+                  <a:srgbClr val="FFFFFF"/>
+                </a:solidFill>
+                <a:latin typeface="Verdana"/>
+                <a:ea typeface="Verdana"/>
+                <a:cs typeface="Verdana"/>
+              </a:rPr>
+              <a:t>3</a:t>
+            </a:r>
+          </a:p>
+        </p:txBody>
+      </p:sp>
+      <p:sp>
+        <p:nvSpPr>
+          <p:cNvPr id="17" name="TextBox 16"/>
+          <p:cNvSpPr txBox="1"/>
+          <p:nvPr/>
+        </p:nvSpPr>
+        <p:spPr>
+          <a:xfrm>
+            <a:off x="1691640" y="4041648"/>
+            <a:ext cx="6400800" cy="320040"/>
+          </a:xfrm>
+          <a:prstGeom prst="rect">
+            <a:avLst/>
+          </a:prstGeom>
+          <a:noFill/>
+        </p:spPr>
+        <p:txBody>
+          <a:bodyPr wrap="square" anchor="t">
+            <a:spAutoFit/>
+          </a:bodyPr>
+          <a:lstStyle/>
+          <a:p>
+            <a:pPr algn="l"/>
+            <a:r>
+              <a:rPr sz="1500" b="1">
+                <a:solidFill>
+                  <a:srgbClr val="26A6E0"/>
+                </a:solidFill>
+                <a:latin typeface="Verdana"/>
+                <a:ea typeface="Verdana"/>
+                <a:cs typeface="Verdana"/>
+              </a:rPr>
+              <a:t>Закрепить KPI на следующий этап</a:t>
+            </a:r>
+          </a:p>
+        </p:txBody>
+      </p:sp>
+      <p:sp>
+        <p:nvSpPr>
+          <p:cNvPr id="18" name="TextBox 17"/>
+          <p:cNvSpPr txBox="1"/>
+          <p:nvPr/>
+        </p:nvSpPr>
+        <p:spPr>
+          <a:xfrm>
+            <a:off x="1691640" y="4389120"/>
+            <a:ext cx="6400800" cy="365760"/>
+          </a:xfrm>
+          <a:prstGeom prst="rect">
+            <a:avLst/>
+          </a:prstGeom>
+          <a:noFill/>
+        </p:spPr>
+        <p:txBody>
+          <a:bodyPr wrap="square" anchor="t">
+            <a:spAutoFit/>
+          </a:bodyPr>
+          <a:lstStyle/>
+          <a:p>
+            <a:pPr algn="l"/>
+            <a:r>
+              <a:rPr sz="1300" b="0">
+                <a:solidFill>
+                  <a:srgbClr val="FFFFFF"/>
+                </a:solidFill>
+                <a:latin typeface="Verdana"/>
+                <a:ea typeface="Verdana"/>
+                <a:cs typeface="Verdana"/>
+              </a:rPr>
+              <a:t>Подключения + вклад в ЭДО и ЭПД + переход на оплату после 3 месяцев.</a:t>
+            </a:r>
+          </a:p>
+        </p:txBody>
+      </p:sp>
+      <p:sp>
+        <p:nvSpPr>
+          <p:cNvPr id="19" name="Rounded Rectangle 18"/>
+          <p:cNvSpPr/>
+          <p:nvPr/>
+        </p:nvSpPr>
+        <p:spPr>
+          <a:xfrm>
+            <a:off x="8595360" y="1463040"/>
+            <a:ext cx="2743200" cy="3657600"/>
+          </a:xfrm>
+          <a:prstGeom prst="roundRect">
+            <a:avLst>
+              <a:gd name="adj" fmla="val 10000"/>
+            </a:avLst>
+          </a:prstGeom>
+          <a:solidFill>
+            <a:srgbClr val="26A6E0"/>
+          </a:solidFill>
+          <a:ln>
+            <a:noFill/>
+          </a:ln>
+        </p:spPr>
+        <p:style>
+          <a:lnRef idx="1">
+            <a:schemeClr val="accent1"/>
+          </a:lnRef>
+          <a:fillRef idx="3">
+            <a:schemeClr val="accent1"/>
+          </a:fillRef>
+          <a:effectRef idx="2">
+            <a:schemeClr val="accent1"/>
+          </a:effectRef>
+          <a:fontRef idx="minor">
+            <a:schemeClr val="lt1"/>
+          </a:fontRef>
+        </p:style>
+        <p:txBody>
+          <a:bodyPr rtlCol="0" anchor="ctr"/>
+          <a:lstStyle/>
+          <a:p>
+            <a:pPr algn="ctr"/>
+          </a:p>
+        </p:txBody>
+      </p:sp>
+      <p:pic>
+        <p:nvPicPr>
+          <p:cNvPr id="20" name="Picture 19" descr="icon_64.png"/>
+          <p:cNvPicPr>
+            <a:picLocks noChangeAspect="1"/>
+          </p:cNvPicPr>
+          <p:nvPr/>
+        </p:nvPicPr>
+        <p:blipFill>
+          <a:blip r:embed="rId2"/>
+          <a:stretch>
+            <a:fillRect/>
+          </a:stretch>
+        </p:blipFill>
+        <p:spPr>
+          <a:xfrm>
             <a:off x="9281160" y="1783080"/>
             <a:ext cx="1371600" cy="1371600"/>
           </a:xfrm>
@@ -8714,7 +10276,7 @@
                 <a:cs typeface="Verdana"/>
               </a:rPr>
               <a:t>18 подключений
-2 рабочих канала</a:t>
+ЭДО + ЭПД</a:t>
             </a:r>
           </a:p>
         </p:txBody>
@@ -9208,7 +10770,7 @@
                 <a:ea typeface="Verdana"/>
                 <a:cs typeface="Verdana"/>
               </a:rPr>
-              <a:t>Показать цифры, что сработало, что готово к передаче и какие вопросы ещё нужно закрыть перед масштабом.</a:t>
+              <a:t>Показать цифры, выгоду для показателей ЭДО и ЭПД, что готово к передаче и как пользоваться материалами.</a:t>
             </a:r>
           </a:p>
         </p:txBody>
@@ -10117,7 +11679,7 @@
           <a:p>
             <a:pPr algn="l"/>
             <a:r>
-              <a:rPr sz="2600" b="1">
+              <a:rPr sz="2400" b="1">
                 <a:solidFill>
                   <a:srgbClr val="FFFFFF"/>
                 </a:solidFill>
@@ -10125,7 +11687,7 @@
                 <a:ea typeface="Verdana"/>
                 <a:cs typeface="Verdana"/>
               </a:rPr>
-              <a:t>Гипотеза 1. Доки вместо 1С-ЭПД</a:t>
+              <a:t>Гипотеза 1. Доки по базе ЭПД (вместо 1С-ЭПД)</a:t>
             </a:r>
           </a:p>
         </p:txBody>
@@ -10380,7 +11942,7 @@
                 <a:ea typeface="Verdana"/>
                 <a:cs typeface="Verdana"/>
               </a:rPr>
-              <a:t>Компании, которым нужен ЭДО, но 1С-ЭПД слишком узкий или неудобный.</a:t>
+              <a:t>Компании из базы ЭПД, для которых 1С-ЭПД слишком узкий, тяжёлый или неудобный.</a:t>
             </a:r>
           </a:p>
         </p:txBody>
@@ -10499,7 +12061,7 @@
                 <a:ea typeface="Verdana"/>
                 <a:cs typeface="Verdana"/>
               </a:rPr>
-              <a:t>Универсальный обмен документами, веб и 1С, облачный архив.</a:t>
+              <a:t>Универсальный ЭДО + при необходимости Доки.Логистика (ЭПД) — шире, чем только 1С-ЭПД.</a:t>
             </a:r>
           </a:p>
         </p:txBody>
@@ -10618,7 +12180,7 @@
                 <a:ea typeface="Verdana"/>
                 <a:cs typeface="Verdana"/>
               </a:rPr>
-              <a:t>Альтернативу там, где логистический ЭПД не закрывает задачу.</a:t>
+              <a:t>Альтернативу там, где узкий логистический ЭПД не закрывает задачу клиента.</a:t>
             </a:r>
           </a:p>
         </p:txBody>
@@ -11622,7 +13184,7 @@
                 <a:ea typeface="Verdana"/>
                 <a:cs typeface="Verdana"/>
               </a:rPr>
-              <a:t>Перевозочные документы</a:t>
+              <a:t>Перевозочные документы (ЭПД)</a:t>
             </a:r>
           </a:p>
         </p:txBody>
@@ -12381,7 +13943,7 @@
                 <a:ea typeface="Verdana"/>
                 <a:cs typeface="Verdana"/>
               </a:rPr>
-              <a:t>Что уже готово к передаче</a:t>
+              <a:t>Выгода для показателей: ЭДО + ЭПД</a:t>
             </a:r>
           </a:p>
         </p:txBody>
@@ -12405,18 +13967,55 @@
       </p:sp>
       <p:sp>
         <p:nvSpPr>
-          <p:cNvPr id="4" name="Rounded Rectangle 3"/>
+          <p:cNvPr id="4" name="TextBox 3"/>
+          <p:cNvSpPr txBox="1"/>
+          <p:nvPr/>
+        </p:nvSpPr>
+        <p:spPr>
+          <a:xfrm>
+            <a:off x="886968" y="1280160"/>
+            <a:ext cx="10424160" cy="411480"/>
+          </a:xfrm>
+          <a:prstGeom prst="rect">
+            <a:avLst/>
+          </a:prstGeom>
+          <a:noFill/>
+        </p:spPr>
+        <p:txBody>
+          <a:bodyPr wrap="square" anchor="t">
+            <a:spAutoFit/>
+          </a:bodyPr>
+          <a:lstStyle/>
+          <a:p>
+            <a:pPr algn="l"/>
+            <a:r>
+              <a:rPr sz="1400" b="0">
+                <a:solidFill>
+                  <a:srgbClr val="BFBFBF"/>
+                </a:solidFill>
+                <a:latin typeface="Verdana"/>
+                <a:ea typeface="Verdana"/>
+                <a:cs typeface="Verdana"/>
+              </a:rPr>
+              <a:t>«Доки» — это не один продукт в одном показателе. Это два контура в одной продаже.</a:t>
+            </a:r>
+          </a:p>
+        </p:txBody>
+      </p:sp>
+      <p:sp>
+        <p:nvSpPr>
+          <p:cNvPr id="5" name="Rounded Rectangle 4"/>
           <p:cNvSpPr/>
           <p:nvPr/>
         </p:nvSpPr>
         <p:spPr>
           <a:xfrm>
-            <a:off x="886968" y="1463040"/>
-            <a:ext cx="5212080" cy="2011680"/>
+            <a:off x="886968" y="1783080"/>
+            <a:ext cx="5029200" cy="2331720"/>
           </a:xfrm>
           <a:prstGeom prst="roundRect">
             <a:avLst>
-              <a:gd name="adj" fmla="val 8000"/>
+              <a:gd name="adj" fmla="val 10000"/>
             </a:avLst>
           </a:prstGeom>
           <a:solidFill>
@@ -12448,30 +14047,6 @@
           </a:p>
         </p:txBody>
       </p:sp>
-      <p:pic>
-        <p:nvPicPr>
-          <p:cNvPr id="5" name="Picture 4" descr="icon_55.png"/>
-          <p:cNvPicPr>
-            <a:picLocks noChangeAspect="1"/>
-          </p:cNvPicPr>
-          <p:nvPr/>
-        </p:nvPicPr>
-        <p:blipFill>
-          <a:blip r:embed="rId2"/>
-          <a:stretch>
-            <a:fillRect/>
-          </a:stretch>
-        </p:blipFill>
-        <p:spPr>
-          <a:xfrm>
-            <a:off x="1088136" y="1965960"/>
-            <a:ext cx="640080" cy="640080"/>
-          </a:xfrm>
-          <a:prstGeom prst="rect">
-            <a:avLst/>
-          </a:prstGeom>
-        </p:spPr>
-      </p:pic>
       <p:sp>
         <p:nvSpPr>
           <p:cNvPr id="6" name="TextBox 5"/>
@@ -12480,8 +14055,8 @@
         </p:nvSpPr>
         <p:spPr>
           <a:xfrm>
-            <a:off x="1892808" y="1719072"/>
-            <a:ext cx="3977640" cy="365760"/>
+            <a:off x="1143000" y="1965960"/>
+            <a:ext cx="4572000" cy="320040"/>
           </a:xfrm>
           <a:prstGeom prst="rect">
             <a:avLst/>
@@ -12496,7 +14071,7 @@
           <a:p>
             <a:pPr algn="l"/>
             <a:r>
-              <a:rPr sz="1500" b="1">
+              <a:rPr sz="1400" b="1">
                 <a:solidFill>
                   <a:srgbClr val="26A6E0"/>
                 </a:solidFill>
@@ -12504,7 +14079,7 @@
                 <a:ea typeface="Verdana"/>
                 <a:cs typeface="Verdana"/>
               </a:rPr>
-              <a:t>Скрипты продаж</a:t>
+              <a:t>Показатель 1 — ЭДО</a:t>
             </a:r>
           </a:p>
         </p:txBody>
@@ -12517,8 +14092,8 @@
         </p:nvSpPr>
         <p:spPr>
           <a:xfrm>
-            <a:off x="1892808" y="2148840"/>
-            <a:ext cx="3977640" cy="1143000"/>
+            <a:off x="1143000" y="2377440"/>
+            <a:ext cx="4572000" cy="1463040"/>
           </a:xfrm>
           <a:prstGeom prst="rect">
             <a:avLst/>
@@ -12533,7 +14108,7 @@
           <a:p>
             <a:pPr algn="l"/>
             <a:r>
-              <a:rPr sz="1200" b="0">
+              <a:rPr sz="1300" b="0">
                 <a:solidFill>
                   <a:srgbClr val="FFFFFF"/>
                 </a:solidFill>
@@ -12541,7 +14116,10 @@
                 <a:ea typeface="Verdana"/>
                 <a:cs typeface="Verdana"/>
               </a:rPr>
-              <a:t>Скрипт холодного звонка: Кабинет сотрудника → Доки → Смартвей → Доки.Логистика, плюс отработка возражений.</a:t>
+              <a:t>Доки закрывает обычный электронный
+документооборот: УПД, счета, акты,
+договоры. Клиент обменивается
+документами с контрагентами.</a:t>
             </a:r>
           </a:p>
         </p:txBody>
@@ -12554,12 +14132,12 @@
         </p:nvSpPr>
         <p:spPr>
           <a:xfrm>
-            <a:off x="6327648" y="1463040"/>
-            <a:ext cx="5212080" cy="2011680"/>
+            <a:off x="6126480" y="1783080"/>
+            <a:ext cx="5166360" cy="2331720"/>
           </a:xfrm>
           <a:prstGeom prst="roundRect">
             <a:avLst>
-              <a:gd name="adj" fmla="val 8000"/>
+              <a:gd name="adj" fmla="val 10000"/>
             </a:avLst>
           </a:prstGeom>
           <a:solidFill>
@@ -12591,40 +14169,16 @@
           </a:p>
         </p:txBody>
       </p:sp>
-      <p:pic>
-        <p:nvPicPr>
-          <p:cNvPr id="9" name="Picture 8" descr="icon_22.png"/>
-          <p:cNvPicPr>
-            <a:picLocks noChangeAspect="1"/>
-          </p:cNvPicPr>
-          <p:nvPr/>
-        </p:nvPicPr>
-        <p:blipFill>
-          <a:blip r:embed="rId3"/>
-          <a:stretch>
-            <a:fillRect/>
-          </a:stretch>
-        </p:blipFill>
-        <p:spPr>
-          <a:xfrm>
-            <a:off x="6528816" y="1965960"/>
-            <a:ext cx="640080" cy="640080"/>
-          </a:xfrm>
-          <a:prstGeom prst="rect">
-            <a:avLst/>
-          </a:prstGeom>
-        </p:spPr>
-      </p:pic>
-      <p:sp>
-        <p:nvSpPr>
-          <p:cNvPr id="10" name="TextBox 9"/>
+      <p:sp>
+        <p:nvSpPr>
+          <p:cNvPr id="9" name="TextBox 8"/>
           <p:cNvSpPr txBox="1"/>
           <p:nvPr/>
         </p:nvSpPr>
         <p:spPr>
           <a:xfrm>
-            <a:off x="7333488" y="1719072"/>
-            <a:ext cx="3977640" cy="365760"/>
+            <a:off x="6400800" y="1965960"/>
+            <a:ext cx="4663440" cy="320040"/>
           </a:xfrm>
           <a:prstGeom prst="rect">
             <a:avLst/>
@@ -12639,7 +14193,7 @@
           <a:p>
             <a:pPr algn="l"/>
             <a:r>
-              <a:rPr sz="1500" b="1">
+              <a:rPr sz="1400" b="1">
                 <a:solidFill>
                   <a:srgbClr val="26A6E0"/>
                 </a:solidFill>
@@ -12647,21 +14201,21 @@
                 <a:ea typeface="Verdana"/>
                 <a:cs typeface="Verdana"/>
               </a:rPr>
-              <a:t>Материалы для рассылки</a:t>
-            </a:r>
-          </a:p>
-        </p:txBody>
-      </p:sp>
-      <p:sp>
-        <p:nvSpPr>
-          <p:cNvPr id="11" name="TextBox 10"/>
+              <a:t>Показатель 2 — ЭПД</a:t>
+            </a:r>
+          </a:p>
+        </p:txBody>
+      </p:sp>
+      <p:sp>
+        <p:nvSpPr>
+          <p:cNvPr id="10" name="TextBox 9"/>
           <p:cNvSpPr txBox="1"/>
           <p:nvPr/>
         </p:nvSpPr>
         <p:spPr>
           <a:xfrm>
-            <a:off x="7333488" y="2148840"/>
-            <a:ext cx="3977640" cy="1143000"/>
+            <a:off x="6400800" y="2377440"/>
+            <a:ext cx="4663440" cy="1463040"/>
           </a:xfrm>
           <a:prstGeom prst="rect">
             <a:avLst/>
@@ -12676,7 +14230,7 @@
           <a:p>
             <a:pPr algn="l"/>
             <a:r>
-              <a:rPr sz="1200" b="0">
+              <a:rPr sz="1300" b="0">
                 <a:solidFill>
                   <a:srgbClr val="FFFFFF"/>
                 </a:solidFill>
@@ -12684,29 +14238,32 @@
                 <a:ea typeface="Verdana"/>
                 <a:cs typeface="Verdana"/>
               </a:rPr>
-              <a:t>Готовые блоки и тексты для партнёрских и клиентских коммуникаций.</a:t>
-            </a:r>
-          </a:p>
-        </p:txBody>
-      </p:sp>
-      <p:sp>
-        <p:nvSpPr>
-          <p:cNvPr id="12" name="Rounded Rectangle 11"/>
+              <a:t>Доки.Логистика закрывает
+перевозочные документы (ЭПД):
+накладные, путевые — там, где
+нужен логистический контур.</a:t>
+            </a:r>
+          </a:p>
+        </p:txBody>
+      </p:sp>
+      <p:sp>
+        <p:nvSpPr>
+          <p:cNvPr id="11" name="Rounded Rectangle 10"/>
           <p:cNvSpPr/>
           <p:nvPr/>
         </p:nvSpPr>
         <p:spPr>
           <a:xfrm>
-            <a:off x="886968" y="3657600"/>
-            <a:ext cx="5212080" cy="2011680"/>
+            <a:off x="886968" y="4297680"/>
+            <a:ext cx="10424160" cy="1417320"/>
           </a:xfrm>
           <a:prstGeom prst="roundRect">
             <a:avLst>
-              <a:gd name="adj" fmla="val 8000"/>
+              <a:gd name="adj" fmla="val 10000"/>
             </a:avLst>
           </a:prstGeom>
           <a:solidFill>
-            <a:srgbClr val="3F3F3F"/>
+            <a:srgbClr val="26A6E0"/>
           </a:solidFill>
           <a:ln>
             <a:noFill/>
@@ -12734,40 +14291,16 @@
           </a:p>
         </p:txBody>
       </p:sp>
-      <p:pic>
-        <p:nvPicPr>
-          <p:cNvPr id="13" name="Picture 12" descr="icon_59.png"/>
-          <p:cNvPicPr>
-            <a:picLocks noChangeAspect="1"/>
-          </p:cNvPicPr>
-          <p:nvPr/>
-        </p:nvPicPr>
-        <p:blipFill>
-          <a:blip r:embed="rId4"/>
-          <a:stretch>
-            <a:fillRect/>
-          </a:stretch>
-        </p:blipFill>
-        <p:spPr>
-          <a:xfrm>
-            <a:off x="1088136" y="4160520"/>
-            <a:ext cx="640080" cy="640080"/>
-          </a:xfrm>
-          <a:prstGeom prst="rect">
-            <a:avLst/>
-          </a:prstGeom>
-        </p:spPr>
-      </p:pic>
-      <p:sp>
-        <p:nvSpPr>
-          <p:cNvPr id="14" name="TextBox 13"/>
+      <p:sp>
+        <p:nvSpPr>
+          <p:cNvPr id="12" name="TextBox 11"/>
           <p:cNvSpPr txBox="1"/>
           <p:nvPr/>
         </p:nvSpPr>
         <p:spPr>
           <a:xfrm>
-            <a:off x="1892808" y="3913632"/>
-            <a:ext cx="3977640" cy="365760"/>
+            <a:off x="1188720" y="4480560"/>
+            <a:ext cx="9875520" cy="365760"/>
           </a:xfrm>
           <a:prstGeom prst="rect">
             <a:avLst/>
@@ -12784,27 +14317,27 @@
             <a:r>
               <a:rPr sz="1500" b="1">
                 <a:solidFill>
-                  <a:srgbClr val="26A6E0"/>
+                  <a:srgbClr val="FFFFFF"/>
                 </a:solidFill>
                 <a:latin typeface="Verdana"/>
                 <a:ea typeface="Verdana"/>
                 <a:cs typeface="Verdana"/>
               </a:rPr>
-              <a:t>Сравнение 1С-ЭПД и Доки</a:t>
-            </a:r>
-          </a:p>
-        </p:txBody>
-      </p:sp>
-      <p:sp>
-        <p:nvSpPr>
-          <p:cNvPr id="15" name="TextBox 14"/>
+              <a:t>Почему это важно для продаж и KPI</a:t>
+            </a:r>
+          </a:p>
+        </p:txBody>
+      </p:sp>
+      <p:sp>
+        <p:nvSpPr>
+          <p:cNvPr id="13" name="TextBox 12"/>
           <p:cNvSpPr txBox="1"/>
           <p:nvPr/>
         </p:nvSpPr>
         <p:spPr>
           <a:xfrm>
-            <a:off x="1892808" y="4343400"/>
-            <a:ext cx="3977640" cy="1143000"/>
+            <a:off x="1188720" y="4937760"/>
+            <a:ext cx="9875520" cy="594360"/>
           </a:xfrm>
           <a:prstGeom prst="rect">
             <a:avLst/>
@@ -12819,7 +14352,7 @@
           <a:p>
             <a:pPr algn="l"/>
             <a:r>
-              <a:rPr sz="1200" b="0">
+              <a:rPr sz="1300" b="0">
                 <a:solidFill>
                   <a:srgbClr val="FFFFFF"/>
                 </a:solidFill>
@@ -12827,150 +14360,7 @@
                 <a:ea typeface="Verdana"/>
                 <a:cs typeface="Verdana"/>
               </a:rPr>
-              <a:t>Обзор и сравнение: когда предлагать 1С-ЭПД, а когда — Доки / Доки.Логистика.</a:t>
-            </a:r>
-          </a:p>
-        </p:txBody>
-      </p:sp>
-      <p:sp>
-        <p:nvSpPr>
-          <p:cNvPr id="16" name="Rounded Rectangle 15"/>
-          <p:cNvSpPr/>
-          <p:nvPr/>
-        </p:nvSpPr>
-        <p:spPr>
-          <a:xfrm>
-            <a:off x="6327648" y="3657600"/>
-            <a:ext cx="5212080" cy="2011680"/>
-          </a:xfrm>
-          <a:prstGeom prst="roundRect">
-            <a:avLst>
-              <a:gd name="adj" fmla="val 8000"/>
-            </a:avLst>
-          </a:prstGeom>
-          <a:solidFill>
-            <a:srgbClr val="3F3F3F"/>
-          </a:solidFill>
-          <a:ln>
-            <a:noFill/>
-          </a:ln>
-        </p:spPr>
-        <p:style>
-          <a:lnRef idx="1">
-            <a:schemeClr val="accent1"/>
-          </a:lnRef>
-          <a:fillRef idx="3">
-            <a:schemeClr val="accent1"/>
-          </a:fillRef>
-          <a:effectRef idx="2">
-            <a:schemeClr val="accent1"/>
-          </a:effectRef>
-          <a:fontRef idx="minor">
-            <a:schemeClr val="lt1"/>
-          </a:fontRef>
-        </p:style>
-        <p:txBody>
-          <a:bodyPr rtlCol="0" anchor="ctr"/>
-          <a:lstStyle/>
-          <a:p>
-            <a:pPr algn="ctr"/>
-          </a:p>
-        </p:txBody>
-      </p:sp>
-      <p:pic>
-        <p:nvPicPr>
-          <p:cNvPr id="17" name="Picture 16" descr="icon_67.png"/>
-          <p:cNvPicPr>
-            <a:picLocks noChangeAspect="1"/>
-          </p:cNvPicPr>
-          <p:nvPr/>
-        </p:nvPicPr>
-        <p:blipFill>
-          <a:blip r:embed="rId5"/>
-          <a:stretch>
-            <a:fillRect/>
-          </a:stretch>
-        </p:blipFill>
-        <p:spPr>
-          <a:xfrm>
-            <a:off x="6528816" y="4160520"/>
-            <a:ext cx="640080" cy="640080"/>
-          </a:xfrm>
-          <a:prstGeom prst="rect">
-            <a:avLst/>
-          </a:prstGeom>
-        </p:spPr>
-      </p:pic>
-      <p:sp>
-        <p:nvSpPr>
-          <p:cNvPr id="18" name="TextBox 17"/>
-          <p:cNvSpPr txBox="1"/>
-          <p:nvPr/>
-        </p:nvSpPr>
-        <p:spPr>
-          <a:xfrm>
-            <a:off x="7333488" y="3913632"/>
-            <a:ext cx="3977640" cy="365760"/>
-          </a:xfrm>
-          <a:prstGeom prst="rect">
-            <a:avLst/>
-          </a:prstGeom>
-          <a:noFill/>
-        </p:spPr>
-        <p:txBody>
-          <a:bodyPr wrap="square" anchor="t">
-            <a:spAutoFit/>
-          </a:bodyPr>
-          <a:lstStyle/>
-          <a:p>
-            <a:pPr algn="l"/>
-            <a:r>
-              <a:rPr sz="1500" b="1">
-                <a:solidFill>
-                  <a:srgbClr val="26A6E0"/>
-                </a:solidFill>
-                <a:latin typeface="Verdana"/>
-                <a:ea typeface="Verdana"/>
-                <a:cs typeface="Verdana"/>
-              </a:rPr>
-              <a:t>КП, тарифы, шаблоны</a:t>
-            </a:r>
-          </a:p>
-        </p:txBody>
-      </p:sp>
-      <p:sp>
-        <p:nvSpPr>
-          <p:cNvPr id="19" name="TextBox 18"/>
-          <p:cNvSpPr txBox="1"/>
-          <p:nvPr/>
-        </p:nvSpPr>
-        <p:spPr>
-          <a:xfrm>
-            <a:off x="7333488" y="4343400"/>
-            <a:ext cx="3977640" cy="1143000"/>
-          </a:xfrm>
-          <a:prstGeom prst="rect">
-            <a:avLst/>
-          </a:prstGeom>
-          <a:noFill/>
-        </p:spPr>
-        <p:txBody>
-          <a:bodyPr wrap="square" anchor="t">
-            <a:spAutoFit/>
-          </a:bodyPr>
-          <a:lstStyle/>
-          <a:p>
-            <a:pPr algn="l"/>
-            <a:r>
-              <a:rPr sz="1200" b="0">
-                <a:solidFill>
-                  <a:srgbClr val="FFFFFF"/>
-                </a:solidFill>
-                <a:latin typeface="Verdana"/>
-                <a:ea typeface="Verdana"/>
-                <a:cs typeface="Verdana"/>
-              </a:rPr>
-              <a:t>Коммерческие предложения, тарифы, клиентские шаблоны презентаций — всё в репозитории.</a:t>
+              <a:t>Одна сделка по «Доки» может закрывать сразу два показателя — ЭДО и ЭПД. Это сильнее, чем продажа узкого 1С-ЭПД только в один контур. При тиражировании менеджеру выгодно предлагать полный контур: Доки + Доки.Логистика.</a:t>
             </a:r>
           </a:p>
         </p:txBody>
@@ -13018,7 +14408,7 @@
                 <a:ea typeface="Verdana"/>
                 <a:cs typeface="Verdana"/>
               </a:rPr>
-              <a:t>Оффер, с которым подключали</a:t>
+              <a:t>Что уже готово к передаче</a:t>
             </a:r>
           </a:p>
         </p:txBody>
@@ -13030,7 +14420,7 @@
             <a:spLocks noGrp="1"/>
           </p:cNvSpPr>
           <p:nvPr>
-            <p:ph type="body" idx="14" sz="quarter"/>
+            <p:ph type="body" idx="13" sz="quarter"/>
           </p:nvPr>
         </p:nvSpPr>
         <p:spPr/>
@@ -13048,170 +14438,12 @@
         </p:nvSpPr>
         <p:spPr>
           <a:xfrm>
-            <a:off x="886968" y="1554480"/>
-            <a:ext cx="5029200" cy="3931920"/>
+            <a:off x="886968" y="1463040"/>
+            <a:ext cx="5212080" cy="2011680"/>
           </a:xfrm>
           <a:prstGeom prst="roundRect">
             <a:avLst>
-              <a:gd name="adj" fmla="val 10000"/>
-            </a:avLst>
-          </a:prstGeom>
-          <a:solidFill>
-            <a:srgbClr val="26A6E0"/>
-          </a:solidFill>
-          <a:ln>
-            <a:noFill/>
-          </a:ln>
-        </p:spPr>
-        <p:style>
-          <a:lnRef idx="1">
-            <a:schemeClr val="accent1"/>
-          </a:lnRef>
-          <a:fillRef idx="3">
-            <a:schemeClr val="accent1"/>
-          </a:fillRef>
-          <a:effectRef idx="2">
-            <a:schemeClr val="accent1"/>
-          </a:effectRef>
-          <a:fontRef idx="minor">
-            <a:schemeClr val="lt1"/>
-          </a:fontRef>
-        </p:style>
-        <p:txBody>
-          <a:bodyPr rtlCol="0" anchor="ctr"/>
-          <a:lstStyle/>
-          <a:p>
-            <a:pPr algn="ctr"/>
-          </a:p>
-        </p:txBody>
-      </p:sp>
-      <p:sp>
-        <p:nvSpPr>
-          <p:cNvPr id="5" name="TextBox 4"/>
-          <p:cNvSpPr txBox="1"/>
-          <p:nvPr/>
-        </p:nvSpPr>
-        <p:spPr>
-          <a:xfrm>
-            <a:off x="1188720" y="1920240"/>
-            <a:ext cx="4389120" cy="365760"/>
-          </a:xfrm>
-          <a:prstGeom prst="rect">
-            <a:avLst/>
-          </a:prstGeom>
-          <a:noFill/>
-        </p:spPr>
-        <p:txBody>
-          <a:bodyPr wrap="square" anchor="t">
-            <a:spAutoFit/>
-          </a:bodyPr>
-          <a:lstStyle/>
-          <a:p>
-            <a:pPr algn="l"/>
-            <a:r>
-              <a:rPr sz="1400" b="0">
-                <a:solidFill>
-                  <a:srgbClr val="FFFFFF"/>
-                </a:solidFill>
-                <a:latin typeface="Verdana"/>
-                <a:ea typeface="Verdana"/>
-                <a:cs typeface="Verdana"/>
-              </a:rPr>
-              <a:t>Промо на входе</a:t>
-            </a:r>
-          </a:p>
-        </p:txBody>
-      </p:sp>
-      <p:sp>
-        <p:nvSpPr>
-          <p:cNvPr id="6" name="TextBox 5"/>
-          <p:cNvSpPr txBox="1"/>
-          <p:nvPr/>
-        </p:nvSpPr>
-        <p:spPr>
-          <a:xfrm>
-            <a:off x="1188720" y="2377440"/>
-            <a:ext cx="4389120" cy="1097280"/>
-          </a:xfrm>
-          <a:prstGeom prst="rect">
-            <a:avLst/>
-          </a:prstGeom>
-          <a:noFill/>
-        </p:spPr>
-        <p:txBody>
-          <a:bodyPr wrap="square" anchor="t">
-            <a:spAutoFit/>
-          </a:bodyPr>
-          <a:lstStyle/>
-          <a:p>
-            <a:pPr algn="l"/>
-            <a:r>
-              <a:rPr sz="2800" b="1">
-                <a:solidFill>
-                  <a:srgbClr val="FFFFFF"/>
-                </a:solidFill>
-                <a:latin typeface="Verdana"/>
-                <a:ea typeface="Verdana"/>
-                <a:cs typeface="Verdana"/>
-              </a:rPr>
-              <a:t>3 месяца
-безлимит
-бесплатно</a:t>
-            </a:r>
-          </a:p>
-        </p:txBody>
-      </p:sp>
-      <p:sp>
-        <p:nvSpPr>
-          <p:cNvPr id="7" name="TextBox 6"/>
-          <p:cNvSpPr txBox="1"/>
-          <p:nvPr/>
-        </p:nvSpPr>
-        <p:spPr>
-          <a:xfrm>
-            <a:off x="1188720" y="3840480"/>
-            <a:ext cx="4389120" cy="1188720"/>
-          </a:xfrm>
-          <a:prstGeom prst="rect">
-            <a:avLst/>
-          </a:prstGeom>
-          <a:noFill/>
-        </p:spPr>
-        <p:txBody>
-          <a:bodyPr wrap="square" anchor="t">
-            <a:spAutoFit/>
-          </a:bodyPr>
-          <a:lstStyle/>
-          <a:p>
-            <a:pPr algn="l"/>
-            <a:r>
-              <a:rPr sz="1400" b="0">
-                <a:solidFill>
-                  <a:srgbClr val="FFFFFF"/>
-                </a:solidFill>
-                <a:latin typeface="Verdana"/>
-                <a:ea typeface="Verdana"/>
-                <a:cs typeface="Verdana"/>
-              </a:rPr>
-              <a:t>Клиент пробует сервис без оплаты пакета. Барьер входа снимается — проще закрыть первое подключение.</a:t>
-            </a:r>
-          </a:p>
-        </p:txBody>
-      </p:sp>
-      <p:sp>
-        <p:nvSpPr>
-          <p:cNvPr id="8" name="Rounded Rectangle 7"/>
-          <p:cNvSpPr/>
-          <p:nvPr/>
-        </p:nvSpPr>
-        <p:spPr>
-          <a:xfrm>
-            <a:off x="6126480" y="1554480"/>
-            <a:ext cx="5166360" cy="868680"/>
-          </a:xfrm>
-          <a:prstGeom prst="roundRect">
-            <a:avLst>
-              <a:gd name="adj" fmla="val 6000"/>
+              <a:gd name="adj" fmla="val 8000"/>
             </a:avLst>
           </a:prstGeom>
           <a:solidFill>
@@ -13243,16 +14475,40 @@
           </a:p>
         </p:txBody>
       </p:sp>
-      <p:sp>
-        <p:nvSpPr>
-          <p:cNvPr id="9" name="TextBox 8"/>
+      <p:pic>
+        <p:nvPicPr>
+          <p:cNvPr id="5" name="Picture 4" descr="icon_55.png"/>
+          <p:cNvPicPr>
+            <a:picLocks noChangeAspect="1"/>
+          </p:cNvPicPr>
+          <p:nvPr/>
+        </p:nvPicPr>
+        <p:blipFill>
+          <a:blip r:embed="rId2"/>
+          <a:stretch>
+            <a:fillRect/>
+          </a:stretch>
+        </p:blipFill>
+        <p:spPr>
+          <a:xfrm>
+            <a:off x="1088136" y="1965960"/>
+            <a:ext cx="640080" cy="640080"/>
+          </a:xfrm>
+          <a:prstGeom prst="rect">
+            <a:avLst/>
+          </a:prstGeom>
+        </p:spPr>
+      </p:pic>
+      <p:sp>
+        <p:nvSpPr>
+          <p:cNvPr id="6" name="TextBox 5"/>
           <p:cNvSpPr txBox="1"/>
           <p:nvPr/>
         </p:nvSpPr>
         <p:spPr>
           <a:xfrm>
-            <a:off x="6355080" y="1664208"/>
-            <a:ext cx="4754880" cy="256032"/>
+            <a:off x="1892808" y="1719072"/>
+            <a:ext cx="3977640" cy="365760"/>
           </a:xfrm>
           <a:prstGeom prst="rect">
             <a:avLst/>
@@ -13267,7 +14523,7 @@
           <a:p>
             <a:pPr algn="l"/>
             <a:r>
-              <a:rPr sz="1300" b="1">
+              <a:rPr sz="1500" b="1">
                 <a:solidFill>
                   <a:srgbClr val="26A6E0"/>
                 </a:solidFill>
@@ -13275,21 +14531,21 @@
                 <a:ea typeface="Verdana"/>
                 <a:cs typeface="Verdana"/>
               </a:rPr>
-              <a:t>Зачем так делали</a:t>
-            </a:r>
-          </a:p>
-        </p:txBody>
-      </p:sp>
-      <p:sp>
-        <p:nvSpPr>
-          <p:cNvPr id="10" name="TextBox 9"/>
+              <a:t>Скрипты продаж</a:t>
+            </a:r>
+          </a:p>
+        </p:txBody>
+      </p:sp>
+      <p:sp>
+        <p:nvSpPr>
+          <p:cNvPr id="7" name="TextBox 6"/>
           <p:cNvSpPr txBox="1"/>
           <p:nvPr/>
         </p:nvSpPr>
         <p:spPr>
           <a:xfrm>
-            <a:off x="6355080" y="1965960"/>
-            <a:ext cx="4754880" cy="365760"/>
+            <a:off x="1892808" y="2148840"/>
+            <a:ext cx="3977640" cy="1143000"/>
           </a:xfrm>
           <a:prstGeom prst="rect">
             <a:avLst/>
@@ -13312,25 +14568,25 @@
                 <a:ea typeface="Verdana"/>
                 <a:cs typeface="Verdana"/>
               </a:rPr>
-              <a:t>Быстро проверить спрос и набрать практику подключений.</a:t>
-            </a:r>
-          </a:p>
-        </p:txBody>
-      </p:sp>
-      <p:sp>
-        <p:nvSpPr>
-          <p:cNvPr id="11" name="Rounded Rectangle 10"/>
+              <a:t>Скрипт: Кабинет сотрудника → Доки → Смартвей → Доки.Логистика, плюс отработка возражений.</a:t>
+            </a:r>
+          </a:p>
+        </p:txBody>
+      </p:sp>
+      <p:sp>
+        <p:nvSpPr>
+          <p:cNvPr id="8" name="Rounded Rectangle 7"/>
           <p:cNvSpPr/>
           <p:nvPr/>
         </p:nvSpPr>
         <p:spPr>
           <a:xfrm>
-            <a:off x="6126480" y="2514600"/>
-            <a:ext cx="5166360" cy="868680"/>
+            <a:off x="6327648" y="1463040"/>
+            <a:ext cx="5212080" cy="2011680"/>
           </a:xfrm>
           <a:prstGeom prst="roundRect">
             <a:avLst>
-              <a:gd name="adj" fmla="val 6000"/>
+              <a:gd name="adj" fmla="val 8000"/>
             </a:avLst>
           </a:prstGeom>
           <a:solidFill>
@@ -13362,16 +14618,40 @@
           </a:p>
         </p:txBody>
       </p:sp>
-      <p:sp>
-        <p:nvSpPr>
-          <p:cNvPr id="12" name="TextBox 11"/>
+      <p:pic>
+        <p:nvPicPr>
+          <p:cNvPr id="9" name="Picture 8" descr="icon_22.png"/>
+          <p:cNvPicPr>
+            <a:picLocks noChangeAspect="1"/>
+          </p:cNvPicPr>
+          <p:nvPr/>
+        </p:nvPicPr>
+        <p:blipFill>
+          <a:blip r:embed="rId3"/>
+          <a:stretch>
+            <a:fillRect/>
+          </a:stretch>
+        </p:blipFill>
+        <p:spPr>
+          <a:xfrm>
+            <a:off x="6528816" y="1965960"/>
+            <a:ext cx="640080" cy="640080"/>
+          </a:xfrm>
+          <a:prstGeom prst="rect">
+            <a:avLst/>
+          </a:prstGeom>
+        </p:spPr>
+      </p:pic>
+      <p:sp>
+        <p:nvSpPr>
+          <p:cNvPr id="10" name="TextBox 9"/>
           <p:cNvSpPr txBox="1"/>
           <p:nvPr/>
         </p:nvSpPr>
         <p:spPr>
           <a:xfrm>
-            <a:off x="6355080" y="2624328"/>
-            <a:ext cx="4754880" cy="256032"/>
+            <a:off x="7333488" y="1719072"/>
+            <a:ext cx="3977640" cy="365760"/>
           </a:xfrm>
           <a:prstGeom prst="rect">
             <a:avLst/>
@@ -13386,7 +14666,7 @@
           <a:p>
             <a:pPr algn="l"/>
             <a:r>
-              <a:rPr sz="1300" b="1">
+              <a:rPr sz="1500" b="1">
                 <a:solidFill>
                   <a:srgbClr val="26A6E0"/>
                 </a:solidFill>
@@ -13394,21 +14674,21 @@
                 <a:ea typeface="Verdana"/>
                 <a:cs typeface="Verdana"/>
               </a:rPr>
-              <a:t>Что важно дальше</a:t>
-            </a:r>
-          </a:p>
-        </p:txBody>
-      </p:sp>
-      <p:sp>
-        <p:nvSpPr>
-          <p:cNvPr id="13" name="TextBox 12"/>
+              <a:t>Материалы для рассылки</a:t>
+            </a:r>
+          </a:p>
+        </p:txBody>
+      </p:sp>
+      <p:sp>
+        <p:nvSpPr>
+          <p:cNvPr id="11" name="TextBox 10"/>
           <p:cNvSpPr txBox="1"/>
           <p:nvPr/>
         </p:nvSpPr>
         <p:spPr>
           <a:xfrm>
-            <a:off x="6355080" y="2926080"/>
-            <a:ext cx="4754880" cy="365760"/>
+            <a:off x="7333488" y="2148840"/>
+            <a:ext cx="3977640" cy="1143000"/>
           </a:xfrm>
           <a:prstGeom prst="rect">
             <a:avLst/>
@@ -13431,25 +14711,25 @@
                 <a:ea typeface="Verdana"/>
                 <a:cs typeface="Verdana"/>
               </a:rPr>
-              <a:t>Отслеживать переход на платный тариф после 3 месяцев.</a:t>
-            </a:r>
-          </a:p>
-        </p:txBody>
-      </p:sp>
-      <p:sp>
-        <p:nvSpPr>
-          <p:cNvPr id="14" name="Rounded Rectangle 13"/>
+              <a:t>Готовые блоки и тексты для партнёрских и клиентских коммуникаций.</a:t>
+            </a:r>
+          </a:p>
+        </p:txBody>
+      </p:sp>
+      <p:sp>
+        <p:nvSpPr>
+          <p:cNvPr id="12" name="Rounded Rectangle 11"/>
           <p:cNvSpPr/>
           <p:nvPr/>
         </p:nvSpPr>
         <p:spPr>
           <a:xfrm>
-            <a:off x="6126480" y="3474720"/>
-            <a:ext cx="5166360" cy="868680"/>
+            <a:off x="886968" y="3657600"/>
+            <a:ext cx="5212080" cy="2011680"/>
           </a:xfrm>
           <a:prstGeom prst="roundRect">
             <a:avLst>
-              <a:gd name="adj" fmla="val 6000"/>
+              <a:gd name="adj" fmla="val 8000"/>
             </a:avLst>
           </a:prstGeom>
           <a:solidFill>
@@ -13481,16 +14761,40 @@
           </a:p>
         </p:txBody>
       </p:sp>
-      <p:sp>
-        <p:nvSpPr>
-          <p:cNvPr id="15" name="TextBox 14"/>
+      <p:pic>
+        <p:nvPicPr>
+          <p:cNvPr id="13" name="Picture 12" descr="icon_59.png"/>
+          <p:cNvPicPr>
+            <a:picLocks noChangeAspect="1"/>
+          </p:cNvPicPr>
+          <p:nvPr/>
+        </p:nvPicPr>
+        <p:blipFill>
+          <a:blip r:embed="rId4"/>
+          <a:stretch>
+            <a:fillRect/>
+          </a:stretch>
+        </p:blipFill>
+        <p:spPr>
+          <a:xfrm>
+            <a:off x="1088136" y="4160520"/>
+            <a:ext cx="640080" cy="640080"/>
+          </a:xfrm>
+          <a:prstGeom prst="rect">
+            <a:avLst/>
+          </a:prstGeom>
+        </p:spPr>
+      </p:pic>
+      <p:sp>
+        <p:nvSpPr>
+          <p:cNvPr id="14" name="TextBox 13"/>
           <p:cNvSpPr txBox="1"/>
           <p:nvPr/>
         </p:nvSpPr>
         <p:spPr>
           <a:xfrm>
-            <a:off x="6355080" y="3584448"/>
-            <a:ext cx="4754880" cy="256032"/>
+            <a:off x="1892808" y="3913632"/>
+            <a:ext cx="3977640" cy="365760"/>
           </a:xfrm>
           <a:prstGeom prst="rect">
             <a:avLst/>
@@ -13505,7 +14809,7 @@
           <a:p>
             <a:pPr algn="l"/>
             <a:r>
-              <a:rPr sz="1300" b="1">
+              <a:rPr sz="1500" b="1">
                 <a:solidFill>
                   <a:srgbClr val="26A6E0"/>
                 </a:solidFill>
@@ -13513,21 +14817,21 @@
                 <a:ea typeface="Verdana"/>
                 <a:cs typeface="Verdana"/>
               </a:rPr>
-              <a:t>Риск</a:t>
-            </a:r>
-          </a:p>
-        </p:txBody>
-      </p:sp>
-      <p:sp>
-        <p:nvSpPr>
-          <p:cNvPr id="16" name="TextBox 15"/>
+              <a:t>Сравнение 1С-ЭПД и Доки</a:t>
+            </a:r>
+          </a:p>
+        </p:txBody>
+      </p:sp>
+      <p:sp>
+        <p:nvSpPr>
+          <p:cNvPr id="15" name="TextBox 14"/>
           <p:cNvSpPr txBox="1"/>
           <p:nvPr/>
         </p:nvSpPr>
         <p:spPr>
           <a:xfrm>
-            <a:off x="6355080" y="3886200"/>
-            <a:ext cx="4754880" cy="365760"/>
+            <a:off x="1892808" y="4343400"/>
+            <a:ext cx="3977640" cy="1143000"/>
           </a:xfrm>
           <a:prstGeom prst="rect">
             <a:avLst/>
@@ -13550,25 +14854,25 @@
                 <a:ea typeface="Verdana"/>
                 <a:cs typeface="Verdana"/>
               </a:rPr>
-              <a:t>Без контроля продлений «бесплатный старт» не превратится в выручку.</a:t>
-            </a:r>
-          </a:p>
-        </p:txBody>
-      </p:sp>
-      <p:sp>
-        <p:nvSpPr>
-          <p:cNvPr id="17" name="Rounded Rectangle 16"/>
+              <a:t>Когда предлагать 1С-ЭПД, а когда — Доки / Доки.Логистика. Обзор и сравнение.</a:t>
+            </a:r>
+          </a:p>
+        </p:txBody>
+      </p:sp>
+      <p:sp>
+        <p:nvSpPr>
+          <p:cNvPr id="16" name="Rounded Rectangle 15"/>
           <p:cNvSpPr/>
           <p:nvPr/>
         </p:nvSpPr>
         <p:spPr>
           <a:xfrm>
-            <a:off x="6126480" y="4434840"/>
-            <a:ext cx="5166360" cy="868680"/>
+            <a:off x="6327648" y="3657600"/>
+            <a:ext cx="5212080" cy="2011680"/>
           </a:xfrm>
           <a:prstGeom prst="roundRect">
             <a:avLst>
-              <a:gd name="adj" fmla="val 6000"/>
+              <a:gd name="adj" fmla="val 8000"/>
             </a:avLst>
           </a:prstGeom>
           <a:solidFill>
@@ -13600,6 +14904,30 @@
           </a:p>
         </p:txBody>
       </p:sp>
+      <p:pic>
+        <p:nvPicPr>
+          <p:cNvPr id="17" name="Picture 16" descr="icon_67.png"/>
+          <p:cNvPicPr>
+            <a:picLocks noChangeAspect="1"/>
+          </p:cNvPicPr>
+          <p:nvPr/>
+        </p:nvPicPr>
+        <p:blipFill>
+          <a:blip r:embed="rId5"/>
+          <a:stretch>
+            <a:fillRect/>
+          </a:stretch>
+        </p:blipFill>
+        <p:spPr>
+          <a:xfrm>
+            <a:off x="6528816" y="4160520"/>
+            <a:ext cx="640080" cy="640080"/>
+          </a:xfrm>
+          <a:prstGeom prst="rect">
+            <a:avLst/>
+          </a:prstGeom>
+        </p:spPr>
+      </p:pic>
       <p:sp>
         <p:nvSpPr>
           <p:cNvPr id="18" name="TextBox 17"/>
@@ -13608,8 +14936,8 @@
         </p:nvSpPr>
         <p:spPr>
           <a:xfrm>
-            <a:off x="6355080" y="4544568"/>
-            <a:ext cx="4754880" cy="256032"/>
+            <a:off x="7333488" y="3913632"/>
+            <a:ext cx="3977640" cy="365760"/>
           </a:xfrm>
           <a:prstGeom prst="rect">
             <a:avLst/>
@@ -13624,7 +14952,7 @@
           <a:p>
             <a:pPr algn="l"/>
             <a:r>
-              <a:rPr sz="1300" b="1">
+              <a:rPr sz="1500" b="1">
                 <a:solidFill>
                   <a:srgbClr val="26A6E0"/>
                 </a:solidFill>
@@ -13632,7 +14960,7 @@
                 <a:ea typeface="Verdana"/>
                 <a:cs typeface="Verdana"/>
               </a:rPr>
-              <a:t>Для тиражирования</a:t>
+              <a:t>КП, тарифы, шаблоны</a:t>
             </a:r>
           </a:p>
         </p:txBody>
@@ -13645,8 +14973,8 @@
         </p:nvSpPr>
         <p:spPr>
           <a:xfrm>
-            <a:off x="6355080" y="4846320"/>
-            <a:ext cx="4754880" cy="365760"/>
+            <a:off x="7333488" y="4343400"/>
+            <a:ext cx="3977640" cy="1143000"/>
           </a:xfrm>
           <a:prstGeom prst="rect">
             <a:avLst/>
@@ -13669,7 +14997,7 @@
                 <a:ea typeface="Verdana"/>
                 <a:cs typeface="Verdana"/>
               </a:rPr>
-              <a:t>Оффер оставить, но добавить KPI по оплате после пробного периода.</a:t>
+              <a:t>Коммерческие предложения, тарифы, клиентские шаблоны презентаций — всё в репозитории.</a:t>
             </a:r>
           </a:p>
         </p:txBody>
@@ -13717,7 +15045,7 @@
                 <a:ea typeface="Verdana"/>
                 <a:cs typeface="Verdana"/>
               </a:rPr>
-              <a:t>Выводы по проекту</a:t>
+              <a:t>Как использовать материалы</a:t>
             </a:r>
           </a:p>
         </p:txBody>
@@ -13741,18 +15069,55 @@
       </p:sp>
       <p:sp>
         <p:nvSpPr>
-          <p:cNvPr id="4" name="Rounded Rectangle 3"/>
+          <p:cNvPr id="4" name="TextBox 3"/>
+          <p:cNvSpPr txBox="1"/>
+          <p:nvPr/>
+        </p:nvSpPr>
+        <p:spPr>
+          <a:xfrm>
+            <a:off x="886968" y="1234440"/>
+            <a:ext cx="10424160" cy="365760"/>
+          </a:xfrm>
+          <a:prstGeom prst="rect">
+            <a:avLst/>
+          </a:prstGeom>
+          <a:noFill/>
+        </p:spPr>
+        <p:txBody>
+          <a:bodyPr wrap="square" anchor="t">
+            <a:spAutoFit/>
+          </a:bodyPr>
+          <a:lstStyle/>
+          <a:p>
+            <a:pPr algn="l"/>
+            <a:r>
+              <a:rPr sz="1300" b="0">
+                <a:solidFill>
+                  <a:srgbClr val="BFBFBF"/>
+                </a:solidFill>
+                <a:latin typeface="Verdana"/>
+                <a:ea typeface="Verdana"/>
+                <a:cs typeface="Verdana"/>
+              </a:rPr>
+              <a:t>Простая схема для новой группы: что брать в работу и в какой момент.</a:t>
+            </a:r>
+          </a:p>
+        </p:txBody>
+      </p:sp>
+      <p:sp>
+        <p:nvSpPr>
+          <p:cNvPr id="5" name="Rounded Rectangle 4"/>
           <p:cNvSpPr/>
           <p:nvPr/>
         </p:nvSpPr>
         <p:spPr>
           <a:xfrm>
-            <a:off x="886968" y="1417320"/>
-            <a:ext cx="10424160" cy="914400"/>
+            <a:off x="886968" y="1691640"/>
+            <a:ext cx="2468880" cy="2331720"/>
           </a:xfrm>
           <a:prstGeom prst="roundRect">
             <a:avLst>
-              <a:gd name="adj" fmla="val 6000"/>
+              <a:gd name="adj" fmla="val 8000"/>
             </a:avLst>
           </a:prstGeom>
           <a:solidFill>
@@ -13786,14 +15151,14 @@
       </p:sp>
       <p:sp>
         <p:nvSpPr>
-          <p:cNvPr id="5" name="Oval 4"/>
+          <p:cNvPr id="6" name="Oval 5"/>
           <p:cNvSpPr/>
           <p:nvPr/>
         </p:nvSpPr>
         <p:spPr>
           <a:xfrm>
-            <a:off x="1097280" y="1673352"/>
-            <a:ext cx="411480" cy="411480"/>
+            <a:off x="1847088" y="1874520"/>
+            <a:ext cx="502920" cy="502920"/>
           </a:xfrm>
           <a:prstGeom prst="ellipse">
             <a:avLst/>
@@ -13829,14 +15194,14 @@
       </p:sp>
       <p:sp>
         <p:nvSpPr>
-          <p:cNvPr id="6" name="TextBox 5"/>
+          <p:cNvPr id="7" name="TextBox 6"/>
           <p:cNvSpPr txBox="1"/>
           <p:nvPr/>
         </p:nvSpPr>
         <p:spPr>
           <a:xfrm>
-            <a:off x="1097280" y="1673352"/>
-            <a:ext cx="411480" cy="411480"/>
+            <a:off x="1847088" y="1874520"/>
+            <a:ext cx="502920" cy="502920"/>
           </a:xfrm>
           <a:prstGeom prst="rect">
             <a:avLst/>
@@ -13851,7 +15216,7 @@
           <a:p>
             <a:pPr algn="ctr"/>
             <a:r>
-              <a:rPr sz="1400" b="1">
+              <a:rPr sz="1600" b="1">
                 <a:solidFill>
                   <a:srgbClr val="FFFFFF"/>
                 </a:solidFill>
@@ -13866,14 +15231,14 @@
       </p:sp>
       <p:sp>
         <p:nvSpPr>
-          <p:cNvPr id="7" name="TextBox 6"/>
+          <p:cNvPr id="8" name="TextBox 7"/>
           <p:cNvSpPr txBox="1"/>
           <p:nvPr/>
         </p:nvSpPr>
         <p:spPr>
           <a:xfrm>
-            <a:off x="1737360" y="1554480"/>
-            <a:ext cx="9235440" cy="292608"/>
+            <a:off x="1024128" y="2514600"/>
+            <a:ext cx="2194560" cy="365760"/>
           </a:xfrm>
           <a:prstGeom prst="rect">
             <a:avLst/>
@@ -13886,9 +15251,9 @@
           </a:bodyPr>
           <a:lstStyle/>
           <a:p>
-            <a:pPr algn="l"/>
-            <a:r>
-              <a:rPr sz="1400" b="1">
+            <a:pPr algn="ctr"/>
+            <a:r>
+              <a:rPr sz="1300" b="1">
                 <a:solidFill>
                   <a:srgbClr val="26A6E0"/>
                 </a:solidFill>
@@ -13896,21 +15261,21 @@
                 <a:ea typeface="Verdana"/>
                 <a:cs typeface="Verdana"/>
               </a:rPr>
-              <a:t>Обе гипотезы подтверждены</a:t>
-            </a:r>
-          </a:p>
-        </p:txBody>
-      </p:sp>
-      <p:sp>
-        <p:nvSpPr>
-          <p:cNvPr id="8" name="TextBox 7"/>
+              <a:t>Выбрать вход</a:t>
+            </a:r>
+          </a:p>
+        </p:txBody>
+      </p:sp>
+      <p:sp>
+        <p:nvSpPr>
+          <p:cNvPr id="9" name="TextBox 8"/>
           <p:cNvSpPr txBox="1"/>
           <p:nvPr/>
         </p:nvSpPr>
         <p:spPr>
           <a:xfrm>
-            <a:off x="1737360" y="1874520"/>
-            <a:ext cx="9235440" cy="365760"/>
+            <a:off x="1024128" y="2926080"/>
+            <a:ext cx="2194560" cy="960120"/>
           </a:xfrm>
           <a:prstGeom prst="rect">
             <a:avLst/>
@@ -13923,9 +15288,9 @@
           </a:bodyPr>
           <a:lstStyle/>
           <a:p>
-            <a:pPr algn="l"/>
-            <a:r>
-              <a:rPr sz="1300" b="0">
+            <a:pPr algn="ctr"/>
+            <a:r>
+              <a:rPr sz="1100" b="0">
                 <a:solidFill>
                   <a:srgbClr val="FFFFFF"/>
                 </a:solidFill>
@@ -13933,25 +15298,27 @@
                 <a:ea typeface="Verdana"/>
                 <a:cs typeface="Verdana"/>
               </a:rPr>
-              <a:t>По 9 продаж на каждый канал. Нет «слабого» направления — оба входа можно масштабировать.</a:t>
-            </a:r>
-          </a:p>
-        </p:txBody>
-      </p:sp>
-      <p:sp>
-        <p:nvSpPr>
-          <p:cNvPr id="9" name="Rounded Rectangle 8"/>
+              <a:t>База ЭПД → Доки
+или скрипт связки
+КабС–Доки–Смартвей–Доки.Логистика</a:t>
+            </a:r>
+          </a:p>
+        </p:txBody>
+      </p:sp>
+      <p:sp>
+        <p:nvSpPr>
+          <p:cNvPr id="10" name="Rounded Rectangle 9"/>
           <p:cNvSpPr/>
           <p:nvPr/>
         </p:nvSpPr>
         <p:spPr>
           <a:xfrm>
-            <a:off x="886968" y="2468880"/>
-            <a:ext cx="10424160" cy="914400"/>
+            <a:off x="3538728" y="1691640"/>
+            <a:ext cx="2468880" cy="2331720"/>
           </a:xfrm>
           <a:prstGeom prst="roundRect">
             <a:avLst>
-              <a:gd name="adj" fmla="val 6000"/>
+              <a:gd name="adj" fmla="val 8000"/>
             </a:avLst>
           </a:prstGeom>
           <a:solidFill>
@@ -13985,14 +15352,14 @@
       </p:sp>
       <p:sp>
         <p:nvSpPr>
-          <p:cNvPr id="10" name="Oval 9"/>
+          <p:cNvPr id="11" name="Oval 10"/>
           <p:cNvSpPr/>
           <p:nvPr/>
         </p:nvSpPr>
         <p:spPr>
           <a:xfrm>
-            <a:off x="1097280" y="2724912"/>
-            <a:ext cx="411480" cy="411480"/>
+            <a:off x="4498848" y="1874520"/>
+            <a:ext cx="502920" cy="502920"/>
           </a:xfrm>
           <a:prstGeom prst="ellipse">
             <a:avLst/>
@@ -14028,14 +15395,14 @@
       </p:sp>
       <p:sp>
         <p:nvSpPr>
-          <p:cNvPr id="11" name="TextBox 10"/>
+          <p:cNvPr id="12" name="TextBox 11"/>
           <p:cNvSpPr txBox="1"/>
           <p:nvPr/>
         </p:nvSpPr>
         <p:spPr>
           <a:xfrm>
-            <a:off x="1097280" y="2724912"/>
-            <a:ext cx="411480" cy="411480"/>
+            <a:off x="4498848" y="1874520"/>
+            <a:ext cx="502920" cy="502920"/>
           </a:xfrm>
           <a:prstGeom prst="rect">
             <a:avLst/>
@@ -14050,7 +15417,7 @@
           <a:p>
             <a:pPr algn="ctr"/>
             <a:r>
-              <a:rPr sz="1400" b="1">
+              <a:rPr sz="1600" b="1">
                 <a:solidFill>
                   <a:srgbClr val="FFFFFF"/>
                 </a:solidFill>
@@ -14065,14 +15432,14 @@
       </p:sp>
       <p:sp>
         <p:nvSpPr>
-          <p:cNvPr id="12" name="TextBox 11"/>
+          <p:cNvPr id="13" name="TextBox 12"/>
           <p:cNvSpPr txBox="1"/>
           <p:nvPr/>
         </p:nvSpPr>
         <p:spPr>
           <a:xfrm>
-            <a:off x="1737360" y="2606040"/>
-            <a:ext cx="9235440" cy="292608"/>
+            <a:off x="3675888" y="2514600"/>
+            <a:ext cx="2194560" cy="365760"/>
           </a:xfrm>
           <a:prstGeom prst="rect">
             <a:avLst/>
@@ -14085,9 +15452,9 @@
           </a:bodyPr>
           <a:lstStyle/>
           <a:p>
-            <a:pPr algn="l"/>
-            <a:r>
-              <a:rPr sz="1400" b="1">
+            <a:pPr algn="ctr"/>
+            <a:r>
+              <a:rPr sz="1300" b="1">
                 <a:solidFill>
                   <a:srgbClr val="26A6E0"/>
                 </a:solidFill>
@@ -14095,21 +15462,21 @@
                 <a:ea typeface="Verdana"/>
                 <a:cs typeface="Verdana"/>
               </a:rPr>
-              <a:t>Доки продаётся как отдельно, так и в связке</a:t>
-            </a:r>
-          </a:p>
-        </p:txBody>
-      </p:sp>
-      <p:sp>
-        <p:nvSpPr>
-          <p:cNvPr id="13" name="TextBox 12"/>
+              <a:t>Открыть скрипт</a:t>
+            </a:r>
+          </a:p>
+        </p:txBody>
+      </p:sp>
+      <p:sp>
+        <p:nvSpPr>
+          <p:cNvPr id="14" name="TextBox 13"/>
           <p:cNvSpPr txBox="1"/>
           <p:nvPr/>
         </p:nvSpPr>
         <p:spPr>
           <a:xfrm>
-            <a:off x="1737360" y="2926080"/>
-            <a:ext cx="9235440" cy="365760"/>
+            <a:off x="3675888" y="2926080"/>
+            <a:ext cx="2194560" cy="960120"/>
           </a:xfrm>
           <a:prstGeom prst="rect">
             <a:avLst/>
@@ -14122,9 +15489,9 @@
           </a:bodyPr>
           <a:lstStyle/>
           <a:p>
-            <a:pPr algn="l"/>
-            <a:r>
-              <a:rPr sz="1300" b="0">
+            <a:pPr algn="ctr"/>
+            <a:r>
+              <a:rPr sz="1100" b="0">
                 <a:solidFill>
                   <a:srgbClr val="FFFFFF"/>
                 </a:solidFill>
@@ -14132,25 +15499,27 @@
                 <a:ea typeface="Verdana"/>
                 <a:cs typeface="Verdana"/>
               </a:rPr>
-              <a:t>Работает и как альтернатива 1С-ЭПД, и как часть скрипта с КабС / Смартвей / Доки.Логистика.</a:t>
-            </a:r>
-          </a:p>
-        </p:txBody>
-      </p:sp>
-      <p:sp>
-        <p:nvSpPr>
-          <p:cNvPr id="14" name="Rounded Rectangle 13"/>
+              <a:t>Файл скрипта в
+репозитории — вести
+разговор по шагам</a:t>
+            </a:r>
+          </a:p>
+        </p:txBody>
+      </p:sp>
+      <p:sp>
+        <p:nvSpPr>
+          <p:cNvPr id="15" name="Rounded Rectangle 14"/>
           <p:cNvSpPr/>
           <p:nvPr/>
         </p:nvSpPr>
         <p:spPr>
           <a:xfrm>
-            <a:off x="886968" y="3520440"/>
-            <a:ext cx="10424160" cy="914400"/>
+            <a:off x="6190488" y="1691640"/>
+            <a:ext cx="2468880" cy="2331720"/>
           </a:xfrm>
           <a:prstGeom prst="roundRect">
             <a:avLst>
-              <a:gd name="adj" fmla="val 6000"/>
+              <a:gd name="adj" fmla="val 8000"/>
             </a:avLst>
           </a:prstGeom>
           <a:solidFill>
@@ -14184,14 +15553,14 @@
       </p:sp>
       <p:sp>
         <p:nvSpPr>
-          <p:cNvPr id="15" name="Oval 14"/>
+          <p:cNvPr id="16" name="Oval 15"/>
           <p:cNvSpPr/>
           <p:nvPr/>
         </p:nvSpPr>
         <p:spPr>
           <a:xfrm>
-            <a:off x="1097280" y="3776472"/>
-            <a:ext cx="411480" cy="411480"/>
+            <a:off x="7150608" y="1874520"/>
+            <a:ext cx="502920" cy="502920"/>
           </a:xfrm>
           <a:prstGeom prst="ellipse">
             <a:avLst/>
@@ -14227,14 +15596,14 @@
       </p:sp>
       <p:sp>
         <p:nvSpPr>
-          <p:cNvPr id="16" name="TextBox 15"/>
+          <p:cNvPr id="17" name="TextBox 16"/>
           <p:cNvSpPr txBox="1"/>
           <p:nvPr/>
         </p:nvSpPr>
         <p:spPr>
           <a:xfrm>
-            <a:off x="1097280" y="3776472"/>
-            <a:ext cx="411480" cy="411480"/>
+            <a:off x="7150608" y="1874520"/>
+            <a:ext cx="502920" cy="502920"/>
           </a:xfrm>
           <a:prstGeom prst="rect">
             <a:avLst/>
@@ -14249,7 +15618,7 @@
           <a:p>
             <a:pPr algn="ctr"/>
             <a:r>
-              <a:rPr sz="1400" b="1">
+              <a:rPr sz="1600" b="1">
                 <a:solidFill>
                   <a:srgbClr val="FFFFFF"/>
                 </a:solidFill>
@@ -14264,14 +15633,14 @@
       </p:sp>
       <p:sp>
         <p:nvSpPr>
-          <p:cNvPr id="17" name="TextBox 16"/>
+          <p:cNvPr id="18" name="TextBox 17"/>
           <p:cNvSpPr txBox="1"/>
           <p:nvPr/>
         </p:nvSpPr>
         <p:spPr>
           <a:xfrm>
-            <a:off x="1737360" y="3657600"/>
-            <a:ext cx="9235440" cy="292608"/>
+            <a:off x="6327648" y="2514600"/>
+            <a:ext cx="2194560" cy="365760"/>
           </a:xfrm>
           <a:prstGeom prst="rect">
             <a:avLst/>
@@ -14284,9 +15653,9 @@
           </a:bodyPr>
           <a:lstStyle/>
           <a:p>
-            <a:pPr algn="l"/>
-            <a:r>
-              <a:rPr sz="1400" b="1">
+            <a:pPr algn="ctr"/>
+            <a:r>
+              <a:rPr sz="1300" b="1">
                 <a:solidFill>
                   <a:srgbClr val="26A6E0"/>
                 </a:solidFill>
@@ -14294,21 +15663,21 @@
                 <a:ea typeface="Verdana"/>
                 <a:cs typeface="Verdana"/>
               </a:rPr>
-              <a:t>Пакет для тиражирования уже собран</a:t>
-            </a:r>
-          </a:p>
-        </p:txBody>
-      </p:sp>
-      <p:sp>
-        <p:nvSpPr>
-          <p:cNvPr id="18" name="TextBox 17"/>
+              <a:t>Дать материал</a:t>
+            </a:r>
+          </a:p>
+        </p:txBody>
+      </p:sp>
+      <p:sp>
+        <p:nvSpPr>
+          <p:cNvPr id="19" name="TextBox 18"/>
           <p:cNvSpPr txBox="1"/>
           <p:nvPr/>
         </p:nvSpPr>
         <p:spPr>
           <a:xfrm>
-            <a:off x="1737360" y="3977640"/>
-            <a:ext cx="9235440" cy="365760"/>
+            <a:off x="6327648" y="2926080"/>
+            <a:ext cx="2194560" cy="960120"/>
           </a:xfrm>
           <a:prstGeom prst="rect">
             <a:avLst/>
@@ -14321,9 +15690,9 @@
           </a:bodyPr>
           <a:lstStyle/>
           <a:p>
-            <a:pPr algn="l"/>
-            <a:r>
-              <a:rPr sz="1300" b="0">
+            <a:pPr algn="ctr"/>
+            <a:r>
+              <a:rPr sz="1100" b="0">
                 <a:solidFill>
                   <a:srgbClr val="FFFFFF"/>
                 </a:solidFill>
@@ -14331,25 +15700,27 @@
                 <a:ea typeface="Verdana"/>
                 <a:cs typeface="Verdana"/>
               </a:rPr>
-              <a:t>Скрипты, рассылки, сравнение, КП и шаблоны лежат в репозитории — новой группе не нужно начинать с нуля.</a:t>
-            </a:r>
-          </a:p>
-        </p:txBody>
-      </p:sp>
-      <p:sp>
-        <p:nvSpPr>
-          <p:cNvPr id="19" name="Rounded Rectangle 18"/>
+              <a:t>Сравнение / КП /
+шаблон презентации /
+блок в рассылку</a:t>
+            </a:r>
+          </a:p>
+        </p:txBody>
+      </p:sp>
+      <p:sp>
+        <p:nvSpPr>
+          <p:cNvPr id="20" name="Rounded Rectangle 19"/>
           <p:cNvSpPr/>
           <p:nvPr/>
         </p:nvSpPr>
         <p:spPr>
           <a:xfrm>
-            <a:off x="886968" y="4572000"/>
-            <a:ext cx="10424160" cy="914400"/>
+            <a:off x="8842248" y="1691640"/>
+            <a:ext cx="2468880" cy="2331720"/>
           </a:xfrm>
           <a:prstGeom prst="roundRect">
             <a:avLst>
-              <a:gd name="adj" fmla="val 6000"/>
+              <a:gd name="adj" fmla="val 8000"/>
             </a:avLst>
           </a:prstGeom>
           <a:solidFill>
@@ -14383,14 +15754,14 @@
       </p:sp>
       <p:sp>
         <p:nvSpPr>
-          <p:cNvPr id="20" name="Oval 19"/>
+          <p:cNvPr id="21" name="Oval 20"/>
           <p:cNvSpPr/>
           <p:nvPr/>
         </p:nvSpPr>
         <p:spPr>
           <a:xfrm>
-            <a:off x="1097280" y="4828032"/>
-            <a:ext cx="411480" cy="411480"/>
+            <a:off x="9802368" y="1874520"/>
+            <a:ext cx="502920" cy="502920"/>
           </a:xfrm>
           <a:prstGeom prst="ellipse">
             <a:avLst/>
@@ -14426,14 +15797,14 @@
       </p:sp>
       <p:sp>
         <p:nvSpPr>
-          <p:cNvPr id="21" name="TextBox 20"/>
+          <p:cNvPr id="22" name="TextBox 21"/>
           <p:cNvSpPr txBox="1"/>
           <p:nvPr/>
         </p:nvSpPr>
         <p:spPr>
           <a:xfrm>
-            <a:off x="1097280" y="4828032"/>
-            <a:ext cx="411480" cy="411480"/>
+            <a:off x="9802368" y="1874520"/>
+            <a:ext cx="502920" cy="502920"/>
           </a:xfrm>
           <a:prstGeom prst="rect">
             <a:avLst/>
@@ -14448,7 +15819,7 @@
           <a:p>
             <a:pPr algn="ctr"/>
             <a:r>
-              <a:rPr sz="1400" b="1">
+              <a:rPr sz="1600" b="1">
                 <a:solidFill>
                   <a:srgbClr val="FFFFFF"/>
                 </a:solidFill>
@@ -14463,14 +15834,14 @@
       </p:sp>
       <p:sp>
         <p:nvSpPr>
-          <p:cNvPr id="22" name="TextBox 21"/>
+          <p:cNvPr id="23" name="TextBox 22"/>
           <p:cNvSpPr txBox="1"/>
           <p:nvPr/>
         </p:nvSpPr>
         <p:spPr>
           <a:xfrm>
-            <a:off x="1737360" y="4709160"/>
-            <a:ext cx="9235440" cy="292608"/>
+            <a:off x="8979408" y="2514600"/>
+            <a:ext cx="2194560" cy="365760"/>
           </a:xfrm>
           <a:prstGeom prst="rect">
             <a:avLst/>
@@ -14483,9 +15854,9 @@
           </a:bodyPr>
           <a:lstStyle/>
           <a:p>
-            <a:pPr algn="l"/>
-            <a:r>
-              <a:rPr sz="1400" b="1">
+            <a:pPr algn="ctr"/>
+            <a:r>
+              <a:rPr sz="1300" b="1">
                 <a:solidFill>
                   <a:srgbClr val="26A6E0"/>
                 </a:solidFill>
@@ -14493,21 +15864,21 @@
                 <a:ea typeface="Verdana"/>
                 <a:cs typeface="Verdana"/>
               </a:rPr>
-              <a:t>Пилот закрыл вопрос «продаётся ли»</a:t>
-            </a:r>
-          </a:p>
-        </p:txBody>
-      </p:sp>
-      <p:sp>
-        <p:nvSpPr>
-          <p:cNvPr id="23" name="TextBox 22"/>
+              <a:t>Закрыть оффером</a:t>
+            </a:r>
+          </a:p>
+        </p:txBody>
+      </p:sp>
+      <p:sp>
+        <p:nvSpPr>
+          <p:cNvPr id="24" name="TextBox 23"/>
           <p:cNvSpPr txBox="1"/>
           <p:nvPr/>
         </p:nvSpPr>
         <p:spPr>
           <a:xfrm>
-            <a:off x="1737360" y="5029200"/>
-            <a:ext cx="9235440" cy="365760"/>
+            <a:off x="8979408" y="2926080"/>
+            <a:ext cx="2194560" cy="960120"/>
           </a:xfrm>
           <a:prstGeom prst="rect">
             <a:avLst/>
@@ -14520,9 +15891,9 @@
           </a:bodyPr>
           <a:lstStyle/>
           <a:p>
-            <a:pPr algn="l"/>
-            <a:r>
-              <a:rPr sz="1300" b="0">
+            <a:pPr algn="ctr"/>
+            <a:r>
+              <a:rPr sz="1100" b="0">
                 <a:solidFill>
                   <a:srgbClr val="FFFFFF"/>
                 </a:solidFill>
@@ -14530,7 +15901,50 @@
                 <a:ea typeface="Verdana"/>
                 <a:cs typeface="Verdana"/>
               </a:rPr>
-              <a:t>Следующий этап — не поиск идеи, а системный процесс: объём, конверсия, продление после 3 месяцев.</a:t>
+              <a:t>3 месяца безлимит
+бесплатно → подключение
+→ контроль продления</a:t>
+            </a:r>
+          </a:p>
+        </p:txBody>
+      </p:sp>
+      <p:sp>
+        <p:nvSpPr>
+          <p:cNvPr id="25" name="TextBox 24"/>
+          <p:cNvSpPr txBox="1"/>
+          <p:nvPr/>
+        </p:nvSpPr>
+        <p:spPr>
+          <a:xfrm>
+            <a:off x="886968" y="4206240"/>
+            <a:ext cx="10424160" cy="1371600"/>
+          </a:xfrm>
+          <a:prstGeom prst="rect">
+            <a:avLst/>
+          </a:prstGeom>
+          <a:noFill/>
+        </p:spPr>
+        <p:txBody>
+          <a:bodyPr wrap="square" anchor="t">
+            <a:spAutoFit/>
+          </a:bodyPr>
+          <a:lstStyle/>
+          <a:p>
+            <a:pPr algn="l"/>
+            <a:r>
+              <a:rPr sz="1200" b="0">
+                <a:solidFill>
+                  <a:srgbClr val="FFFFFF"/>
+                </a:solidFill>
+                <a:latin typeface="Verdana"/>
+                <a:ea typeface="Verdana"/>
+                <a:cs typeface="Verdana"/>
+              </a:rPr>
+              <a:t>Памятка по файлам:
+• Скрипт КабС / Доки / Смартвей — вести звонок
+• Сравнение 1С-ЭПД и Доки — объяснить, что выбрать клиенту
+• Шаблон презентации Доки + КП / тарифы — отправить после интереса
+• Блок в рассылку — для массовых касаний и партнёров</a:t>
             </a:r>
           </a:p>
         </p:txBody>

--- a/presentation/Доки_Аналитика_защита_и_тиражирование.pptx
+++ b/presentation/Доки_Аналитика_защита_и_тиражирование.pptx
@@ -15910,14 +15910,59 @@
       </p:sp>
       <p:sp>
         <p:nvSpPr>
-          <p:cNvPr id="25" name="TextBox 24"/>
+          <p:cNvPr id="25" name="Rounded Rectangle 24"/>
+          <p:cNvSpPr/>
+          <p:nvPr/>
+        </p:nvSpPr>
+        <p:spPr>
+          <a:xfrm>
+            <a:off x="886968" y="4160520"/>
+            <a:ext cx="10424160" cy="1508760"/>
+          </a:xfrm>
+          <a:prstGeom prst="roundRect">
+            <a:avLst>
+              <a:gd name="adj" fmla="val 8000"/>
+            </a:avLst>
+          </a:prstGeom>
+          <a:solidFill>
+            <a:srgbClr val="3F3F3F"/>
+          </a:solidFill>
+          <a:ln>
+            <a:noFill/>
+          </a:ln>
+        </p:spPr>
+        <p:style>
+          <a:lnRef idx="1">
+            <a:schemeClr val="accent1"/>
+          </a:lnRef>
+          <a:fillRef idx="3">
+            <a:schemeClr val="accent1"/>
+          </a:fillRef>
+          <a:effectRef idx="2">
+            <a:schemeClr val="accent1"/>
+          </a:effectRef>
+          <a:fontRef idx="minor">
+            <a:schemeClr val="lt1"/>
+          </a:fontRef>
+        </p:style>
+        <p:txBody>
+          <a:bodyPr rtlCol="0" anchor="ctr"/>
+          <a:lstStyle/>
+          <a:p>
+            <a:pPr algn="ctr"/>
+          </a:p>
+        </p:txBody>
+      </p:sp>
+      <p:sp>
+        <p:nvSpPr>
+          <p:cNvPr id="26" name="TextBox 25"/>
           <p:cNvSpPr txBox="1"/>
           <p:nvPr/>
         </p:nvSpPr>
         <p:spPr>
           <a:xfrm>
-            <a:off x="886968" y="4206240"/>
-            <a:ext cx="10424160" cy="1371600"/>
+            <a:off x="1143000" y="4297680"/>
+            <a:ext cx="9966960" cy="274320"/>
           </a:xfrm>
           <a:prstGeom prst="rect">
             <a:avLst/>
@@ -15932,19 +15977,53 @@
           <a:p>
             <a:pPr algn="l"/>
             <a:r>
-              <a:rPr sz="1200" b="0">
-                <a:solidFill>
-                  <a:srgbClr val="FFFFFF"/>
+              <a:rPr sz="1300" b="1">
+                <a:solidFill>
+                  <a:srgbClr val="26A6E0"/>
                 </a:solidFill>
                 <a:latin typeface="Verdana"/>
                 <a:ea typeface="Verdana"/>
                 <a:cs typeface="Verdana"/>
               </a:rPr>
-              <a:t>Памятка по файлам:
-• Скрипт КабС / Доки / Смартвей — вести звонок
-• Сравнение 1С-ЭПД и Доки — объяснить, что выбрать клиенту
-• Шаблон презентации Доки + КП / тарифы — отправить после интереса
-• Блок в рассылку — для массовых касаний и партнёров</a:t>
+              <a:t>Памятка по файлам</a:t>
+            </a:r>
+          </a:p>
+        </p:txBody>
+      </p:sp>
+      <p:sp>
+        <p:nvSpPr>
+          <p:cNvPr id="27" name="TextBox 26"/>
+          <p:cNvSpPr txBox="1"/>
+          <p:nvPr/>
+        </p:nvSpPr>
+        <p:spPr>
+          <a:xfrm>
+            <a:off x="1143000" y="4663440"/>
+            <a:ext cx="9966960" cy="868680"/>
+          </a:xfrm>
+          <a:prstGeom prst="rect">
+            <a:avLst/>
+          </a:prstGeom>
+          <a:noFill/>
+        </p:spPr>
+        <p:txBody>
+          <a:bodyPr wrap="square" anchor="t">
+            <a:spAutoFit/>
+          </a:bodyPr>
+          <a:lstStyle/>
+          <a:p>
+            <a:pPr algn="l"/>
+            <a:r>
+              <a:rPr sz="1200" b="0">
+                <a:solidFill>
+                  <a:srgbClr val="FFFFFF"/>
+                </a:solidFill>
+                <a:latin typeface="Verdana"/>
+                <a:ea typeface="Verdana"/>
+                <a:cs typeface="Verdana"/>
+              </a:rPr>
+              <a:t>Скрипт КабС / Доки / Смартвей — вести звонок  ·  Сравнение 1С-ЭПД и Доки — объяснить, что выбрать клиенту
+Шаблон презентации Доки + КП / тарифы — отправить после интереса  ·  Блок в рассылку — для массовых касаний и партнёров</a:t>
             </a:r>
           </a:p>
         </p:txBody>
